--- a/output/wordlabs-lift-3day.pptx
+++ b/output/wordlabs-lift-3day.pptx
@@ -4240,7 +4240,7 @@
                 <a:ea typeface="Calibri" pitchFamily="34" charset="-122"/>
                 <a:cs typeface="Calibri" pitchFamily="34" charset="-120"/>
               </a:rPr>
-              <a:t>"to raise or elevate"</a:t>
+              <a:t>"to raise; to pick up"</a:t>
             </a:r>
             <a:endParaRPr lang="en-US" sz="2200" dirty="0"/>
           </a:p>
@@ -4279,7 +4279,7 @@
                 <a:ea typeface="Calibri" pitchFamily="34" charset="-122"/>
                 <a:cs typeface="Calibri" pitchFamily="34" charset="-120"/>
               </a:rPr>
-              <a:t>Origin: Old Norse: lypta</a:t>
+              <a:t>Origin: Anglo-Saxon (Old English) root</a:t>
             </a:r>
             <a:endParaRPr lang="en-US" sz="1300" dirty="0"/>
           </a:p>
@@ -5288,7 +5288,7 @@
                 <a:ea typeface="Calibri" pitchFamily="34" charset="-122"/>
                 <a:cs typeface="Calibri" pitchFamily="34" charset="-120"/>
               </a:rPr>
-              <a:t>Word Labs  •  wordlabs.app  •  Root: 'lift' = to raise or elevate</a:t>
+              <a:t>Word Labs  •  wordlabs.app  •  Root: 'lift' = to raise; to pick up</a:t>
             </a:r>
             <a:endParaRPr lang="en-US" sz="800" dirty="0"/>
           </a:p>
@@ -5622,7 +5622,7 @@
                 <a:ea typeface="Trebuchet MS" pitchFamily="34" charset="-122"/>
                 <a:cs typeface="Trebuchet MS" pitchFamily="34" charset="-120"/>
               </a:rPr>
-              <a:t>1</a:t>
+              <a:t>0</a:t>
             </a:r>
             <a:pPr algn="ctr" indent="0" marL="0">
               <a:buNone/>
@@ -5928,7 +5928,7 @@
                 <a:ea typeface="Calibri" pitchFamily="34" charset="-122"/>
                 <a:cs typeface="Calibri" pitchFamily="34" charset="-120"/>
               </a:rPr>
-              <a:t>Word Labs  •  wordlabs.app  •  Root: 'lift' = to raise or elevate</a:t>
+              <a:t>Word Labs  •  wordlabs.app  •  Root: 'lift' = to raise; to pick up</a:t>
             </a:r>
             <a:endParaRPr lang="en-US" sz="800" dirty="0"/>
           </a:p>
@@ -6040,7 +6040,7 @@
                 <a:ea typeface="Calibri" pitchFamily="34" charset="-122"/>
                 <a:cs typeface="Calibri" pitchFamily="34" charset="-120"/>
               </a:rPr>
-              <a:t>The </a:t>
+              <a:t>He </a:t>
             </a:r>
             <a:pPr algn="l" indent="0" marL="0">
               <a:buNone/>
@@ -6057,7 +6057,7 @@
                 <a:ea typeface="Calibri" pitchFamily="34" charset="-122"/>
                 <a:cs typeface="Calibri" pitchFamily="34" charset="-120"/>
               </a:rPr>
-              <a:t>forklift</a:t>
+              <a:t>lifts</a:t>
             </a:r>
             <a:pPr algn="l" indent="0" marL="0">
               <a:buNone/>
@@ -6071,7 +6071,7 @@
                 <a:ea typeface="Calibri" pitchFamily="34" charset="-122"/>
                 <a:cs typeface="Calibri" pitchFamily="34" charset="-120"/>
               </a:rPr>
-              <a:t> operator carefully moved the heavy crates, and the crowd cheered at </a:t>
+              <a:t> weights every morning before school. She </a:t>
             </a:r>
             <a:pPr algn="l" indent="0" marL="0">
               <a:buNone/>
@@ -6088,7 +6088,7 @@
                 <a:ea typeface="Calibri" pitchFamily="34" charset="-122"/>
                 <a:cs typeface="Calibri" pitchFamily="34" charset="-120"/>
               </a:rPr>
-              <a:t>liftoff</a:t>
+              <a:t>lifted</a:t>
             </a:r>
             <a:pPr algn="l" indent="0" marL="0">
               <a:buNone/>
@@ -6102,7 +6102,7 @@
                 <a:ea typeface="Calibri" pitchFamily="34" charset="-122"/>
                 <a:cs typeface="Calibri" pitchFamily="34" charset="-120"/>
               </a:rPr>
-              <a:t> when the rocket launched.</a:t>
+              <a:t> the heavy box onto the shelf.</a:t>
             </a:r>
             <a:endParaRPr lang="en-US" sz="1800" dirty="0"/>
           </a:p>
@@ -6257,7 +6257,7 @@
                 <a:ea typeface="Trebuchet MS" pitchFamily="34" charset="-122"/>
                 <a:cs typeface="Trebuchet MS" pitchFamily="34" charset="-120"/>
               </a:rPr>
-              <a:t>forklift</a:t>
+              <a:t>lifts</a:t>
             </a:r>
             <a:endParaRPr lang="en-US" sz="1400" dirty="0"/>
           </a:p>
@@ -6385,7 +6385,7 @@
                 <a:ea typeface="Trebuchet MS" pitchFamily="34" charset="-122"/>
                 <a:cs typeface="Trebuchet MS" pitchFamily="34" charset="-120"/>
               </a:rPr>
-              <a:t>liftoff</a:t>
+              <a:t>lifted</a:t>
             </a:r>
             <a:endParaRPr lang="en-US" sz="1400" dirty="0"/>
           </a:p>
@@ -6716,7 +6716,7 @@
                 <a:ea typeface="Calibri" pitchFamily="34" charset="-122"/>
                 <a:cs typeface="Calibri" pitchFamily="34" charset="-120"/>
               </a:rPr>
-              <a:t>Word Labs  •  wordlabs.app  •  Root: 'lift' = to raise or elevate</a:t>
+              <a:t>Word Labs  •  wordlabs.app  •  Root: 'lift' = to raise; to pick up</a:t>
             </a:r>
             <a:endParaRPr lang="en-US" sz="800" dirty="0"/>
           </a:p>
@@ -6855,7 +6855,7 @@
                 <a:ea typeface="Trebuchet MS" pitchFamily="34" charset="-122"/>
                 <a:cs typeface="Trebuchet MS" pitchFamily="34" charset="-120"/>
               </a:rPr>
-              <a:t>forklift</a:t>
+              <a:t>lifts</a:t>
             </a:r>
             <a:endParaRPr lang="en-US" sz="2800" dirty="0"/>
           </a:p>
@@ -7543,7 +7543,7 @@
                 <a:ea typeface="Calibri" pitchFamily="34" charset="-122"/>
                 <a:cs typeface="Calibri" pitchFamily="34" charset="-120"/>
               </a:rPr>
-              <a:t>Word Labs  •  wordlabs.app  •  Root: 'lift' = to raise or elevate</a:t>
+              <a:t>Word Labs  •  wordlabs.app  •  Root: 'lift' = to raise; to pick up</a:t>
             </a:r>
             <a:endParaRPr lang="en-US" sz="800" dirty="0"/>
           </a:p>
@@ -7682,7 +7682,7 @@
                 <a:ea typeface="Trebuchet MS" pitchFamily="34" charset="-122"/>
                 <a:cs typeface="Trebuchet MS" pitchFamily="34" charset="-120"/>
               </a:rPr>
-              <a:t>forklift</a:t>
+              <a:t>lifts</a:t>
             </a:r>
             <a:endParaRPr lang="en-US" sz="2800" dirty="0"/>
           </a:p>
@@ -7771,11 +7771,11 @@
             </a:avLst>
           </a:prstGeom>
           <a:solidFill>
-            <a:srgbClr val="DDD6FE"/>
+            <a:srgbClr val="CCFBF1"/>
           </a:solidFill>
           <a:ln w="19050">
             <a:solidFill>
-              <a:srgbClr val="7C3AED"/>
+              <a:srgbClr val="0D9488"/>
             </a:solidFill>
             <a:prstDash val="solid"/>
           </a:ln>
@@ -7815,13 +7815,13 @@
             <a:r>
               <a:rPr lang="en-US" sz="1300" b="1" dirty="0">
                 <a:solidFill>
-                  <a:srgbClr val="4C1D95"/>
+                  <a:srgbClr val="0F766E"/>
                 </a:solidFill>
                 <a:latin typeface="Trebuchet MS" pitchFamily="34" charset="0"/>
                 <a:ea typeface="Trebuchet MS" pitchFamily="34" charset="-122"/>
                 <a:cs typeface="Trebuchet MS" pitchFamily="34" charset="-120"/>
               </a:rPr>
-              <a:t>fork</a:t>
+              <a:t>lift</a:t>
             </a:r>
             <a:endParaRPr lang="en-US" sz="1300" dirty="0"/>
           </a:p>
@@ -7860,7 +7860,7 @@
                 <a:ea typeface="Calibri" pitchFamily="34" charset="-122"/>
                 <a:cs typeface="Calibri" pitchFamily="34" charset="-120"/>
               </a:rPr>
-              <a:t>pronged tool or shape</a:t>
+              <a:t>to raise; to pick up</a:t>
             </a:r>
             <a:endParaRPr lang="en-US" sz="850" dirty="0"/>
           </a:p>
@@ -7883,11 +7883,11 @@
             </a:avLst>
           </a:prstGeom>
           <a:solidFill>
-            <a:srgbClr val="CCFBF1"/>
+            <a:srgbClr val="FCE7F3"/>
           </a:solidFill>
           <a:ln w="19050">
             <a:solidFill>
-              <a:srgbClr val="0D9488"/>
+              <a:srgbClr val="DB2777"/>
             </a:solidFill>
             <a:prstDash val="solid"/>
           </a:ln>
@@ -7927,13 +7927,13 @@
             <a:r>
               <a:rPr lang="en-US" sz="1300" b="1" dirty="0">
                 <a:solidFill>
-                  <a:srgbClr val="0F766E"/>
+                  <a:srgbClr val="9D174D"/>
                 </a:solidFill>
                 <a:latin typeface="Trebuchet MS" pitchFamily="34" charset="0"/>
                 <a:ea typeface="Trebuchet MS" pitchFamily="34" charset="-122"/>
                 <a:cs typeface="Trebuchet MS" pitchFamily="34" charset="-120"/>
               </a:rPr>
-              <a:t>lift</a:t>
+              <a:t>s</a:t>
             </a:r>
             <a:endParaRPr lang="en-US" sz="1300" dirty="0"/>
           </a:p>
@@ -7972,7 +7972,7 @@
                 <a:ea typeface="Calibri" pitchFamily="34" charset="-122"/>
                 <a:cs typeface="Calibri" pitchFamily="34" charset="-120"/>
               </a:rPr>
-              <a:t>to raise or elevate</a:t>
+              <a:t>plural or present tense</a:t>
             </a:r>
             <a:endParaRPr lang="en-US" sz="850" dirty="0"/>
           </a:p>
@@ -8528,7 +8528,7 @@
                 <a:ea typeface="Calibri" pitchFamily="34" charset="-122"/>
                 <a:cs typeface="Calibri" pitchFamily="34" charset="-120"/>
               </a:rPr>
-              <a:t>Word Labs  •  wordlabs.app  •  Root: 'lift' = to raise or elevate</a:t>
+              <a:t>Word Labs  •  wordlabs.app  •  Root: 'lift' = to raise; to pick up</a:t>
             </a:r>
             <a:endParaRPr lang="en-US" sz="800" dirty="0"/>
           </a:p>
@@ -8667,7 +8667,7 @@
                 <a:ea typeface="Trebuchet MS" pitchFamily="34" charset="-122"/>
                 <a:cs typeface="Trebuchet MS" pitchFamily="34" charset="-120"/>
               </a:rPr>
-              <a:t>forklift</a:t>
+              <a:t>lifts</a:t>
             </a:r>
             <a:endParaRPr lang="en-US" sz="2800" dirty="0"/>
           </a:p>
@@ -8756,11 +8756,11 @@
             </a:avLst>
           </a:prstGeom>
           <a:solidFill>
-            <a:srgbClr val="DDD6FE"/>
+            <a:srgbClr val="CCFBF1"/>
           </a:solidFill>
           <a:ln w="19050">
             <a:solidFill>
-              <a:srgbClr val="7C3AED"/>
+              <a:srgbClr val="0D9488"/>
             </a:solidFill>
             <a:prstDash val="solid"/>
           </a:ln>
@@ -8800,13 +8800,13 @@
             <a:r>
               <a:rPr lang="en-US" sz="1300" b="1" dirty="0">
                 <a:solidFill>
-                  <a:srgbClr val="4C1D95"/>
+                  <a:srgbClr val="0F766E"/>
                 </a:solidFill>
                 <a:latin typeface="Trebuchet MS" pitchFamily="34" charset="0"/>
                 <a:ea typeface="Trebuchet MS" pitchFamily="34" charset="-122"/>
                 <a:cs typeface="Trebuchet MS" pitchFamily="34" charset="-120"/>
               </a:rPr>
-              <a:t>fork</a:t>
+              <a:t>lift</a:t>
             </a:r>
             <a:endParaRPr lang="en-US" sz="1300" dirty="0"/>
           </a:p>
@@ -8845,7 +8845,7 @@
                 <a:ea typeface="Calibri" pitchFamily="34" charset="-122"/>
                 <a:cs typeface="Calibri" pitchFamily="34" charset="-120"/>
               </a:rPr>
-              <a:t>pronged tool or shape</a:t>
+              <a:t>to raise; to pick up</a:t>
             </a:r>
             <a:endParaRPr lang="en-US" sz="850" dirty="0"/>
           </a:p>
@@ -8868,11 +8868,11 @@
             </a:avLst>
           </a:prstGeom>
           <a:solidFill>
-            <a:srgbClr val="CCFBF1"/>
+            <a:srgbClr val="FCE7F3"/>
           </a:solidFill>
           <a:ln w="19050">
             <a:solidFill>
-              <a:srgbClr val="0D9488"/>
+              <a:srgbClr val="DB2777"/>
             </a:solidFill>
             <a:prstDash val="solid"/>
           </a:ln>
@@ -8912,13 +8912,13 @@
             <a:r>
               <a:rPr lang="en-US" sz="1300" b="1" dirty="0">
                 <a:solidFill>
-                  <a:srgbClr val="0F766E"/>
+                  <a:srgbClr val="9D174D"/>
                 </a:solidFill>
                 <a:latin typeface="Trebuchet MS" pitchFamily="34" charset="0"/>
                 <a:ea typeface="Trebuchet MS" pitchFamily="34" charset="-122"/>
                 <a:cs typeface="Trebuchet MS" pitchFamily="34" charset="-120"/>
               </a:rPr>
-              <a:t>lift</a:t>
+              <a:t>s</a:t>
             </a:r>
             <a:endParaRPr lang="en-US" sz="1300" dirty="0"/>
           </a:p>
@@ -8957,7 +8957,7 @@
                 <a:ea typeface="Calibri" pitchFamily="34" charset="-122"/>
                 <a:cs typeface="Calibri" pitchFamily="34" charset="-120"/>
               </a:rPr>
-              <a:t>to raise or elevate</a:t>
+              <a:t>plural or present tense</a:t>
             </a:r>
             <a:endParaRPr lang="en-US" sz="850" dirty="0"/>
           </a:p>
@@ -9064,7 +9064,7 @@
         </p:nvSpPr>
         <p:spPr>
           <a:xfrm>
-            <a:off x="2999232" y="3364992"/>
+            <a:off x="4370832" y="3364992"/>
             <a:ext cx="1645920" cy="475488"/>
           </a:xfrm>
           <a:prstGeom prst="rect">
@@ -9091,7 +9091,7 @@
         </p:nvSpPr>
         <p:spPr>
           <a:xfrm>
-            <a:off x="2999232" y="3364992"/>
+            <a:off x="4370832" y="3364992"/>
             <a:ext cx="1645920" cy="475488"/>
           </a:xfrm>
           <a:prstGeom prst="rect">
@@ -9116,7 +9116,7 @@
                 <a:ea typeface="Trebuchet MS" pitchFamily="34" charset="-122"/>
                 <a:cs typeface="Trebuchet MS" pitchFamily="34" charset="-120"/>
               </a:rPr>
-              <a:t>fork</a:t>
+              <a:t>lifts</a:t>
             </a:r>
             <a:endParaRPr lang="en-US" sz="1400" dirty="0"/>
           </a:p>
@@ -9124,14 +9124,41 @@
       </p:sp>
       <p:sp>
         <p:nvSpPr>
-          <p:cNvPr id="27" name="Text 25"/>
-          <p:cNvSpPr/>
-          <p:nvPr/>
-        </p:nvSpPr>
-        <p:spPr>
-          <a:xfrm>
-            <a:off x="4645152" y="3364992"/>
-            <a:ext cx="1097280" cy="475488"/>
+          <p:cNvPr id="27" name="Shape 25"/>
+          <p:cNvSpPr/>
+          <p:nvPr/>
+        </p:nvSpPr>
+        <p:spPr>
+          <a:xfrm>
+            <a:off x="365760" y="4096512"/>
+            <a:ext cx="1371600" cy="804672"/>
+          </a:xfrm>
+          <a:prstGeom prst="rect">
+            <a:avLst>
+              <a:gd name="adj" fmla="val 6818"/>
+            </a:avLst>
+          </a:prstGeom>
+          <a:solidFill>
+            <a:srgbClr val="E2E8F0"/>
+          </a:solidFill>
+          <a:ln w="12700">
+            <a:solidFill>
+              <a:srgbClr val="E2E8F0"/>
+            </a:solidFill>
+            <a:prstDash val="solid"/>
+          </a:ln>
+        </p:spPr>
+      </p:sp>
+      <p:sp>
+        <p:nvSpPr>
+          <p:cNvPr id="28" name="Text 26"/>
+          <p:cNvSpPr/>
+          <p:nvPr/>
+        </p:nvSpPr>
+        <p:spPr>
+          <a:xfrm>
+            <a:off x="365760" y="4096512"/>
+            <a:ext cx="1371600" cy="804672"/>
           </a:xfrm>
           <a:prstGeom prst="rect">
             <a:avLst/>
@@ -9147,96 +9174,30 @@
               <a:buNone/>
             </a:pPr>
             <a:r>
-              <a:rPr lang="en-US" sz="1600" b="1" dirty="0">
-                <a:solidFill>
-                  <a:srgbClr val="0D9488"/>
+              <a:rPr lang="en-US" sz="1100" b="1" dirty="0">
+                <a:solidFill>
+                  <a:srgbClr val="475569"/>
                 </a:solidFill>
                 <a:latin typeface="Trebuchet MS" pitchFamily="34" charset="0"/>
                 <a:ea typeface="Trebuchet MS" pitchFamily="34" charset="-122"/>
                 <a:cs typeface="Trebuchet MS" pitchFamily="34" charset="-120"/>
               </a:rPr>
-              <a:t>·</a:t>
-            </a:r>
-            <a:endParaRPr lang="en-US" sz="1600" dirty="0"/>
-          </a:p>
-        </p:txBody>
-      </p:sp>
-      <p:sp>
-        <p:nvSpPr>
-          <p:cNvPr id="28" name="Shape 26"/>
-          <p:cNvSpPr/>
-          <p:nvPr/>
-        </p:nvSpPr>
-        <p:spPr>
-          <a:xfrm>
-            <a:off x="5742432" y="3364992"/>
-            <a:ext cx="1645920" cy="475488"/>
-          </a:xfrm>
-          <a:prstGeom prst="rect">
-            <a:avLst>
-              <a:gd name="adj" fmla="val 9615"/>
-            </a:avLst>
-          </a:prstGeom>
-          <a:solidFill>
-            <a:srgbClr val="FFFFFF"/>
-          </a:solidFill>
-          <a:ln w="12700">
-            <a:solidFill>
-              <a:srgbClr val="0D9488"/>
-            </a:solidFill>
-            <a:prstDash val="solid"/>
-          </a:ln>
-        </p:spPr>
-      </p:sp>
-      <p:sp>
-        <p:nvSpPr>
-          <p:cNvPr id="29" name="Text 27"/>
-          <p:cNvSpPr/>
-          <p:nvPr/>
-        </p:nvSpPr>
-        <p:spPr>
-          <a:xfrm>
-            <a:off x="5742432" y="3364992"/>
-            <a:ext cx="1645920" cy="475488"/>
-          </a:xfrm>
-          <a:prstGeom prst="rect">
-            <a:avLst/>
-          </a:prstGeom>
-          <a:noFill/>
-          <a:ln/>
-        </p:spPr>
-        <p:txBody>
-          <a:bodyPr wrap="square" lIns="0" tIns="0" rIns="0" bIns="0" rtlCol="0" anchor="ctr"/>
-          <a:lstStyle/>
-          <a:p>
-            <a:pPr algn="ctr" indent="0" marL="0">
-              <a:buNone/>
-            </a:pPr>
-            <a:r>
-              <a:rPr lang="en-US" sz="1400" b="1" dirty="0">
-                <a:solidFill>
-                  <a:srgbClr val="0D9488"/>
-                </a:solidFill>
-                <a:latin typeface="Trebuchet MS" pitchFamily="34" charset="0"/>
-                <a:ea typeface="Trebuchet MS" pitchFamily="34" charset="-122"/>
-                <a:cs typeface="Trebuchet MS" pitchFamily="34" charset="-120"/>
-              </a:rPr>
-              <a:t>lift</a:t>
-            </a:r>
-            <a:endParaRPr lang="en-US" sz="1400" dirty="0"/>
-          </a:p>
-        </p:txBody>
-      </p:sp>
-      <p:sp>
-        <p:nvSpPr>
-          <p:cNvPr id="30" name="Shape 28"/>
-          <p:cNvSpPr/>
-          <p:nvPr/>
-        </p:nvSpPr>
-        <p:spPr>
-          <a:xfrm>
-            <a:off x="365760" y="4096512"/>
-            <a:ext cx="1371600" cy="804672"/>
+              <a:t>Phonemes</a:t>
+            </a:r>
+            <a:endParaRPr lang="en-US" sz="1100" dirty="0"/>
+          </a:p>
+        </p:txBody>
+      </p:sp>
+      <p:sp>
+        <p:nvSpPr>
+          <p:cNvPr id="29" name="Shape 27"/>
+          <p:cNvSpPr/>
+          <p:nvPr/>
+        </p:nvSpPr>
+        <p:spPr>
+          <a:xfrm>
+            <a:off x="1874520" y="4096512"/>
+            <a:ext cx="6903720" cy="804672"/>
           </a:xfrm>
           <a:prstGeom prst="rect">
             <a:avLst>
@@ -9244,85 +9205,19 @@
             </a:avLst>
           </a:prstGeom>
           <a:solidFill>
-            <a:srgbClr val="E2E8F0"/>
+            <a:srgbClr val="F8FAFC"/>
           </a:solidFill>
           <a:ln w="12700">
             <a:solidFill>
               <a:srgbClr val="E2E8F0"/>
             </a:solidFill>
-            <a:prstDash val="solid"/>
-          </a:ln>
-        </p:spPr>
-      </p:sp>
-      <p:sp>
-        <p:nvSpPr>
-          <p:cNvPr id="31" name="Text 29"/>
-          <p:cNvSpPr/>
-          <p:nvPr/>
-        </p:nvSpPr>
-        <p:spPr>
-          <a:xfrm>
-            <a:off x="365760" y="4096512"/>
-            <a:ext cx="1371600" cy="804672"/>
-          </a:xfrm>
-          <a:prstGeom prst="rect">
-            <a:avLst/>
-          </a:prstGeom>
-          <a:noFill/>
-          <a:ln/>
-        </p:spPr>
-        <p:txBody>
-          <a:bodyPr wrap="square" lIns="0" tIns="0" rIns="0" bIns="0" rtlCol="0" anchor="ctr"/>
-          <a:lstStyle/>
-          <a:p>
-            <a:pPr algn="ctr" indent="0" marL="0">
-              <a:buNone/>
-            </a:pPr>
-            <a:r>
-              <a:rPr lang="en-US" sz="1100" b="1" dirty="0">
-                <a:solidFill>
-                  <a:srgbClr val="475569"/>
-                </a:solidFill>
-                <a:latin typeface="Trebuchet MS" pitchFamily="34" charset="0"/>
-                <a:ea typeface="Trebuchet MS" pitchFamily="34" charset="-122"/>
-                <a:cs typeface="Trebuchet MS" pitchFamily="34" charset="-120"/>
-              </a:rPr>
-              <a:t>Phonemes</a:t>
-            </a:r>
-            <a:endParaRPr lang="en-US" sz="1100" dirty="0"/>
-          </a:p>
-        </p:txBody>
-      </p:sp>
-      <p:sp>
-        <p:nvSpPr>
-          <p:cNvPr id="32" name="Shape 30"/>
-          <p:cNvSpPr/>
-          <p:nvPr/>
-        </p:nvSpPr>
-        <p:spPr>
-          <a:xfrm>
-            <a:off x="1874520" y="4096512"/>
-            <a:ext cx="6903720" cy="804672"/>
-          </a:xfrm>
-          <a:prstGeom prst="rect">
-            <a:avLst>
-              <a:gd name="adj" fmla="val 6818"/>
-            </a:avLst>
-          </a:prstGeom>
-          <a:solidFill>
-            <a:srgbClr val="F8FAFC"/>
-          </a:solidFill>
-          <a:ln w="12700">
-            <a:solidFill>
-              <a:srgbClr val="E2E8F0"/>
-            </a:solidFill>
             <a:prstDash val="dash"/>
           </a:ln>
         </p:spPr>
       </p:sp>
       <p:sp>
         <p:nvSpPr>
-          <p:cNvPr id="33" name="Text 31"/>
+          <p:cNvPr id="30" name="Text 28"/>
           <p:cNvSpPr/>
           <p:nvPr/>
         </p:nvSpPr>
@@ -9645,7 +9540,7 @@
                 <a:ea typeface="Calibri" pitchFamily="34" charset="-122"/>
                 <a:cs typeface="Calibri" pitchFamily="34" charset="-120"/>
               </a:rPr>
-              <a:t>Word Labs  •  wordlabs.app  •  Root: 'lift' = to raise or elevate</a:t>
+              <a:t>Word Labs  •  wordlabs.app  •  Root: 'lift' = to raise; to pick up</a:t>
             </a:r>
             <a:endParaRPr lang="en-US" sz="800" dirty="0"/>
           </a:p>
@@ -9784,7 +9679,7 @@
                 <a:ea typeface="Trebuchet MS" pitchFamily="34" charset="-122"/>
                 <a:cs typeface="Trebuchet MS" pitchFamily="34" charset="-120"/>
               </a:rPr>
-              <a:t>forklift</a:t>
+              <a:t>lifts</a:t>
             </a:r>
             <a:endParaRPr lang="en-US" sz="2800" dirty="0"/>
           </a:p>
@@ -9873,11 +9768,11 @@
             </a:avLst>
           </a:prstGeom>
           <a:solidFill>
-            <a:srgbClr val="DDD6FE"/>
+            <a:srgbClr val="CCFBF1"/>
           </a:solidFill>
           <a:ln w="19050">
             <a:solidFill>
-              <a:srgbClr val="7C3AED"/>
+              <a:srgbClr val="0D9488"/>
             </a:solidFill>
             <a:prstDash val="solid"/>
           </a:ln>
@@ -9917,13 +9812,13 @@
             <a:r>
               <a:rPr lang="en-US" sz="1300" b="1" dirty="0">
                 <a:solidFill>
-                  <a:srgbClr val="4C1D95"/>
+                  <a:srgbClr val="0F766E"/>
                 </a:solidFill>
                 <a:latin typeface="Trebuchet MS" pitchFamily="34" charset="0"/>
                 <a:ea typeface="Trebuchet MS" pitchFamily="34" charset="-122"/>
                 <a:cs typeface="Trebuchet MS" pitchFamily="34" charset="-120"/>
               </a:rPr>
-              <a:t>fork</a:t>
+              <a:t>lift</a:t>
             </a:r>
             <a:endParaRPr lang="en-US" sz="1300" dirty="0"/>
           </a:p>
@@ -9962,7 +9857,7 @@
                 <a:ea typeface="Calibri" pitchFamily="34" charset="-122"/>
                 <a:cs typeface="Calibri" pitchFamily="34" charset="-120"/>
               </a:rPr>
-              <a:t>pronged tool or shape</a:t>
+              <a:t>to raise; to pick up</a:t>
             </a:r>
             <a:endParaRPr lang="en-US" sz="850" dirty="0"/>
           </a:p>
@@ -9985,11 +9880,11 @@
             </a:avLst>
           </a:prstGeom>
           <a:solidFill>
-            <a:srgbClr val="CCFBF1"/>
+            <a:srgbClr val="FCE7F3"/>
           </a:solidFill>
           <a:ln w="19050">
             <a:solidFill>
-              <a:srgbClr val="0D9488"/>
+              <a:srgbClr val="DB2777"/>
             </a:solidFill>
             <a:prstDash val="solid"/>
           </a:ln>
@@ -10029,13 +9924,13 @@
             <a:r>
               <a:rPr lang="en-US" sz="1300" b="1" dirty="0">
                 <a:solidFill>
-                  <a:srgbClr val="0F766E"/>
+                  <a:srgbClr val="9D174D"/>
                 </a:solidFill>
                 <a:latin typeface="Trebuchet MS" pitchFamily="34" charset="0"/>
                 <a:ea typeface="Trebuchet MS" pitchFamily="34" charset="-122"/>
                 <a:cs typeface="Trebuchet MS" pitchFamily="34" charset="-120"/>
               </a:rPr>
-              <a:t>lift</a:t>
+              <a:t>s</a:t>
             </a:r>
             <a:endParaRPr lang="en-US" sz="1300" dirty="0"/>
           </a:p>
@@ -10074,7 +9969,7 @@
                 <a:ea typeface="Calibri" pitchFamily="34" charset="-122"/>
                 <a:cs typeface="Calibri" pitchFamily="34" charset="-120"/>
               </a:rPr>
-              <a:t>to raise or elevate</a:t>
+              <a:t>plural or present tense</a:t>
             </a:r>
             <a:endParaRPr lang="en-US" sz="850" dirty="0"/>
           </a:p>
@@ -10181,7 +10076,7 @@
         </p:nvSpPr>
         <p:spPr>
           <a:xfrm>
-            <a:off x="2999232" y="3364992"/>
+            <a:off x="4370832" y="3364992"/>
             <a:ext cx="1645920" cy="475488"/>
           </a:xfrm>
           <a:prstGeom prst="rect">
@@ -10208,7 +10103,7 @@
         </p:nvSpPr>
         <p:spPr>
           <a:xfrm>
-            <a:off x="2999232" y="3364992"/>
+            <a:off x="4370832" y="3364992"/>
             <a:ext cx="1645920" cy="475488"/>
           </a:xfrm>
           <a:prstGeom prst="rect">
@@ -10233,7 +10128,7 @@
                 <a:ea typeface="Trebuchet MS" pitchFamily="34" charset="-122"/>
                 <a:cs typeface="Trebuchet MS" pitchFamily="34" charset="-120"/>
               </a:rPr>
-              <a:t>fork</a:t>
+              <a:t>lifts</a:t>
             </a:r>
             <a:endParaRPr lang="en-US" sz="1400" dirty="0"/>
           </a:p>
@@ -10241,14 +10136,41 @@
       </p:sp>
       <p:sp>
         <p:nvSpPr>
-          <p:cNvPr id="27" name="Text 25"/>
-          <p:cNvSpPr/>
-          <p:nvPr/>
-        </p:nvSpPr>
-        <p:spPr>
-          <a:xfrm>
-            <a:off x="4645152" y="3364992"/>
-            <a:ext cx="1097280" cy="475488"/>
+          <p:cNvPr id="27" name="Shape 25"/>
+          <p:cNvSpPr/>
+          <p:nvPr/>
+        </p:nvSpPr>
+        <p:spPr>
+          <a:xfrm>
+            <a:off x="365760" y="4096512"/>
+            <a:ext cx="1371600" cy="804672"/>
+          </a:xfrm>
+          <a:prstGeom prst="rect">
+            <a:avLst>
+              <a:gd name="adj" fmla="val 6818"/>
+            </a:avLst>
+          </a:prstGeom>
+          <a:solidFill>
+            <a:srgbClr val="E2E8F0"/>
+          </a:solidFill>
+          <a:ln w="12700">
+            <a:solidFill>
+              <a:srgbClr val="E2E8F0"/>
+            </a:solidFill>
+            <a:prstDash val="solid"/>
+          </a:ln>
+        </p:spPr>
+      </p:sp>
+      <p:sp>
+        <p:nvSpPr>
+          <p:cNvPr id="28" name="Text 26"/>
+          <p:cNvSpPr/>
+          <p:nvPr/>
+        </p:nvSpPr>
+        <p:spPr>
+          <a:xfrm>
+            <a:off x="365760" y="4096512"/>
+            <a:ext cx="1371600" cy="804672"/>
           </a:xfrm>
           <a:prstGeom prst="rect">
             <a:avLst/>
@@ -10264,57 +10186,84 @@
               <a:buNone/>
             </a:pPr>
             <a:r>
-              <a:rPr lang="en-US" sz="1600" b="1" dirty="0">
-                <a:solidFill>
-                  <a:srgbClr val="0D9488"/>
+              <a:rPr lang="en-US" sz="1100" b="1" dirty="0">
+                <a:solidFill>
+                  <a:srgbClr val="475569"/>
                 </a:solidFill>
                 <a:latin typeface="Trebuchet MS" pitchFamily="34" charset="0"/>
                 <a:ea typeface="Trebuchet MS" pitchFamily="34" charset="-122"/>
                 <a:cs typeface="Trebuchet MS" pitchFamily="34" charset="-120"/>
               </a:rPr>
-              <a:t>·</a:t>
-            </a:r>
-            <a:endParaRPr lang="en-US" sz="1600" dirty="0"/>
-          </a:p>
-        </p:txBody>
-      </p:sp>
-      <p:sp>
-        <p:nvSpPr>
-          <p:cNvPr id="28" name="Shape 26"/>
-          <p:cNvSpPr/>
-          <p:nvPr/>
-        </p:nvSpPr>
-        <p:spPr>
-          <a:xfrm>
-            <a:off x="5742432" y="3364992"/>
-            <a:ext cx="1645920" cy="475488"/>
+              <a:t>Phonemes</a:t>
+            </a:r>
+            <a:endParaRPr lang="en-US" sz="1100" dirty="0"/>
+          </a:p>
+        </p:txBody>
+      </p:sp>
+      <p:sp>
+        <p:nvSpPr>
+          <p:cNvPr id="29" name="Shape 27"/>
+          <p:cNvSpPr/>
+          <p:nvPr/>
+        </p:nvSpPr>
+        <p:spPr>
+          <a:xfrm>
+            <a:off x="1874520" y="4096512"/>
+            <a:ext cx="6903720" cy="658368"/>
           </a:xfrm>
           <a:prstGeom prst="rect">
             <a:avLst>
-              <a:gd name="adj" fmla="val 9615"/>
+              <a:gd name="adj" fmla="val 8333"/>
             </a:avLst>
           </a:prstGeom>
           <a:solidFill>
+            <a:srgbClr val="FCE7F3"/>
+          </a:solidFill>
+          <a:ln w="12700">
+            <a:solidFill>
+              <a:srgbClr val="DB2777"/>
+            </a:solidFill>
+            <a:prstDash val="solid"/>
+          </a:ln>
+        </p:spPr>
+      </p:sp>
+      <p:sp>
+        <p:nvSpPr>
+          <p:cNvPr id="30" name="Shape 28"/>
+          <p:cNvSpPr/>
+          <p:nvPr/>
+        </p:nvSpPr>
+        <p:spPr>
+          <a:xfrm>
+            <a:off x="2427732" y="4169664"/>
+            <a:ext cx="685800" cy="475488"/>
+          </a:xfrm>
+          <a:prstGeom prst="rect">
+            <a:avLst>
+              <a:gd name="adj" fmla="val 7692"/>
+            </a:avLst>
+          </a:prstGeom>
+          <a:solidFill>
             <a:srgbClr val="FFFFFF"/>
           </a:solidFill>
           <a:ln w="12700">
             <a:solidFill>
-              <a:srgbClr val="0D9488"/>
-            </a:solidFill>
-            <a:prstDash val="solid"/>
-          </a:ln>
-        </p:spPr>
-      </p:sp>
-      <p:sp>
-        <p:nvSpPr>
-          <p:cNvPr id="29" name="Text 27"/>
-          <p:cNvSpPr/>
-          <p:nvPr/>
-        </p:nvSpPr>
-        <p:spPr>
-          <a:xfrm>
-            <a:off x="5742432" y="3364992"/>
-            <a:ext cx="1645920" cy="475488"/>
+              <a:srgbClr val="DB2777"/>
+            </a:solidFill>
+            <a:prstDash val="solid"/>
+          </a:ln>
+        </p:spPr>
+      </p:sp>
+      <p:sp>
+        <p:nvSpPr>
+          <p:cNvPr id="31" name="Text 29"/>
+          <p:cNvSpPr/>
+          <p:nvPr/>
+        </p:nvSpPr>
+        <p:spPr>
+          <a:xfrm>
+            <a:off x="2427732" y="4169664"/>
+            <a:ext cx="685800" cy="475488"/>
           </a:xfrm>
           <a:prstGeom prst="rect">
             <a:avLst/>
@@ -10330,57 +10279,57 @@
               <a:buNone/>
             </a:pPr>
             <a:r>
-              <a:rPr lang="en-US" sz="1400" b="1" dirty="0">
-                <a:solidFill>
-                  <a:srgbClr val="0D9488"/>
+              <a:rPr lang="en-US" sz="900" b="1" dirty="0">
+                <a:solidFill>
+                  <a:srgbClr val="9D174D"/>
                 </a:solidFill>
                 <a:latin typeface="Trebuchet MS" pitchFamily="34" charset="0"/>
                 <a:ea typeface="Trebuchet MS" pitchFamily="34" charset="-122"/>
                 <a:cs typeface="Trebuchet MS" pitchFamily="34" charset="-120"/>
               </a:rPr>
-              <a:t>lift</a:t>
-            </a:r>
-            <a:endParaRPr lang="en-US" sz="1400" dirty="0"/>
-          </a:p>
-        </p:txBody>
-      </p:sp>
-      <p:sp>
-        <p:nvSpPr>
-          <p:cNvPr id="30" name="Shape 28"/>
-          <p:cNvSpPr/>
-          <p:nvPr/>
-        </p:nvSpPr>
-        <p:spPr>
-          <a:xfrm>
-            <a:off x="365760" y="4096512"/>
-            <a:ext cx="1371600" cy="804672"/>
+              <a:t>l</a:t>
+            </a:r>
+            <a:endParaRPr lang="en-US" sz="900" dirty="0"/>
+          </a:p>
+        </p:txBody>
+      </p:sp>
+      <p:sp>
+        <p:nvSpPr>
+          <p:cNvPr id="32" name="Shape 30"/>
+          <p:cNvSpPr/>
+          <p:nvPr/>
+        </p:nvSpPr>
+        <p:spPr>
+          <a:xfrm>
+            <a:off x="3639312" y="4169664"/>
+            <a:ext cx="685800" cy="475488"/>
           </a:xfrm>
           <a:prstGeom prst="rect">
             <a:avLst>
-              <a:gd name="adj" fmla="val 6818"/>
+              <a:gd name="adj" fmla="val 7692"/>
             </a:avLst>
           </a:prstGeom>
           <a:solidFill>
-            <a:srgbClr val="E2E8F0"/>
-          </a:solidFill>
-          <a:ln w="12700">
-            <a:solidFill>
-              <a:srgbClr val="E2E8F0"/>
-            </a:solidFill>
-            <a:prstDash val="solid"/>
-          </a:ln>
-        </p:spPr>
-      </p:sp>
-      <p:sp>
-        <p:nvSpPr>
-          <p:cNvPr id="31" name="Text 29"/>
-          <p:cNvSpPr/>
-          <p:nvPr/>
-        </p:nvSpPr>
-        <p:spPr>
-          <a:xfrm>
-            <a:off x="365760" y="4096512"/>
-            <a:ext cx="1371600" cy="804672"/>
+            <a:srgbClr val="FFFFFF"/>
+          </a:solidFill>
+          <a:ln w="12700">
+            <a:solidFill>
+              <a:srgbClr val="DB2777"/>
+            </a:solidFill>
+            <a:prstDash val="solid"/>
+          </a:ln>
+        </p:spPr>
+      </p:sp>
+      <p:sp>
+        <p:nvSpPr>
+          <p:cNvPr id="33" name="Text 31"/>
+          <p:cNvSpPr/>
+          <p:nvPr/>
+        </p:nvSpPr>
+        <p:spPr>
+          <a:xfrm>
+            <a:off x="3639312" y="4169664"/>
+            <a:ext cx="685800" cy="475488"/>
           </a:xfrm>
           <a:prstGeom prst="rect">
             <a:avLst/>
@@ -10396,56 +10345,29 @@
               <a:buNone/>
             </a:pPr>
             <a:r>
-              <a:rPr lang="en-US" sz="1100" b="1" dirty="0">
-                <a:solidFill>
-                  <a:srgbClr val="475569"/>
+              <a:rPr lang="en-US" sz="900" b="1" dirty="0">
+                <a:solidFill>
+                  <a:srgbClr val="9D174D"/>
                 </a:solidFill>
                 <a:latin typeface="Trebuchet MS" pitchFamily="34" charset="0"/>
                 <a:ea typeface="Trebuchet MS" pitchFamily="34" charset="-122"/>
                 <a:cs typeface="Trebuchet MS" pitchFamily="34" charset="-120"/>
               </a:rPr>
-              <a:t>Phonemes</a:t>
-            </a:r>
-            <a:endParaRPr lang="en-US" sz="1100" dirty="0"/>
-          </a:p>
-        </p:txBody>
-      </p:sp>
-      <p:sp>
-        <p:nvSpPr>
-          <p:cNvPr id="32" name="Shape 30"/>
-          <p:cNvSpPr/>
-          <p:nvPr/>
-        </p:nvSpPr>
-        <p:spPr>
-          <a:xfrm>
-            <a:off x="1874520" y="4096512"/>
-            <a:ext cx="6903720" cy="658368"/>
-          </a:xfrm>
-          <a:prstGeom prst="rect">
-            <a:avLst>
-              <a:gd name="adj" fmla="val 8333"/>
-            </a:avLst>
-          </a:prstGeom>
-          <a:solidFill>
-            <a:srgbClr val="FCE7F3"/>
-          </a:solidFill>
-          <a:ln w="12700">
-            <a:solidFill>
-              <a:srgbClr val="DB2777"/>
-            </a:solidFill>
-            <a:prstDash val="solid"/>
-          </a:ln>
-        </p:spPr>
-      </p:sp>
-      <p:sp>
-        <p:nvSpPr>
-          <p:cNvPr id="33" name="Shape 31"/>
-          <p:cNvSpPr/>
-          <p:nvPr/>
-        </p:nvSpPr>
-        <p:spPr>
-          <a:xfrm>
-            <a:off x="2124837" y="4169664"/>
+              <a:t>i</a:t>
+            </a:r>
+            <a:endParaRPr lang="en-US" sz="900" dirty="0"/>
+          </a:p>
+        </p:txBody>
+      </p:sp>
+      <p:sp>
+        <p:nvSpPr>
+          <p:cNvPr id="34" name="Shape 32"/>
+          <p:cNvSpPr/>
+          <p:nvPr/>
+        </p:nvSpPr>
+        <p:spPr>
+          <a:xfrm>
+            <a:off x="4850892" y="4169664"/>
             <a:ext cx="685800" cy="475488"/>
           </a:xfrm>
           <a:prstGeom prst="rect">
@@ -10466,13 +10388,13 @@
       </p:sp>
       <p:sp>
         <p:nvSpPr>
-          <p:cNvPr id="34" name="Text 32"/>
-          <p:cNvSpPr/>
-          <p:nvPr/>
-        </p:nvSpPr>
-        <p:spPr>
-          <a:xfrm>
-            <a:off x="2124837" y="4169664"/>
+          <p:cNvPr id="35" name="Text 33"/>
+          <p:cNvSpPr/>
+          <p:nvPr/>
+        </p:nvSpPr>
+        <p:spPr>
+          <a:xfrm>
+            <a:off x="4850892" y="4169664"/>
             <a:ext cx="685800" cy="475488"/>
           </a:xfrm>
           <a:prstGeom prst="rect">
@@ -10505,13 +10427,13 @@
       </p:sp>
       <p:sp>
         <p:nvSpPr>
-          <p:cNvPr id="35" name="Shape 33"/>
-          <p:cNvSpPr/>
-          <p:nvPr/>
-        </p:nvSpPr>
-        <p:spPr>
-          <a:xfrm>
-            <a:off x="3033522" y="4169664"/>
+          <p:cNvPr id="36" name="Shape 34"/>
+          <p:cNvSpPr/>
+          <p:nvPr/>
+        </p:nvSpPr>
+        <p:spPr>
+          <a:xfrm>
+            <a:off x="6062472" y="4169664"/>
             <a:ext cx="685800" cy="475488"/>
           </a:xfrm>
           <a:prstGeom prst="rect">
@@ -10532,13 +10454,13 @@
       </p:sp>
       <p:sp>
         <p:nvSpPr>
-          <p:cNvPr id="36" name="Text 34"/>
-          <p:cNvSpPr/>
-          <p:nvPr/>
-        </p:nvSpPr>
-        <p:spPr>
-          <a:xfrm>
-            <a:off x="3033522" y="4169664"/>
+          <p:cNvPr id="37" name="Text 35"/>
+          <p:cNvSpPr/>
+          <p:nvPr/>
+        </p:nvSpPr>
+        <p:spPr>
+          <a:xfrm>
+            <a:off x="6062472" y="4169664"/>
             <a:ext cx="685800" cy="475488"/>
           </a:xfrm>
           <a:prstGeom prst="rect">
@@ -10563,7 +10485,7 @@
                 <a:ea typeface="Trebuchet MS" pitchFamily="34" charset="-122"/>
                 <a:cs typeface="Trebuchet MS" pitchFamily="34" charset="-120"/>
               </a:rPr>
-              <a:t>or</a:t>
+              <a:t>t</a:t>
             </a:r>
             <a:endParaRPr lang="en-US" sz="900" dirty="0"/>
           </a:p>
@@ -10571,13 +10493,13 @@
       </p:sp>
       <p:sp>
         <p:nvSpPr>
-          <p:cNvPr id="37" name="Shape 35"/>
-          <p:cNvSpPr/>
-          <p:nvPr/>
-        </p:nvSpPr>
-        <p:spPr>
-          <a:xfrm>
-            <a:off x="3942207" y="4169664"/>
+          <p:cNvPr id="38" name="Shape 36"/>
+          <p:cNvSpPr/>
+          <p:nvPr/>
+        </p:nvSpPr>
+        <p:spPr>
+          <a:xfrm>
+            <a:off x="7274052" y="4169664"/>
             <a:ext cx="685800" cy="475488"/>
           </a:xfrm>
           <a:prstGeom prst="rect">
@@ -10598,13 +10520,13 @@
       </p:sp>
       <p:sp>
         <p:nvSpPr>
-          <p:cNvPr id="38" name="Text 36"/>
-          <p:cNvSpPr/>
-          <p:nvPr/>
-        </p:nvSpPr>
-        <p:spPr>
-          <a:xfrm>
-            <a:off x="3942207" y="4169664"/>
+          <p:cNvPr id="39" name="Text 37"/>
+          <p:cNvSpPr/>
+          <p:nvPr/>
+        </p:nvSpPr>
+        <p:spPr>
+          <a:xfrm>
+            <a:off x="7274052" y="4169664"/>
             <a:ext cx="685800" cy="475488"/>
           </a:xfrm>
           <a:prstGeom prst="rect">
@@ -10629,271 +10551,7 @@
                 <a:ea typeface="Trebuchet MS" pitchFamily="34" charset="-122"/>
                 <a:cs typeface="Trebuchet MS" pitchFamily="34" charset="-120"/>
               </a:rPr>
-              <a:t>k</a:t>
-            </a:r>
-            <a:endParaRPr lang="en-US" sz="900" dirty="0"/>
-          </a:p>
-        </p:txBody>
-      </p:sp>
-      <p:sp>
-        <p:nvSpPr>
-          <p:cNvPr id="39" name="Shape 37"/>
-          <p:cNvSpPr/>
-          <p:nvPr/>
-        </p:nvSpPr>
-        <p:spPr>
-          <a:xfrm>
-            <a:off x="4850892" y="4169664"/>
-            <a:ext cx="685800" cy="475488"/>
-          </a:xfrm>
-          <a:prstGeom prst="rect">
-            <a:avLst>
-              <a:gd name="adj" fmla="val 7692"/>
-            </a:avLst>
-          </a:prstGeom>
-          <a:solidFill>
-            <a:srgbClr val="FFFFFF"/>
-          </a:solidFill>
-          <a:ln w="12700">
-            <a:solidFill>
-              <a:srgbClr val="DB2777"/>
-            </a:solidFill>
-            <a:prstDash val="solid"/>
-          </a:ln>
-        </p:spPr>
-      </p:sp>
-      <p:sp>
-        <p:nvSpPr>
-          <p:cNvPr id="40" name="Text 38"/>
-          <p:cNvSpPr/>
-          <p:nvPr/>
-        </p:nvSpPr>
-        <p:spPr>
-          <a:xfrm>
-            <a:off x="4850892" y="4169664"/>
-            <a:ext cx="685800" cy="475488"/>
-          </a:xfrm>
-          <a:prstGeom prst="rect">
-            <a:avLst/>
-          </a:prstGeom>
-          <a:noFill/>
-          <a:ln/>
-        </p:spPr>
-        <p:txBody>
-          <a:bodyPr wrap="square" lIns="0" tIns="0" rIns="0" bIns="0" rtlCol="0" anchor="ctr"/>
-          <a:lstStyle/>
-          <a:p>
-            <a:pPr algn="ctr" indent="0" marL="0">
-              <a:buNone/>
-            </a:pPr>
-            <a:r>
-              <a:rPr lang="en-US" sz="900" b="1" dirty="0">
-                <a:solidFill>
-                  <a:srgbClr val="9D174D"/>
-                </a:solidFill>
-                <a:latin typeface="Trebuchet MS" pitchFamily="34" charset="0"/>
-                <a:ea typeface="Trebuchet MS" pitchFamily="34" charset="-122"/>
-                <a:cs typeface="Trebuchet MS" pitchFamily="34" charset="-120"/>
-              </a:rPr>
-              <a:t>l</a:t>
-            </a:r>
-            <a:endParaRPr lang="en-US" sz="900" dirty="0"/>
-          </a:p>
-        </p:txBody>
-      </p:sp>
-      <p:sp>
-        <p:nvSpPr>
-          <p:cNvPr id="41" name="Shape 39"/>
-          <p:cNvSpPr/>
-          <p:nvPr/>
-        </p:nvSpPr>
-        <p:spPr>
-          <a:xfrm>
-            <a:off x="5759577" y="4169664"/>
-            <a:ext cx="685800" cy="475488"/>
-          </a:xfrm>
-          <a:prstGeom prst="rect">
-            <a:avLst>
-              <a:gd name="adj" fmla="val 7692"/>
-            </a:avLst>
-          </a:prstGeom>
-          <a:solidFill>
-            <a:srgbClr val="FFFFFF"/>
-          </a:solidFill>
-          <a:ln w="12700">
-            <a:solidFill>
-              <a:srgbClr val="DB2777"/>
-            </a:solidFill>
-            <a:prstDash val="solid"/>
-          </a:ln>
-        </p:spPr>
-      </p:sp>
-      <p:sp>
-        <p:nvSpPr>
-          <p:cNvPr id="42" name="Text 40"/>
-          <p:cNvSpPr/>
-          <p:nvPr/>
-        </p:nvSpPr>
-        <p:spPr>
-          <a:xfrm>
-            <a:off x="5759577" y="4169664"/>
-            <a:ext cx="685800" cy="475488"/>
-          </a:xfrm>
-          <a:prstGeom prst="rect">
-            <a:avLst/>
-          </a:prstGeom>
-          <a:noFill/>
-          <a:ln/>
-        </p:spPr>
-        <p:txBody>
-          <a:bodyPr wrap="square" lIns="0" tIns="0" rIns="0" bIns="0" rtlCol="0" anchor="ctr"/>
-          <a:lstStyle/>
-          <a:p>
-            <a:pPr algn="ctr" indent="0" marL="0">
-              <a:buNone/>
-            </a:pPr>
-            <a:r>
-              <a:rPr lang="en-US" sz="900" b="1" dirty="0">
-                <a:solidFill>
-                  <a:srgbClr val="9D174D"/>
-                </a:solidFill>
-                <a:latin typeface="Trebuchet MS" pitchFamily="34" charset="0"/>
-                <a:ea typeface="Trebuchet MS" pitchFamily="34" charset="-122"/>
-                <a:cs typeface="Trebuchet MS" pitchFamily="34" charset="-120"/>
-              </a:rPr>
-              <a:t>i</a:t>
-            </a:r>
-            <a:endParaRPr lang="en-US" sz="900" dirty="0"/>
-          </a:p>
-        </p:txBody>
-      </p:sp>
-      <p:sp>
-        <p:nvSpPr>
-          <p:cNvPr id="43" name="Shape 41"/>
-          <p:cNvSpPr/>
-          <p:nvPr/>
-        </p:nvSpPr>
-        <p:spPr>
-          <a:xfrm>
-            <a:off x="6668262" y="4169664"/>
-            <a:ext cx="685800" cy="475488"/>
-          </a:xfrm>
-          <a:prstGeom prst="rect">
-            <a:avLst>
-              <a:gd name="adj" fmla="val 7692"/>
-            </a:avLst>
-          </a:prstGeom>
-          <a:solidFill>
-            <a:srgbClr val="FFFFFF"/>
-          </a:solidFill>
-          <a:ln w="12700">
-            <a:solidFill>
-              <a:srgbClr val="DB2777"/>
-            </a:solidFill>
-            <a:prstDash val="solid"/>
-          </a:ln>
-        </p:spPr>
-      </p:sp>
-      <p:sp>
-        <p:nvSpPr>
-          <p:cNvPr id="44" name="Text 42"/>
-          <p:cNvSpPr/>
-          <p:nvPr/>
-        </p:nvSpPr>
-        <p:spPr>
-          <a:xfrm>
-            <a:off x="6668262" y="4169664"/>
-            <a:ext cx="685800" cy="475488"/>
-          </a:xfrm>
-          <a:prstGeom prst="rect">
-            <a:avLst/>
-          </a:prstGeom>
-          <a:noFill/>
-          <a:ln/>
-        </p:spPr>
-        <p:txBody>
-          <a:bodyPr wrap="square" lIns="0" tIns="0" rIns="0" bIns="0" rtlCol="0" anchor="ctr"/>
-          <a:lstStyle/>
-          <a:p>
-            <a:pPr algn="ctr" indent="0" marL="0">
-              <a:buNone/>
-            </a:pPr>
-            <a:r>
-              <a:rPr lang="en-US" sz="900" b="1" dirty="0">
-                <a:solidFill>
-                  <a:srgbClr val="9D174D"/>
-                </a:solidFill>
-                <a:latin typeface="Trebuchet MS" pitchFamily="34" charset="0"/>
-                <a:ea typeface="Trebuchet MS" pitchFamily="34" charset="-122"/>
-                <a:cs typeface="Trebuchet MS" pitchFamily="34" charset="-120"/>
-              </a:rPr>
-              <a:t>f</a:t>
-            </a:r>
-            <a:endParaRPr lang="en-US" sz="900" dirty="0"/>
-          </a:p>
-        </p:txBody>
-      </p:sp>
-      <p:sp>
-        <p:nvSpPr>
-          <p:cNvPr id="45" name="Shape 43"/>
-          <p:cNvSpPr/>
-          <p:nvPr/>
-        </p:nvSpPr>
-        <p:spPr>
-          <a:xfrm>
-            <a:off x="7576947" y="4169664"/>
-            <a:ext cx="685800" cy="475488"/>
-          </a:xfrm>
-          <a:prstGeom prst="rect">
-            <a:avLst>
-              <a:gd name="adj" fmla="val 7692"/>
-            </a:avLst>
-          </a:prstGeom>
-          <a:solidFill>
-            <a:srgbClr val="FFFFFF"/>
-          </a:solidFill>
-          <a:ln w="12700">
-            <a:solidFill>
-              <a:srgbClr val="DB2777"/>
-            </a:solidFill>
-            <a:prstDash val="solid"/>
-          </a:ln>
-        </p:spPr>
-      </p:sp>
-      <p:sp>
-        <p:nvSpPr>
-          <p:cNvPr id="46" name="Text 44"/>
-          <p:cNvSpPr/>
-          <p:nvPr/>
-        </p:nvSpPr>
-        <p:spPr>
-          <a:xfrm>
-            <a:off x="7576947" y="4169664"/>
-            <a:ext cx="685800" cy="475488"/>
-          </a:xfrm>
-          <a:prstGeom prst="rect">
-            <a:avLst/>
-          </a:prstGeom>
-          <a:noFill/>
-          <a:ln/>
-        </p:spPr>
-        <p:txBody>
-          <a:bodyPr wrap="square" lIns="0" tIns="0" rIns="0" bIns="0" rtlCol="0" anchor="ctr"/>
-          <a:lstStyle/>
-          <a:p>
-            <a:pPr algn="ctr" indent="0" marL="0">
-              <a:buNone/>
-            </a:pPr>
-            <a:r>
-              <a:rPr lang="en-US" sz="900" b="1" dirty="0">
-                <a:solidFill>
-                  <a:srgbClr val="9D174D"/>
-                </a:solidFill>
-                <a:latin typeface="Trebuchet MS" pitchFamily="34" charset="0"/>
-                <a:ea typeface="Trebuchet MS" pitchFamily="34" charset="-122"/>
-                <a:cs typeface="Trebuchet MS" pitchFamily="34" charset="-120"/>
-              </a:rPr>
-              <a:t>t</a:t>
+              <a:t>s</a:t>
             </a:r>
             <a:endParaRPr lang="en-US" sz="900" dirty="0"/>
           </a:p>
@@ -11185,7 +10843,7 @@
                 <a:ea typeface="Calibri" pitchFamily="34" charset="-122"/>
                 <a:cs typeface="Calibri" pitchFamily="34" charset="-120"/>
               </a:rPr>
-              <a:t>Word Labs  •  wordlabs.app  •  Root: 'lift' = to raise or elevate</a:t>
+              <a:t>Word Labs  •  wordlabs.app  •  Root: 'lift' = to raise; to pick up</a:t>
             </a:r>
             <a:endParaRPr lang="en-US" sz="800" dirty="0"/>
           </a:p>
@@ -11324,7 +10982,7 @@
                 <a:ea typeface="Trebuchet MS" pitchFamily="34" charset="-122"/>
                 <a:cs typeface="Trebuchet MS" pitchFamily="34" charset="-120"/>
               </a:rPr>
-              <a:t>liftoff</a:t>
+              <a:t>lifted</a:t>
             </a:r>
             <a:endParaRPr lang="en-US" sz="2800" dirty="0"/>
           </a:p>
@@ -12012,7 +11670,7 @@
                 <a:ea typeface="Calibri" pitchFamily="34" charset="-122"/>
                 <a:cs typeface="Calibri" pitchFamily="34" charset="-120"/>
               </a:rPr>
-              <a:t>Word Labs  •  wordlabs.app  •  Root: 'lift' = to raise or elevate</a:t>
+              <a:t>Word Labs  •  wordlabs.app  •  Root: 'lift' = to raise; to pick up</a:t>
             </a:r>
             <a:endParaRPr lang="en-US" sz="800" dirty="0"/>
           </a:p>
@@ -12151,7 +11809,7 @@
                 <a:ea typeface="Trebuchet MS" pitchFamily="34" charset="-122"/>
                 <a:cs typeface="Trebuchet MS" pitchFamily="34" charset="-120"/>
               </a:rPr>
-              <a:t>liftoff</a:t>
+              <a:t>lifted</a:t>
             </a:r>
             <a:endParaRPr lang="en-US" sz="2800" dirty="0"/>
           </a:p>
@@ -12329,7 +11987,7 @@
                 <a:ea typeface="Calibri" pitchFamily="34" charset="-122"/>
                 <a:cs typeface="Calibri" pitchFamily="34" charset="-120"/>
               </a:rPr>
-              <a:t>to raise or elevate</a:t>
+              <a:t>to raise; to pick up</a:t>
             </a:r>
             <a:endParaRPr lang="en-US" sz="850" dirty="0"/>
           </a:p>
@@ -12402,7 +12060,7 @@
                 <a:ea typeface="Trebuchet MS" pitchFamily="34" charset="-122"/>
                 <a:cs typeface="Trebuchet MS" pitchFamily="34" charset="-120"/>
               </a:rPr>
-              <a:t>off</a:t>
+              <a:t>ed</a:t>
             </a:r>
             <a:endParaRPr lang="en-US" sz="1300" dirty="0"/>
           </a:p>
@@ -12441,7 +12099,7 @@
                 <a:ea typeface="Calibri" pitchFamily="34" charset="-122"/>
                 <a:cs typeface="Calibri" pitchFamily="34" charset="-120"/>
               </a:rPr>
-              <a:t>away from a surface</a:t>
+              <a:t>past tense</a:t>
             </a:r>
             <a:endParaRPr lang="en-US" sz="850" dirty="0"/>
           </a:p>
@@ -12997,7 +12655,7 @@
                 <a:ea typeface="Calibri" pitchFamily="34" charset="-122"/>
                 <a:cs typeface="Calibri" pitchFamily="34" charset="-120"/>
               </a:rPr>
-              <a:t>Word Labs  •  wordlabs.app  •  Root: 'lift' = to raise or elevate</a:t>
+              <a:t>Word Labs  •  wordlabs.app  •  Root: 'lift' = to raise; to pick up</a:t>
             </a:r>
             <a:endParaRPr lang="en-US" sz="800" dirty="0"/>
           </a:p>
@@ -13136,7 +12794,7 @@
                 <a:ea typeface="Trebuchet MS" pitchFamily="34" charset="-122"/>
                 <a:cs typeface="Trebuchet MS" pitchFamily="34" charset="-120"/>
               </a:rPr>
-              <a:t>liftoff</a:t>
+              <a:t>lifted</a:t>
             </a:r>
             <a:endParaRPr lang="en-US" sz="2800" dirty="0"/>
           </a:p>
@@ -13314,7 +12972,7 @@
                 <a:ea typeface="Calibri" pitchFamily="34" charset="-122"/>
                 <a:cs typeface="Calibri" pitchFamily="34" charset="-120"/>
               </a:rPr>
-              <a:t>to raise or elevate</a:t>
+              <a:t>to raise; to pick up</a:t>
             </a:r>
             <a:endParaRPr lang="en-US" sz="850" dirty="0"/>
           </a:p>
@@ -13387,7 +13045,7 @@
                 <a:ea typeface="Trebuchet MS" pitchFamily="34" charset="-122"/>
                 <a:cs typeface="Trebuchet MS" pitchFamily="34" charset="-120"/>
               </a:rPr>
-              <a:t>off</a:t>
+              <a:t>ed</a:t>
             </a:r>
             <a:endParaRPr lang="en-US" sz="1300" dirty="0"/>
           </a:p>
@@ -13426,7 +13084,7 @@
                 <a:ea typeface="Calibri" pitchFamily="34" charset="-122"/>
                 <a:cs typeface="Calibri" pitchFamily="34" charset="-120"/>
               </a:rPr>
-              <a:t>away from a surface</a:t>
+              <a:t>past tense</a:t>
             </a:r>
             <a:endParaRPr lang="en-US" sz="850" dirty="0"/>
           </a:p>
@@ -13690,7 +13348,7 @@
                 <a:ea typeface="Trebuchet MS" pitchFamily="34" charset="-122"/>
                 <a:cs typeface="Trebuchet MS" pitchFamily="34" charset="-120"/>
               </a:rPr>
-              <a:t>off</a:t>
+              <a:t>ed</a:t>
             </a:r>
             <a:endParaRPr lang="en-US" sz="1400" dirty="0"/>
           </a:p>
@@ -14023,7 +13681,7 @@
                 <a:ea typeface="Calibri" pitchFamily="34" charset="-122"/>
                 <a:cs typeface="Calibri" pitchFamily="34" charset="-120"/>
               </a:rPr>
-              <a:t>Root 'lift' — to raise or elevate</a:t>
+              <a:t>Root 'lift' — to raise; to pick up</a:t>
             </a:r>
             <a:endParaRPr lang="en-US" sz="1600" dirty="0"/>
           </a:p>
@@ -14379,7 +14037,7 @@
                 <a:ea typeface="Calibri" pitchFamily="34" charset="-122"/>
                 <a:cs typeface="Calibri" pitchFamily="34" charset="-120"/>
               </a:rPr>
-              <a:t>Word Labs  •  wordlabs.app  •  Root: 'lift' = to raise or elevate</a:t>
+              <a:t>Word Labs  •  wordlabs.app  •  Root: 'lift' = to raise; to pick up</a:t>
             </a:r>
             <a:endParaRPr lang="en-US" sz="800" dirty="0"/>
           </a:p>
@@ -14518,7 +14176,7 @@
                 <a:ea typeface="Trebuchet MS" pitchFamily="34" charset="-122"/>
                 <a:cs typeface="Trebuchet MS" pitchFamily="34" charset="-120"/>
               </a:rPr>
-              <a:t>liftoff</a:t>
+              <a:t>lifted</a:t>
             </a:r>
             <a:endParaRPr lang="en-US" sz="2800" dirty="0"/>
           </a:p>
@@ -14696,7 +14354,7 @@
                 <a:ea typeface="Calibri" pitchFamily="34" charset="-122"/>
                 <a:cs typeface="Calibri" pitchFamily="34" charset="-120"/>
               </a:rPr>
-              <a:t>to raise or elevate</a:t>
+              <a:t>to raise; to pick up</a:t>
             </a:r>
             <a:endParaRPr lang="en-US" sz="850" dirty="0"/>
           </a:p>
@@ -14769,7 +14427,7 @@
                 <a:ea typeface="Trebuchet MS" pitchFamily="34" charset="-122"/>
                 <a:cs typeface="Trebuchet MS" pitchFamily="34" charset="-120"/>
               </a:rPr>
-              <a:t>off</a:t>
+              <a:t>ed</a:t>
             </a:r>
             <a:endParaRPr lang="en-US" sz="1300" dirty="0"/>
           </a:p>
@@ -14808,7 +14466,7 @@
                 <a:ea typeface="Calibri" pitchFamily="34" charset="-122"/>
                 <a:cs typeface="Calibri" pitchFamily="34" charset="-120"/>
               </a:rPr>
-              <a:t>away from a surface</a:t>
+              <a:t>past tense</a:t>
             </a:r>
             <a:endParaRPr lang="en-US" sz="850" dirty="0"/>
           </a:p>
@@ -15072,7 +14730,7 @@
                 <a:ea typeface="Trebuchet MS" pitchFamily="34" charset="-122"/>
                 <a:cs typeface="Trebuchet MS" pitchFamily="34" charset="-120"/>
               </a:rPr>
-              <a:t>off</a:t>
+              <a:t>ed</a:t>
             </a:r>
             <a:endParaRPr lang="en-US" sz="1400" dirty="0"/>
           </a:p>
@@ -15179,7 +14837,7 @@
         </p:nvSpPr>
         <p:spPr>
           <a:xfrm>
-            <a:off x="2254649" y="4169664"/>
+            <a:off x="2427732" y="4169664"/>
             <a:ext cx="685800" cy="475488"/>
           </a:xfrm>
           <a:prstGeom prst="rect">
@@ -15206,7 +14864,7 @@
         </p:nvSpPr>
         <p:spPr>
           <a:xfrm>
-            <a:off x="2254649" y="4169664"/>
+            <a:off x="2427732" y="4169664"/>
             <a:ext cx="685800" cy="475488"/>
           </a:xfrm>
           <a:prstGeom prst="rect">
@@ -15245,7 +14903,7 @@
         </p:nvSpPr>
         <p:spPr>
           <a:xfrm>
-            <a:off x="3293146" y="4169664"/>
+            <a:off x="3639312" y="4169664"/>
             <a:ext cx="685800" cy="475488"/>
           </a:xfrm>
           <a:prstGeom prst="rect">
@@ -15272,7 +14930,7 @@
         </p:nvSpPr>
         <p:spPr>
           <a:xfrm>
-            <a:off x="3293146" y="4169664"/>
+            <a:off x="3639312" y="4169664"/>
             <a:ext cx="685800" cy="475488"/>
           </a:xfrm>
           <a:prstGeom prst="rect">
@@ -15311,7 +14969,7 @@
         </p:nvSpPr>
         <p:spPr>
           <a:xfrm>
-            <a:off x="4331643" y="4169664"/>
+            <a:off x="4850892" y="4169664"/>
             <a:ext cx="685800" cy="475488"/>
           </a:xfrm>
           <a:prstGeom prst="rect">
@@ -15338,7 +14996,7 @@
         </p:nvSpPr>
         <p:spPr>
           <a:xfrm>
-            <a:off x="4331643" y="4169664"/>
+            <a:off x="4850892" y="4169664"/>
             <a:ext cx="685800" cy="475488"/>
           </a:xfrm>
           <a:prstGeom prst="rect">
@@ -15377,7 +15035,7 @@
         </p:nvSpPr>
         <p:spPr>
           <a:xfrm>
-            <a:off x="5370141" y="4169664"/>
+            <a:off x="6062472" y="4169664"/>
             <a:ext cx="685800" cy="475488"/>
           </a:xfrm>
           <a:prstGeom prst="rect">
@@ -15404,7 +15062,7 @@
         </p:nvSpPr>
         <p:spPr>
           <a:xfrm>
-            <a:off x="5370141" y="4169664"/>
+            <a:off x="6062472" y="4169664"/>
             <a:ext cx="685800" cy="475488"/>
           </a:xfrm>
           <a:prstGeom prst="rect">
@@ -15443,7 +15101,7 @@
         </p:nvSpPr>
         <p:spPr>
           <a:xfrm>
-            <a:off x="6408638" y="4169664"/>
+            <a:off x="7274052" y="4169664"/>
             <a:ext cx="685800" cy="475488"/>
           </a:xfrm>
           <a:prstGeom prst="rect">
@@ -15470,7 +15128,7 @@
         </p:nvSpPr>
         <p:spPr>
           <a:xfrm>
-            <a:off x="6408638" y="4169664"/>
+            <a:off x="7274052" y="4169664"/>
             <a:ext cx="685800" cy="475488"/>
           </a:xfrm>
           <a:prstGeom prst="rect">
@@ -15495,73 +15153,7 @@
                 <a:ea typeface="Trebuchet MS" pitchFamily="34" charset="-122"/>
                 <a:cs typeface="Trebuchet MS" pitchFamily="34" charset="-120"/>
               </a:rPr>
-              <a:t>o</a:t>
-            </a:r>
-            <a:endParaRPr lang="en-US" sz="900" dirty="0"/>
-          </a:p>
-        </p:txBody>
-      </p:sp>
-      <p:sp>
-        <p:nvSpPr>
-          <p:cNvPr id="43" name="Shape 41"/>
-          <p:cNvSpPr/>
-          <p:nvPr/>
-        </p:nvSpPr>
-        <p:spPr>
-          <a:xfrm>
-            <a:off x="7447135" y="4169664"/>
-            <a:ext cx="685800" cy="475488"/>
-          </a:xfrm>
-          <a:prstGeom prst="rect">
-            <a:avLst>
-              <a:gd name="adj" fmla="val 7692"/>
-            </a:avLst>
-          </a:prstGeom>
-          <a:solidFill>
-            <a:srgbClr val="FFFFFF"/>
-          </a:solidFill>
-          <a:ln w="12700">
-            <a:solidFill>
-              <a:srgbClr val="DB2777"/>
-            </a:solidFill>
-            <a:prstDash val="solid"/>
-          </a:ln>
-        </p:spPr>
-      </p:sp>
-      <p:sp>
-        <p:nvSpPr>
-          <p:cNvPr id="44" name="Text 42"/>
-          <p:cNvSpPr/>
-          <p:nvPr/>
-        </p:nvSpPr>
-        <p:spPr>
-          <a:xfrm>
-            <a:off x="7447135" y="4169664"/>
-            <a:ext cx="685800" cy="475488"/>
-          </a:xfrm>
-          <a:prstGeom prst="rect">
-            <a:avLst/>
-          </a:prstGeom>
-          <a:noFill/>
-          <a:ln/>
-        </p:spPr>
-        <p:txBody>
-          <a:bodyPr wrap="square" lIns="0" tIns="0" rIns="0" bIns="0" rtlCol="0" anchor="ctr"/>
-          <a:lstStyle/>
-          <a:p>
-            <a:pPr algn="ctr" indent="0" marL="0">
-              <a:buNone/>
-            </a:pPr>
-            <a:r>
-              <a:rPr lang="en-US" sz="900" b="1" dirty="0">
-                <a:solidFill>
-                  <a:srgbClr val="9D174D"/>
-                </a:solidFill>
-                <a:latin typeface="Trebuchet MS" pitchFamily="34" charset="0"/>
-                <a:ea typeface="Trebuchet MS" pitchFamily="34" charset="-122"/>
-                <a:cs typeface="Trebuchet MS" pitchFamily="34" charset="-120"/>
-              </a:rPr>
-              <a:t>ff</a:t>
+              <a:t>ed</a:t>
             </a:r>
             <a:endParaRPr lang="en-US" sz="900" dirty="0"/>
           </a:p>
@@ -16135,7 +15727,7 @@
                 <a:ea typeface="Calibri" pitchFamily="34" charset="-122"/>
                 <a:cs typeface="Calibri" pitchFamily="34" charset="-120"/>
               </a:rPr>
-              <a:t>Word Labs  •  wordlabs.app  •  Root: 'lift' = to raise or elevate</a:t>
+              <a:t>Word Labs  •  wordlabs.app  •  Root: 'lift' = to raise; to pick up</a:t>
             </a:r>
             <a:endParaRPr lang="en-US" sz="800" dirty="0"/>
           </a:p>
@@ -16469,7 +16061,7 @@
                 <a:ea typeface="Trebuchet MS" pitchFamily="34" charset="-122"/>
                 <a:cs typeface="Trebuchet MS" pitchFamily="34" charset="-120"/>
               </a:rPr>
-              <a:t>2</a:t>
+              <a:t>0</a:t>
             </a:r>
             <a:pPr algn="ctr" indent="0" marL="0">
               <a:buNone/>
@@ -16483,7 +16075,7 @@
                 <a:ea typeface="Trebuchet MS" pitchFamily="34" charset="-122"/>
                 <a:cs typeface="Trebuchet MS" pitchFamily="34" charset="-120"/>
               </a:rPr>
-              <a:t>  punctuation marks</a:t>
+              <a:t>  punctuation mark</a:t>
             </a:r>
             <a:endParaRPr lang="en-US" sz="2800" dirty="0"/>
           </a:p>
@@ -16775,7 +16367,7 @@
                 <a:ea typeface="Calibri" pitchFamily="34" charset="-122"/>
                 <a:cs typeface="Calibri" pitchFamily="34" charset="-120"/>
               </a:rPr>
-              <a:t>Word Labs  •  wordlabs.app  •  Root: 'lift' = to raise or elevate</a:t>
+              <a:t>Word Labs  •  wordlabs.app  •  Root: 'lift' = to raise; to pick up</a:t>
             </a:r>
             <a:endParaRPr lang="en-US" sz="800" dirty="0"/>
           </a:p>
@@ -16887,7 +16479,7 @@
                 <a:ea typeface="Calibri" pitchFamily="34" charset="-122"/>
                 <a:cs typeface="Calibri" pitchFamily="34" charset="-120"/>
               </a:rPr>
-              <a:t>During the </a:t>
+              <a:t>The weight </a:t>
             </a:r>
             <a:pPr algn="l" indent="0" marL="0">
               <a:buNone/>
@@ -16904,7 +16496,7 @@
                 <a:ea typeface="Calibri" pitchFamily="34" charset="-122"/>
                 <a:cs typeface="Calibri" pitchFamily="34" charset="-120"/>
               </a:rPr>
-              <a:t>airlift</a:t>
+              <a:t>lifter</a:t>
             </a:r>
             <a:pPr algn="l" indent="0" marL="0">
               <a:buNone/>
@@ -16918,7 +16510,7 @@
                 <a:ea typeface="Calibri" pitchFamily="34" charset="-122"/>
                 <a:cs typeface="Calibri" pitchFamily="34" charset="-120"/>
               </a:rPr>
-              <a:t>, the </a:t>
+              <a:t> trained every day at the gym. The weight </a:t>
             </a:r>
             <a:pPr algn="l" indent="0" marL="0">
               <a:buNone/>
@@ -16935,7 +16527,7 @@
                 <a:ea typeface="Calibri" pitchFamily="34" charset="-122"/>
                 <a:cs typeface="Calibri" pitchFamily="34" charset="-120"/>
               </a:rPr>
-              <a:t>lifted</a:t>
+              <a:t>lifters</a:t>
             </a:r>
             <a:pPr algn="l" indent="0" marL="0">
               <a:buNone/>
@@ -16949,7 +16541,7 @@
                 <a:ea typeface="Calibri" pitchFamily="34" charset="-122"/>
                 <a:cs typeface="Calibri" pitchFamily="34" charset="-120"/>
               </a:rPr>
-              <a:t> supplies arrived quickly; the experienced </a:t>
+              <a:t> competed in the tournament. </a:t>
             </a:r>
             <a:pPr algn="l" indent="0" marL="0">
               <a:buNone/>
@@ -16966,7 +16558,7 @@
                 <a:ea typeface="Calibri" pitchFamily="34" charset="-122"/>
                 <a:cs typeface="Calibri" pitchFamily="34" charset="-120"/>
               </a:rPr>
-              <a:t>lifter</a:t>
+              <a:t>Lifting</a:t>
             </a:r>
             <a:pPr algn="l" indent="0" marL="0">
               <a:buNone/>
@@ -16980,7 +16572,7 @@
                 <a:ea typeface="Calibri" pitchFamily="34" charset="-122"/>
                 <a:cs typeface="Calibri" pitchFamily="34" charset="-120"/>
               </a:rPr>
-              <a:t> carried the last crate to safety.</a:t>
+              <a:t> heavy boxes can hurt your back if you're not careful.</a:t>
             </a:r>
             <a:endParaRPr lang="en-US" sz="1800" dirty="0"/>
           </a:p>
@@ -17135,7 +16727,7 @@
                 <a:ea typeface="Trebuchet MS" pitchFamily="34" charset="-122"/>
                 <a:cs typeface="Trebuchet MS" pitchFamily="34" charset="-120"/>
               </a:rPr>
-              <a:t>airlift</a:t>
+              <a:t>lifter</a:t>
             </a:r>
             <a:endParaRPr lang="en-US" sz="1400" dirty="0"/>
           </a:p>
@@ -17263,7 +16855,7 @@
                 <a:ea typeface="Trebuchet MS" pitchFamily="34" charset="-122"/>
                 <a:cs typeface="Trebuchet MS" pitchFamily="34" charset="-120"/>
               </a:rPr>
-              <a:t>lifted</a:t>
+              <a:t>lifters</a:t>
             </a:r>
             <a:endParaRPr lang="en-US" sz="1400" dirty="0"/>
           </a:p>
@@ -17391,7 +16983,7 @@
                 <a:ea typeface="Trebuchet MS" pitchFamily="34" charset="-122"/>
                 <a:cs typeface="Trebuchet MS" pitchFamily="34" charset="-120"/>
               </a:rPr>
-              <a:t>lifter</a:t>
+              <a:t>lifting</a:t>
             </a:r>
             <a:endParaRPr lang="en-US" sz="1400" dirty="0"/>
           </a:p>
@@ -17722,7 +17314,7 @@
                 <a:ea typeface="Calibri" pitchFamily="34" charset="-122"/>
                 <a:cs typeface="Calibri" pitchFamily="34" charset="-120"/>
               </a:rPr>
-              <a:t>Word Labs  •  wordlabs.app  •  Root: 'lift' = to raise or elevate</a:t>
+              <a:t>Word Labs  •  wordlabs.app  •  Root: 'lift' = to raise; to pick up</a:t>
             </a:r>
             <a:endParaRPr lang="en-US" sz="800" dirty="0"/>
           </a:p>
@@ -17861,7 +17453,7 @@
                 <a:ea typeface="Trebuchet MS" pitchFamily="34" charset="-122"/>
                 <a:cs typeface="Trebuchet MS" pitchFamily="34" charset="-120"/>
               </a:rPr>
-              <a:t>airlift</a:t>
+              <a:t>lifter</a:t>
             </a:r>
             <a:endParaRPr lang="en-US" sz="2800" dirty="0"/>
           </a:p>
@@ -18549,7 +18141,7 @@
                 <a:ea typeface="Calibri" pitchFamily="34" charset="-122"/>
                 <a:cs typeface="Calibri" pitchFamily="34" charset="-120"/>
               </a:rPr>
-              <a:t>Word Labs  •  wordlabs.app  •  Root: 'lift' = to raise or elevate</a:t>
+              <a:t>Word Labs  •  wordlabs.app  •  Root: 'lift' = to raise; to pick up</a:t>
             </a:r>
             <a:endParaRPr lang="en-US" sz="800" dirty="0"/>
           </a:p>
@@ -18688,7 +18280,7 @@
                 <a:ea typeface="Trebuchet MS" pitchFamily="34" charset="-122"/>
                 <a:cs typeface="Trebuchet MS" pitchFamily="34" charset="-120"/>
               </a:rPr>
-              <a:t>airlift</a:t>
+              <a:t>lifter</a:t>
             </a:r>
             <a:endParaRPr lang="en-US" sz="2800" dirty="0"/>
           </a:p>
@@ -18777,11 +18369,11 @@
             </a:avLst>
           </a:prstGeom>
           <a:solidFill>
-            <a:srgbClr val="DDD6FE"/>
+            <a:srgbClr val="CCFBF1"/>
           </a:solidFill>
           <a:ln w="19050">
             <a:solidFill>
-              <a:srgbClr val="7C3AED"/>
+              <a:srgbClr val="0D9488"/>
             </a:solidFill>
             <a:prstDash val="solid"/>
           </a:ln>
@@ -18821,13 +18413,13 @@
             <a:r>
               <a:rPr lang="en-US" sz="1300" b="1" dirty="0">
                 <a:solidFill>
-                  <a:srgbClr val="4C1D95"/>
+                  <a:srgbClr val="0F766E"/>
                 </a:solidFill>
                 <a:latin typeface="Trebuchet MS" pitchFamily="34" charset="0"/>
                 <a:ea typeface="Trebuchet MS" pitchFamily="34" charset="-122"/>
                 <a:cs typeface="Trebuchet MS" pitchFamily="34" charset="-120"/>
               </a:rPr>
-              <a:t>air</a:t>
+              <a:t>lift</a:t>
             </a:r>
             <a:endParaRPr lang="en-US" sz="1300" dirty="0"/>
           </a:p>
@@ -18866,7 +18458,7 @@
                 <a:ea typeface="Calibri" pitchFamily="34" charset="-122"/>
                 <a:cs typeface="Calibri" pitchFamily="34" charset="-120"/>
               </a:rPr>
-              <a:t>the sky or atmosphere</a:t>
+              <a:t>to raise; to pick up</a:t>
             </a:r>
             <a:endParaRPr lang="en-US" sz="850" dirty="0"/>
           </a:p>
@@ -18889,11 +18481,11 @@
             </a:avLst>
           </a:prstGeom>
           <a:solidFill>
-            <a:srgbClr val="CCFBF1"/>
+            <a:srgbClr val="FCE7F3"/>
           </a:solidFill>
           <a:ln w="19050">
             <a:solidFill>
-              <a:srgbClr val="0D9488"/>
+              <a:srgbClr val="DB2777"/>
             </a:solidFill>
             <a:prstDash val="solid"/>
           </a:ln>
@@ -18933,13 +18525,13 @@
             <a:r>
               <a:rPr lang="en-US" sz="1300" b="1" dirty="0">
                 <a:solidFill>
-                  <a:srgbClr val="0F766E"/>
+                  <a:srgbClr val="9D174D"/>
                 </a:solidFill>
                 <a:latin typeface="Trebuchet MS" pitchFamily="34" charset="0"/>
                 <a:ea typeface="Trebuchet MS" pitchFamily="34" charset="-122"/>
                 <a:cs typeface="Trebuchet MS" pitchFamily="34" charset="-120"/>
               </a:rPr>
-              <a:t>lift</a:t>
+              <a:t>er</a:t>
             </a:r>
             <a:endParaRPr lang="en-US" sz="1300" dirty="0"/>
           </a:p>
@@ -18978,7 +18570,7 @@
                 <a:ea typeface="Calibri" pitchFamily="34" charset="-122"/>
                 <a:cs typeface="Calibri" pitchFamily="34" charset="-120"/>
               </a:rPr>
-              <a:t>to raise or elevate</a:t>
+              <a:t>person who; more</a:t>
             </a:r>
             <a:endParaRPr lang="en-US" sz="850" dirty="0"/>
           </a:p>
@@ -19534,7 +19126,7 @@
                 <a:ea typeface="Calibri" pitchFamily="34" charset="-122"/>
                 <a:cs typeface="Calibri" pitchFamily="34" charset="-120"/>
               </a:rPr>
-              <a:t>Word Labs  •  wordlabs.app  •  Root: 'lift' = to raise or elevate</a:t>
+              <a:t>Word Labs  •  wordlabs.app  •  Root: 'lift' = to raise; to pick up</a:t>
             </a:r>
             <a:endParaRPr lang="en-US" sz="800" dirty="0"/>
           </a:p>
@@ -19673,7 +19265,7 @@
                 <a:ea typeface="Trebuchet MS" pitchFamily="34" charset="-122"/>
                 <a:cs typeface="Trebuchet MS" pitchFamily="34" charset="-120"/>
               </a:rPr>
-              <a:t>airlift</a:t>
+              <a:t>lifter</a:t>
             </a:r>
             <a:endParaRPr lang="en-US" sz="2800" dirty="0"/>
           </a:p>
@@ -19762,11 +19354,11 @@
             </a:avLst>
           </a:prstGeom>
           <a:solidFill>
-            <a:srgbClr val="DDD6FE"/>
+            <a:srgbClr val="CCFBF1"/>
           </a:solidFill>
           <a:ln w="19050">
             <a:solidFill>
-              <a:srgbClr val="7C3AED"/>
+              <a:srgbClr val="0D9488"/>
             </a:solidFill>
             <a:prstDash val="solid"/>
           </a:ln>
@@ -19806,13 +19398,13 @@
             <a:r>
               <a:rPr lang="en-US" sz="1300" b="1" dirty="0">
                 <a:solidFill>
-                  <a:srgbClr val="4C1D95"/>
+                  <a:srgbClr val="0F766E"/>
                 </a:solidFill>
                 <a:latin typeface="Trebuchet MS" pitchFamily="34" charset="0"/>
                 <a:ea typeface="Trebuchet MS" pitchFamily="34" charset="-122"/>
                 <a:cs typeface="Trebuchet MS" pitchFamily="34" charset="-120"/>
               </a:rPr>
-              <a:t>air</a:t>
+              <a:t>lift</a:t>
             </a:r>
             <a:endParaRPr lang="en-US" sz="1300" dirty="0"/>
           </a:p>
@@ -19851,7 +19443,7 @@
                 <a:ea typeface="Calibri" pitchFamily="34" charset="-122"/>
                 <a:cs typeface="Calibri" pitchFamily="34" charset="-120"/>
               </a:rPr>
-              <a:t>the sky or atmosphere</a:t>
+              <a:t>to raise; to pick up</a:t>
             </a:r>
             <a:endParaRPr lang="en-US" sz="850" dirty="0"/>
           </a:p>
@@ -19874,11 +19466,11 @@
             </a:avLst>
           </a:prstGeom>
           <a:solidFill>
-            <a:srgbClr val="CCFBF1"/>
+            <a:srgbClr val="FCE7F3"/>
           </a:solidFill>
           <a:ln w="19050">
             <a:solidFill>
-              <a:srgbClr val="0D9488"/>
+              <a:srgbClr val="DB2777"/>
             </a:solidFill>
             <a:prstDash val="solid"/>
           </a:ln>
@@ -19918,13 +19510,13 @@
             <a:r>
               <a:rPr lang="en-US" sz="1300" b="1" dirty="0">
                 <a:solidFill>
-                  <a:srgbClr val="0F766E"/>
+                  <a:srgbClr val="9D174D"/>
                 </a:solidFill>
                 <a:latin typeface="Trebuchet MS" pitchFamily="34" charset="0"/>
                 <a:ea typeface="Trebuchet MS" pitchFamily="34" charset="-122"/>
                 <a:cs typeface="Trebuchet MS" pitchFamily="34" charset="-120"/>
               </a:rPr>
-              <a:t>lift</a:t>
+              <a:t>er</a:t>
             </a:r>
             <a:endParaRPr lang="en-US" sz="1300" dirty="0"/>
           </a:p>
@@ -19963,7 +19555,7 @@
                 <a:ea typeface="Calibri" pitchFamily="34" charset="-122"/>
                 <a:cs typeface="Calibri" pitchFamily="34" charset="-120"/>
               </a:rPr>
-              <a:t>to raise or elevate</a:t>
+              <a:t>person who; more</a:t>
             </a:r>
             <a:endParaRPr lang="en-US" sz="850" dirty="0"/>
           </a:p>
@@ -20122,7 +19714,7 @@
                 <a:ea typeface="Trebuchet MS" pitchFamily="34" charset="-122"/>
                 <a:cs typeface="Trebuchet MS" pitchFamily="34" charset="-120"/>
               </a:rPr>
-              <a:t>air</a:t>
+              <a:t>lift</a:t>
             </a:r>
             <a:endParaRPr lang="en-US" sz="1400" dirty="0"/>
           </a:p>
@@ -20227,7 +19819,7 @@
                 <a:ea typeface="Trebuchet MS" pitchFamily="34" charset="-122"/>
                 <a:cs typeface="Trebuchet MS" pitchFamily="34" charset="-120"/>
               </a:rPr>
-              <a:t>lift</a:t>
+              <a:t>er</a:t>
             </a:r>
             <a:endParaRPr lang="en-US" sz="1400" dirty="0"/>
           </a:p>
@@ -20651,7 +20243,7 @@
                 <a:ea typeface="Calibri" pitchFamily="34" charset="-122"/>
                 <a:cs typeface="Calibri" pitchFamily="34" charset="-120"/>
               </a:rPr>
-              <a:t>Word Labs  •  wordlabs.app  •  Root: 'lift' = to raise or elevate</a:t>
+              <a:t>Word Labs  •  wordlabs.app  •  Root: 'lift' = to raise; to pick up</a:t>
             </a:r>
             <a:endParaRPr lang="en-US" sz="800" dirty="0"/>
           </a:p>
@@ -20790,7 +20382,7 @@
                 <a:ea typeface="Trebuchet MS" pitchFamily="34" charset="-122"/>
                 <a:cs typeface="Trebuchet MS" pitchFamily="34" charset="-120"/>
               </a:rPr>
-              <a:t>airlift</a:t>
+              <a:t>lifter</a:t>
             </a:r>
             <a:endParaRPr lang="en-US" sz="2800" dirty="0"/>
           </a:p>
@@ -20879,11 +20471,11 @@
             </a:avLst>
           </a:prstGeom>
           <a:solidFill>
-            <a:srgbClr val="DDD6FE"/>
+            <a:srgbClr val="CCFBF1"/>
           </a:solidFill>
           <a:ln w="19050">
             <a:solidFill>
-              <a:srgbClr val="7C3AED"/>
+              <a:srgbClr val="0D9488"/>
             </a:solidFill>
             <a:prstDash val="solid"/>
           </a:ln>
@@ -20923,13 +20515,13 @@
             <a:r>
               <a:rPr lang="en-US" sz="1300" b="1" dirty="0">
                 <a:solidFill>
-                  <a:srgbClr val="4C1D95"/>
+                  <a:srgbClr val="0F766E"/>
                 </a:solidFill>
                 <a:latin typeface="Trebuchet MS" pitchFamily="34" charset="0"/>
                 <a:ea typeface="Trebuchet MS" pitchFamily="34" charset="-122"/>
                 <a:cs typeface="Trebuchet MS" pitchFamily="34" charset="-120"/>
               </a:rPr>
-              <a:t>air</a:t>
+              <a:t>lift</a:t>
             </a:r>
             <a:endParaRPr lang="en-US" sz="1300" dirty="0"/>
           </a:p>
@@ -20968,7 +20560,7 @@
                 <a:ea typeface="Calibri" pitchFamily="34" charset="-122"/>
                 <a:cs typeface="Calibri" pitchFamily="34" charset="-120"/>
               </a:rPr>
-              <a:t>the sky or atmosphere</a:t>
+              <a:t>to raise; to pick up</a:t>
             </a:r>
             <a:endParaRPr lang="en-US" sz="850" dirty="0"/>
           </a:p>
@@ -20991,11 +20583,11 @@
             </a:avLst>
           </a:prstGeom>
           <a:solidFill>
-            <a:srgbClr val="CCFBF1"/>
+            <a:srgbClr val="FCE7F3"/>
           </a:solidFill>
           <a:ln w="19050">
             <a:solidFill>
-              <a:srgbClr val="0D9488"/>
+              <a:srgbClr val="DB2777"/>
             </a:solidFill>
             <a:prstDash val="solid"/>
           </a:ln>
@@ -21035,13 +20627,13 @@
             <a:r>
               <a:rPr lang="en-US" sz="1300" b="1" dirty="0">
                 <a:solidFill>
-                  <a:srgbClr val="0F766E"/>
+                  <a:srgbClr val="9D174D"/>
                 </a:solidFill>
                 <a:latin typeface="Trebuchet MS" pitchFamily="34" charset="0"/>
                 <a:ea typeface="Trebuchet MS" pitchFamily="34" charset="-122"/>
                 <a:cs typeface="Trebuchet MS" pitchFamily="34" charset="-120"/>
               </a:rPr>
-              <a:t>lift</a:t>
+              <a:t>er</a:t>
             </a:r>
             <a:endParaRPr lang="en-US" sz="1300" dirty="0"/>
           </a:p>
@@ -21080,7 +20672,7 @@
                 <a:ea typeface="Calibri" pitchFamily="34" charset="-122"/>
                 <a:cs typeface="Calibri" pitchFamily="34" charset="-120"/>
               </a:rPr>
-              <a:t>to raise or elevate</a:t>
+              <a:t>person who; more</a:t>
             </a:r>
             <a:endParaRPr lang="en-US" sz="850" dirty="0"/>
           </a:p>
@@ -21239,7 +20831,7 @@
                 <a:ea typeface="Trebuchet MS" pitchFamily="34" charset="-122"/>
                 <a:cs typeface="Trebuchet MS" pitchFamily="34" charset="-120"/>
               </a:rPr>
-              <a:t>air</a:t>
+              <a:t>lift</a:t>
             </a:r>
             <a:endParaRPr lang="en-US" sz="1400" dirty="0"/>
           </a:p>
@@ -21344,7 +20936,7 @@
                 <a:ea typeface="Trebuchet MS" pitchFamily="34" charset="-122"/>
                 <a:cs typeface="Trebuchet MS" pitchFamily="34" charset="-120"/>
               </a:rPr>
-              <a:t>lift</a:t>
+              <a:t>er</a:t>
             </a:r>
             <a:endParaRPr lang="en-US" sz="1400" dirty="0"/>
           </a:p>
@@ -21503,7 +21095,7 @@
                 <a:ea typeface="Trebuchet MS" pitchFamily="34" charset="-122"/>
                 <a:cs typeface="Trebuchet MS" pitchFamily="34" charset="-120"/>
               </a:rPr>
-              <a:t>air</a:t>
+              <a:t>l</a:t>
             </a:r>
             <a:endParaRPr lang="en-US" sz="900" dirty="0"/>
           </a:p>
@@ -21569,7 +21161,7 @@
                 <a:ea typeface="Trebuchet MS" pitchFamily="34" charset="-122"/>
                 <a:cs typeface="Trebuchet MS" pitchFamily="34" charset="-120"/>
               </a:rPr>
-              <a:t>l</a:t>
+              <a:t>i</a:t>
             </a:r>
             <a:endParaRPr lang="en-US" sz="900" dirty="0"/>
           </a:p>
@@ -21635,7 +21227,7 @@
                 <a:ea typeface="Trebuchet MS" pitchFamily="34" charset="-122"/>
                 <a:cs typeface="Trebuchet MS" pitchFamily="34" charset="-120"/>
               </a:rPr>
-              <a:t>i</a:t>
+              <a:t>f</a:t>
             </a:r>
             <a:endParaRPr lang="en-US" sz="900" dirty="0"/>
           </a:p>
@@ -21701,7 +21293,7 @@
                 <a:ea typeface="Trebuchet MS" pitchFamily="34" charset="-122"/>
                 <a:cs typeface="Trebuchet MS" pitchFamily="34" charset="-120"/>
               </a:rPr>
-              <a:t>f</a:t>
+              <a:t>t</a:t>
             </a:r>
             <a:endParaRPr lang="en-US" sz="900" dirty="0"/>
           </a:p>
@@ -21767,7 +21359,7 @@
                 <a:ea typeface="Trebuchet MS" pitchFamily="34" charset="-122"/>
                 <a:cs typeface="Trebuchet MS" pitchFamily="34" charset="-120"/>
               </a:rPr>
-              <a:t>t</a:t>
+              <a:t>er</a:t>
             </a:r>
             <a:endParaRPr lang="en-US" sz="900" dirty="0"/>
           </a:p>
@@ -22059,7 +21651,7 @@
                 <a:ea typeface="Calibri" pitchFamily="34" charset="-122"/>
                 <a:cs typeface="Calibri" pitchFamily="34" charset="-120"/>
               </a:rPr>
-              <a:t>Word Labs  •  wordlabs.app  •  Root: 'lift' = to raise or elevate</a:t>
+              <a:t>Word Labs  •  wordlabs.app  •  Root: 'lift' = to raise; to pick up</a:t>
             </a:r>
             <a:endParaRPr lang="en-US" sz="800" dirty="0"/>
           </a:p>
@@ -22198,7 +21790,7 @@
                 <a:ea typeface="Trebuchet MS" pitchFamily="34" charset="-122"/>
                 <a:cs typeface="Trebuchet MS" pitchFamily="34" charset="-120"/>
               </a:rPr>
-              <a:t>lifted</a:t>
+              <a:t>lifters</a:t>
             </a:r>
             <a:endParaRPr lang="en-US" sz="2800" dirty="0"/>
           </a:p>
@@ -22886,7 +22478,7 @@
                 <a:ea typeface="Calibri" pitchFamily="34" charset="-122"/>
                 <a:cs typeface="Calibri" pitchFamily="34" charset="-120"/>
               </a:rPr>
-              <a:t>Word Labs  •  wordlabs.app  •  Root: 'lift' = to raise or elevate</a:t>
+              <a:t>Word Labs  •  wordlabs.app  •  Root: 'lift' = to raise; to pick up</a:t>
             </a:r>
             <a:endParaRPr lang="en-US" sz="800" dirty="0"/>
           </a:p>
@@ -23025,7 +22617,7 @@
                 <a:ea typeface="Trebuchet MS" pitchFamily="34" charset="-122"/>
                 <a:cs typeface="Trebuchet MS" pitchFamily="34" charset="-120"/>
               </a:rPr>
-              <a:t>lifted</a:t>
+              <a:t>lifters</a:t>
             </a:r>
             <a:endParaRPr lang="en-US" sz="2800" dirty="0"/>
           </a:p>
@@ -23105,7 +22697,7 @@
         </p:nvSpPr>
         <p:spPr>
           <a:xfrm>
-            <a:off x="2938272" y="2258568"/>
+            <a:off x="2221992" y="2258568"/>
             <a:ext cx="1828800" cy="292608"/>
           </a:xfrm>
           <a:prstGeom prst="rect">
@@ -23139,7 +22731,7 @@
         </p:nvSpPr>
         <p:spPr>
           <a:xfrm>
-            <a:off x="2938272" y="2258568"/>
+            <a:off x="2221992" y="2258568"/>
             <a:ext cx="1828800" cy="292608"/>
           </a:xfrm>
           <a:prstGeom prst="rect">
@@ -23178,7 +22770,7 @@
         </p:nvSpPr>
         <p:spPr>
           <a:xfrm>
-            <a:off x="2938272" y="2569464"/>
+            <a:off x="2221992" y="2569464"/>
             <a:ext cx="1828800" cy="201168"/>
           </a:xfrm>
           <a:prstGeom prst="rect">
@@ -23203,7 +22795,7 @@
                 <a:ea typeface="Calibri" pitchFamily="34" charset="-122"/>
                 <a:cs typeface="Calibri" pitchFamily="34" charset="-120"/>
               </a:rPr>
-              <a:t>to raise or elevate</a:t>
+              <a:t>to raise; to pick up</a:t>
             </a:r>
             <a:endParaRPr lang="en-US" sz="850" dirty="0"/>
           </a:p>
@@ -23217,7 +22809,7 @@
         </p:nvSpPr>
         <p:spPr>
           <a:xfrm>
-            <a:off x="5803392" y="2258568"/>
+            <a:off x="4370832" y="2258568"/>
             <a:ext cx="1828800" cy="292608"/>
           </a:xfrm>
           <a:prstGeom prst="rect">
@@ -23251,7 +22843,7 @@
         </p:nvSpPr>
         <p:spPr>
           <a:xfrm>
-            <a:off x="5803392" y="2258568"/>
+            <a:off x="4370832" y="2258568"/>
             <a:ext cx="1828800" cy="292608"/>
           </a:xfrm>
           <a:prstGeom prst="rect">
@@ -23276,7 +22868,7 @@
                 <a:ea typeface="Trebuchet MS" pitchFamily="34" charset="-122"/>
                 <a:cs typeface="Trebuchet MS" pitchFamily="34" charset="-120"/>
               </a:rPr>
-              <a:t>ed</a:t>
+              <a:t>er</a:t>
             </a:r>
             <a:endParaRPr lang="en-US" sz="1300" dirty="0"/>
           </a:p>
@@ -23290,7 +22882,7 @@
         </p:nvSpPr>
         <p:spPr>
           <a:xfrm>
-            <a:off x="5803392" y="2569464"/>
+            <a:off x="4370832" y="2569464"/>
             <a:ext cx="1828800" cy="201168"/>
           </a:xfrm>
           <a:prstGeom prst="rect">
@@ -23315,7 +22907,7 @@
                 <a:ea typeface="Calibri" pitchFamily="34" charset="-122"/>
                 <a:cs typeface="Calibri" pitchFamily="34" charset="-120"/>
               </a:rPr>
-              <a:t>past tense</a:t>
+              <a:t>person who; more</a:t>
             </a:r>
             <a:endParaRPr lang="en-US" sz="850" dirty="0"/>
           </a:p>
@@ -23324,6 +22916,118 @@
       <p:sp>
         <p:nvSpPr>
           <p:cNvPr id="22" name="Shape 20"/>
+          <p:cNvSpPr/>
+          <p:nvPr/>
+        </p:nvSpPr>
+        <p:spPr>
+          <a:xfrm>
+            <a:off x="6519672" y="2258568"/>
+            <a:ext cx="1828800" cy="292608"/>
+          </a:xfrm>
+          <a:prstGeom prst="rect">
+            <a:avLst>
+              <a:gd name="adj" fmla="val 25000"/>
+            </a:avLst>
+          </a:prstGeom>
+          <a:solidFill>
+            <a:srgbClr val="FCE7F3"/>
+          </a:solidFill>
+          <a:ln w="19050">
+            <a:solidFill>
+              <a:srgbClr val="DB2777"/>
+            </a:solidFill>
+            <a:prstDash val="solid"/>
+          </a:ln>
+          <a:effectLst>
+            <a:outerShdw sx="100000" sy="100000" kx="0" ky="0" algn="bl" rotWithShape="0" blurRad="101600" dist="38100" dir="8100000">
+              <a:srgbClr val="000000">
+                <a:alpha val="12000"/>
+              </a:srgbClr>
+            </a:outerShdw>
+          </a:effectLst>
+        </p:spPr>
+      </p:sp>
+      <p:sp>
+        <p:nvSpPr>
+          <p:cNvPr id="23" name="Text 21"/>
+          <p:cNvSpPr/>
+          <p:nvPr/>
+        </p:nvSpPr>
+        <p:spPr>
+          <a:xfrm>
+            <a:off x="6519672" y="2258568"/>
+            <a:ext cx="1828800" cy="292608"/>
+          </a:xfrm>
+          <a:prstGeom prst="rect">
+            <a:avLst/>
+          </a:prstGeom>
+          <a:noFill/>
+          <a:ln/>
+        </p:spPr>
+        <p:txBody>
+          <a:bodyPr wrap="square" lIns="0" tIns="0" rIns="0" bIns="0" rtlCol="0" anchor="ctr"/>
+          <a:lstStyle/>
+          <a:p>
+            <a:pPr algn="ctr" indent="0" marL="0">
+              <a:buNone/>
+            </a:pPr>
+            <a:r>
+              <a:rPr lang="en-US" sz="1300" b="1" dirty="0">
+                <a:solidFill>
+                  <a:srgbClr val="9D174D"/>
+                </a:solidFill>
+                <a:latin typeface="Trebuchet MS" pitchFamily="34" charset="0"/>
+                <a:ea typeface="Trebuchet MS" pitchFamily="34" charset="-122"/>
+                <a:cs typeface="Trebuchet MS" pitchFamily="34" charset="-120"/>
+              </a:rPr>
+              <a:t>s</a:t>
+            </a:r>
+            <a:endParaRPr lang="en-US" sz="1300" dirty="0"/>
+          </a:p>
+        </p:txBody>
+      </p:sp>
+      <p:sp>
+        <p:nvSpPr>
+          <p:cNvPr id="24" name="Text 22"/>
+          <p:cNvSpPr/>
+          <p:nvPr/>
+        </p:nvSpPr>
+        <p:spPr>
+          <a:xfrm>
+            <a:off x="6519672" y="2569464"/>
+            <a:ext cx="1828800" cy="201168"/>
+          </a:xfrm>
+          <a:prstGeom prst="rect">
+            <a:avLst/>
+          </a:prstGeom>
+          <a:noFill/>
+          <a:ln/>
+        </p:spPr>
+        <p:txBody>
+          <a:bodyPr wrap="square" lIns="0" tIns="0" rIns="0" bIns="0" rtlCol="0" anchor="t"/>
+          <a:lstStyle/>
+          <a:p>
+            <a:pPr algn="ctr" indent="0" marL="0">
+              <a:buNone/>
+            </a:pPr>
+            <a:r>
+              <a:rPr lang="en-US" sz="850" dirty="0">
+                <a:solidFill>
+                  <a:srgbClr val="475569"/>
+                </a:solidFill>
+                <a:latin typeface="Calibri" pitchFamily="34" charset="0"/>
+                <a:ea typeface="Calibri" pitchFamily="34" charset="-122"/>
+                <a:cs typeface="Calibri" pitchFamily="34" charset="-120"/>
+              </a:rPr>
+              <a:t>plural or present tense</a:t>
+            </a:r>
+            <a:endParaRPr lang="en-US" sz="850" dirty="0"/>
+          </a:p>
+        </p:txBody>
+      </p:sp>
+      <p:sp>
+        <p:nvSpPr>
+          <p:cNvPr id="25" name="Shape 23"/>
           <p:cNvSpPr/>
           <p:nvPr/>
         </p:nvSpPr>
@@ -23350,7 +23054,7 @@
       </p:sp>
       <p:sp>
         <p:nvSpPr>
-          <p:cNvPr id="23" name="Text 21"/>
+          <p:cNvPr id="26" name="Text 24"/>
           <p:cNvSpPr/>
           <p:nvPr/>
         </p:nvSpPr>
@@ -23389,7 +23093,7 @@
       </p:sp>
       <p:sp>
         <p:nvSpPr>
-          <p:cNvPr id="24" name="Shape 22"/>
+          <p:cNvPr id="27" name="Shape 25"/>
           <p:cNvSpPr/>
           <p:nvPr/>
         </p:nvSpPr>
@@ -23416,7 +23120,7 @@
       </p:sp>
       <p:sp>
         <p:nvSpPr>
-          <p:cNvPr id="25" name="Text 23"/>
+          <p:cNvPr id="28" name="Text 26"/>
           <p:cNvSpPr/>
           <p:nvPr/>
         </p:nvSpPr>
@@ -23455,7 +23159,7 @@
       </p:sp>
       <p:sp>
         <p:nvSpPr>
-          <p:cNvPr id="26" name="Shape 24"/>
+          <p:cNvPr id="29" name="Shape 27"/>
           <p:cNvSpPr/>
           <p:nvPr/>
         </p:nvSpPr>
@@ -23482,7 +23186,7 @@
       </p:sp>
       <p:sp>
         <p:nvSpPr>
-          <p:cNvPr id="27" name="Text 25"/>
+          <p:cNvPr id="30" name="Text 28"/>
           <p:cNvSpPr/>
           <p:nvPr/>
         </p:nvSpPr>
@@ -23521,7 +23225,7 @@
       </p:sp>
       <p:sp>
         <p:nvSpPr>
-          <p:cNvPr id="28" name="Shape 26"/>
+          <p:cNvPr id="31" name="Shape 29"/>
           <p:cNvSpPr/>
           <p:nvPr/>
         </p:nvSpPr>
@@ -23548,7 +23252,7 @@
       </p:sp>
       <p:sp>
         <p:nvSpPr>
-          <p:cNvPr id="29" name="Text 27"/>
+          <p:cNvPr id="32" name="Text 30"/>
           <p:cNvSpPr/>
           <p:nvPr/>
         </p:nvSpPr>
@@ -23871,7 +23575,7 @@
                 <a:ea typeface="Calibri" pitchFamily="34" charset="-122"/>
                 <a:cs typeface="Calibri" pitchFamily="34" charset="-120"/>
               </a:rPr>
-              <a:t>Word Labs  •  wordlabs.app  •  Root: 'lift' = to raise or elevate</a:t>
+              <a:t>Word Labs  •  wordlabs.app  •  Root: 'lift' = to raise; to pick up</a:t>
             </a:r>
             <a:endParaRPr lang="en-US" sz="800" dirty="0"/>
           </a:p>
@@ -23944,7 +23648,7 @@
                 <a:ea typeface="Trebuchet MS" pitchFamily="34" charset="-122"/>
                 <a:cs typeface="Trebuchet MS" pitchFamily="34" charset="-120"/>
               </a:rPr>
-              <a:t>We are learning that the root 'lift' means 'to raise or elevate'.</a:t>
+              <a:t>We are learning that the root 'lift' means 'to raise; to pick up'.</a:t>
             </a:r>
             <a:endParaRPr lang="en-US" sz="2000" dirty="0"/>
           </a:p>
@@ -24590,7 +24294,7 @@
                 <a:ea typeface="Calibri" pitchFamily="34" charset="-122"/>
                 <a:cs typeface="Calibri" pitchFamily="34" charset="-120"/>
               </a:rPr>
-              <a:t>Word Labs  •  wordlabs.app  •  Root: 'lift' = to raise or elevate</a:t>
+              <a:t>Word Labs  •  wordlabs.app  •  Root: 'lift' = to raise; to pick up</a:t>
             </a:r>
             <a:endParaRPr lang="en-US" sz="800" dirty="0"/>
           </a:p>
@@ -24729,7 +24433,7 @@
                 <a:ea typeface="Trebuchet MS" pitchFamily="34" charset="-122"/>
                 <a:cs typeface="Trebuchet MS" pitchFamily="34" charset="-120"/>
               </a:rPr>
-              <a:t>lifted</a:t>
+              <a:t>lifters</a:t>
             </a:r>
             <a:endParaRPr lang="en-US" sz="2800" dirty="0"/>
           </a:p>
@@ -24809,7 +24513,7 @@
         </p:nvSpPr>
         <p:spPr>
           <a:xfrm>
-            <a:off x="2938272" y="2258568"/>
+            <a:off x="2221992" y="2258568"/>
             <a:ext cx="1828800" cy="292608"/>
           </a:xfrm>
           <a:prstGeom prst="rect">
@@ -24843,7 +24547,7 @@
         </p:nvSpPr>
         <p:spPr>
           <a:xfrm>
-            <a:off x="2938272" y="2258568"/>
+            <a:off x="2221992" y="2258568"/>
             <a:ext cx="1828800" cy="292608"/>
           </a:xfrm>
           <a:prstGeom prst="rect">
@@ -24882,7 +24586,7 @@
         </p:nvSpPr>
         <p:spPr>
           <a:xfrm>
-            <a:off x="2938272" y="2569464"/>
+            <a:off x="2221992" y="2569464"/>
             <a:ext cx="1828800" cy="201168"/>
           </a:xfrm>
           <a:prstGeom prst="rect">
@@ -24907,7 +24611,7 @@
                 <a:ea typeface="Calibri" pitchFamily="34" charset="-122"/>
                 <a:cs typeface="Calibri" pitchFamily="34" charset="-120"/>
               </a:rPr>
-              <a:t>to raise or elevate</a:t>
+              <a:t>to raise; to pick up</a:t>
             </a:r>
             <a:endParaRPr lang="en-US" sz="850" dirty="0"/>
           </a:p>
@@ -24921,7 +24625,7 @@
         </p:nvSpPr>
         <p:spPr>
           <a:xfrm>
-            <a:off x="5803392" y="2258568"/>
+            <a:off x="4370832" y="2258568"/>
             <a:ext cx="1828800" cy="292608"/>
           </a:xfrm>
           <a:prstGeom prst="rect">
@@ -24955,7 +24659,7 @@
         </p:nvSpPr>
         <p:spPr>
           <a:xfrm>
-            <a:off x="5803392" y="2258568"/>
+            <a:off x="4370832" y="2258568"/>
             <a:ext cx="1828800" cy="292608"/>
           </a:xfrm>
           <a:prstGeom prst="rect">
@@ -24980,7 +24684,7 @@
                 <a:ea typeface="Trebuchet MS" pitchFamily="34" charset="-122"/>
                 <a:cs typeface="Trebuchet MS" pitchFamily="34" charset="-120"/>
               </a:rPr>
-              <a:t>ed</a:t>
+              <a:t>er</a:t>
             </a:r>
             <a:endParaRPr lang="en-US" sz="1300" dirty="0"/>
           </a:p>
@@ -24994,7 +24698,7 @@
         </p:nvSpPr>
         <p:spPr>
           <a:xfrm>
-            <a:off x="5803392" y="2569464"/>
+            <a:off x="4370832" y="2569464"/>
             <a:ext cx="1828800" cy="201168"/>
           </a:xfrm>
           <a:prstGeom prst="rect">
@@ -25019,7 +24723,7 @@
                 <a:ea typeface="Calibri" pitchFamily="34" charset="-122"/>
                 <a:cs typeface="Calibri" pitchFamily="34" charset="-120"/>
               </a:rPr>
-              <a:t>past tense</a:t>
+              <a:t>person who; more</a:t>
             </a:r>
             <a:endParaRPr lang="en-US" sz="850" dirty="0"/>
           </a:p>
@@ -25028,6 +24732,118 @@
       <p:sp>
         <p:nvSpPr>
           <p:cNvPr id="22" name="Shape 20"/>
+          <p:cNvSpPr/>
+          <p:nvPr/>
+        </p:nvSpPr>
+        <p:spPr>
+          <a:xfrm>
+            <a:off x="6519672" y="2258568"/>
+            <a:ext cx="1828800" cy="292608"/>
+          </a:xfrm>
+          <a:prstGeom prst="rect">
+            <a:avLst>
+              <a:gd name="adj" fmla="val 25000"/>
+            </a:avLst>
+          </a:prstGeom>
+          <a:solidFill>
+            <a:srgbClr val="FCE7F3"/>
+          </a:solidFill>
+          <a:ln w="19050">
+            <a:solidFill>
+              <a:srgbClr val="DB2777"/>
+            </a:solidFill>
+            <a:prstDash val="solid"/>
+          </a:ln>
+          <a:effectLst>
+            <a:outerShdw sx="100000" sy="100000" kx="0" ky="0" algn="bl" rotWithShape="0" blurRad="101600" dist="38100" dir="8100000">
+              <a:srgbClr val="000000">
+                <a:alpha val="12000"/>
+              </a:srgbClr>
+            </a:outerShdw>
+          </a:effectLst>
+        </p:spPr>
+      </p:sp>
+      <p:sp>
+        <p:nvSpPr>
+          <p:cNvPr id="23" name="Text 21"/>
+          <p:cNvSpPr/>
+          <p:nvPr/>
+        </p:nvSpPr>
+        <p:spPr>
+          <a:xfrm>
+            <a:off x="6519672" y="2258568"/>
+            <a:ext cx="1828800" cy="292608"/>
+          </a:xfrm>
+          <a:prstGeom prst="rect">
+            <a:avLst/>
+          </a:prstGeom>
+          <a:noFill/>
+          <a:ln/>
+        </p:spPr>
+        <p:txBody>
+          <a:bodyPr wrap="square" lIns="0" tIns="0" rIns="0" bIns="0" rtlCol="0" anchor="ctr"/>
+          <a:lstStyle/>
+          <a:p>
+            <a:pPr algn="ctr" indent="0" marL="0">
+              <a:buNone/>
+            </a:pPr>
+            <a:r>
+              <a:rPr lang="en-US" sz="1300" b="1" dirty="0">
+                <a:solidFill>
+                  <a:srgbClr val="9D174D"/>
+                </a:solidFill>
+                <a:latin typeface="Trebuchet MS" pitchFamily="34" charset="0"/>
+                <a:ea typeface="Trebuchet MS" pitchFamily="34" charset="-122"/>
+                <a:cs typeface="Trebuchet MS" pitchFamily="34" charset="-120"/>
+              </a:rPr>
+              <a:t>s</a:t>
+            </a:r>
+            <a:endParaRPr lang="en-US" sz="1300" dirty="0"/>
+          </a:p>
+        </p:txBody>
+      </p:sp>
+      <p:sp>
+        <p:nvSpPr>
+          <p:cNvPr id="24" name="Text 22"/>
+          <p:cNvSpPr/>
+          <p:nvPr/>
+        </p:nvSpPr>
+        <p:spPr>
+          <a:xfrm>
+            <a:off x="6519672" y="2569464"/>
+            <a:ext cx="1828800" cy="201168"/>
+          </a:xfrm>
+          <a:prstGeom prst="rect">
+            <a:avLst/>
+          </a:prstGeom>
+          <a:noFill/>
+          <a:ln/>
+        </p:spPr>
+        <p:txBody>
+          <a:bodyPr wrap="square" lIns="0" tIns="0" rIns="0" bIns="0" rtlCol="0" anchor="t"/>
+          <a:lstStyle/>
+          <a:p>
+            <a:pPr algn="ctr" indent="0" marL="0">
+              <a:buNone/>
+            </a:pPr>
+            <a:r>
+              <a:rPr lang="en-US" sz="850" dirty="0">
+                <a:solidFill>
+                  <a:srgbClr val="475569"/>
+                </a:solidFill>
+                <a:latin typeface="Calibri" pitchFamily="34" charset="0"/>
+                <a:ea typeface="Calibri" pitchFamily="34" charset="-122"/>
+                <a:cs typeface="Calibri" pitchFamily="34" charset="-120"/>
+              </a:rPr>
+              <a:t>plural or present tense</a:t>
+            </a:r>
+            <a:endParaRPr lang="en-US" sz="850" dirty="0"/>
+          </a:p>
+        </p:txBody>
+      </p:sp>
+      <p:sp>
+        <p:nvSpPr>
+          <p:cNvPr id="25" name="Shape 23"/>
           <p:cNvSpPr/>
           <p:nvPr/>
         </p:nvSpPr>
@@ -25054,7 +24870,7 @@
       </p:sp>
       <p:sp>
         <p:nvSpPr>
-          <p:cNvPr id="23" name="Text 21"/>
+          <p:cNvPr id="26" name="Text 24"/>
           <p:cNvSpPr/>
           <p:nvPr/>
         </p:nvSpPr>
@@ -25093,7 +24909,7 @@
       </p:sp>
       <p:sp>
         <p:nvSpPr>
-          <p:cNvPr id="24" name="Shape 22"/>
+          <p:cNvPr id="27" name="Shape 25"/>
           <p:cNvSpPr/>
           <p:nvPr/>
         </p:nvSpPr>
@@ -25120,7 +24936,7 @@
       </p:sp>
       <p:sp>
         <p:nvSpPr>
-          <p:cNvPr id="25" name="Shape 23"/>
+          <p:cNvPr id="28" name="Shape 26"/>
           <p:cNvSpPr/>
           <p:nvPr/>
         </p:nvSpPr>
@@ -25147,7 +24963,7 @@
       </p:sp>
       <p:sp>
         <p:nvSpPr>
-          <p:cNvPr id="26" name="Text 24"/>
+          <p:cNvPr id="29" name="Text 27"/>
           <p:cNvSpPr/>
           <p:nvPr/>
         </p:nvSpPr>
@@ -25186,7 +25002,7 @@
       </p:sp>
       <p:sp>
         <p:nvSpPr>
-          <p:cNvPr id="27" name="Text 25"/>
+          <p:cNvPr id="30" name="Text 28"/>
           <p:cNvSpPr/>
           <p:nvPr/>
         </p:nvSpPr>
@@ -25225,7 +25041,7 @@
       </p:sp>
       <p:sp>
         <p:nvSpPr>
-          <p:cNvPr id="28" name="Shape 26"/>
+          <p:cNvPr id="31" name="Shape 29"/>
           <p:cNvSpPr/>
           <p:nvPr/>
         </p:nvSpPr>
@@ -25252,7 +25068,7 @@
       </p:sp>
       <p:sp>
         <p:nvSpPr>
-          <p:cNvPr id="29" name="Text 27"/>
+          <p:cNvPr id="32" name="Text 30"/>
           <p:cNvSpPr/>
           <p:nvPr/>
         </p:nvSpPr>
@@ -25283,7 +25099,7 @@
                 <a:ea typeface="Trebuchet MS" pitchFamily="34" charset="-122"/>
                 <a:cs typeface="Trebuchet MS" pitchFamily="34" charset="-120"/>
               </a:rPr>
-              <a:t>ed</a:t>
+              <a:t>ers</a:t>
             </a:r>
             <a:endParaRPr lang="en-US" sz="1400" dirty="0"/>
           </a:p>
@@ -25291,7 +25107,7 @@
       </p:sp>
       <p:sp>
         <p:nvSpPr>
-          <p:cNvPr id="30" name="Shape 28"/>
+          <p:cNvPr id="33" name="Shape 31"/>
           <p:cNvSpPr/>
           <p:nvPr/>
         </p:nvSpPr>
@@ -25318,7 +25134,7 @@
       </p:sp>
       <p:sp>
         <p:nvSpPr>
-          <p:cNvPr id="31" name="Text 29"/>
+          <p:cNvPr id="34" name="Text 32"/>
           <p:cNvSpPr/>
           <p:nvPr/>
         </p:nvSpPr>
@@ -25357,7 +25173,7 @@
       </p:sp>
       <p:sp>
         <p:nvSpPr>
-          <p:cNvPr id="32" name="Shape 30"/>
+          <p:cNvPr id="35" name="Shape 33"/>
           <p:cNvSpPr/>
           <p:nvPr/>
         </p:nvSpPr>
@@ -25384,7 +25200,7 @@
       </p:sp>
       <p:sp>
         <p:nvSpPr>
-          <p:cNvPr id="33" name="Text 31"/>
+          <p:cNvPr id="36" name="Text 34"/>
           <p:cNvSpPr/>
           <p:nvPr/>
         </p:nvSpPr>
@@ -25707,7 +25523,7 @@
                 <a:ea typeface="Calibri" pitchFamily="34" charset="-122"/>
                 <a:cs typeface="Calibri" pitchFamily="34" charset="-120"/>
               </a:rPr>
-              <a:t>Word Labs  •  wordlabs.app  •  Root: 'lift' = to raise or elevate</a:t>
+              <a:t>Word Labs  •  wordlabs.app  •  Root: 'lift' = to raise; to pick up</a:t>
             </a:r>
             <a:endParaRPr lang="en-US" sz="800" dirty="0"/>
           </a:p>
@@ -25846,7 +25662,7 @@
                 <a:ea typeface="Trebuchet MS" pitchFamily="34" charset="-122"/>
                 <a:cs typeface="Trebuchet MS" pitchFamily="34" charset="-120"/>
               </a:rPr>
-              <a:t>lifted</a:t>
+              <a:t>lifters</a:t>
             </a:r>
             <a:endParaRPr lang="en-US" sz="2800" dirty="0"/>
           </a:p>
@@ -25926,7 +25742,7 @@
         </p:nvSpPr>
         <p:spPr>
           <a:xfrm>
-            <a:off x="2938272" y="2258568"/>
+            <a:off x="2221992" y="2258568"/>
             <a:ext cx="1828800" cy="292608"/>
           </a:xfrm>
           <a:prstGeom prst="rect">
@@ -25960,7 +25776,7 @@
         </p:nvSpPr>
         <p:spPr>
           <a:xfrm>
-            <a:off x="2938272" y="2258568"/>
+            <a:off x="2221992" y="2258568"/>
             <a:ext cx="1828800" cy="292608"/>
           </a:xfrm>
           <a:prstGeom prst="rect">
@@ -25999,7 +25815,7 @@
         </p:nvSpPr>
         <p:spPr>
           <a:xfrm>
-            <a:off x="2938272" y="2569464"/>
+            <a:off x="2221992" y="2569464"/>
             <a:ext cx="1828800" cy="201168"/>
           </a:xfrm>
           <a:prstGeom prst="rect">
@@ -26024,7 +25840,7 @@
                 <a:ea typeface="Calibri" pitchFamily="34" charset="-122"/>
                 <a:cs typeface="Calibri" pitchFamily="34" charset="-120"/>
               </a:rPr>
-              <a:t>to raise or elevate</a:t>
+              <a:t>to raise; to pick up</a:t>
             </a:r>
             <a:endParaRPr lang="en-US" sz="850" dirty="0"/>
           </a:p>
@@ -26038,7 +25854,7 @@
         </p:nvSpPr>
         <p:spPr>
           <a:xfrm>
-            <a:off x="5803392" y="2258568"/>
+            <a:off x="4370832" y="2258568"/>
             <a:ext cx="1828800" cy="292608"/>
           </a:xfrm>
           <a:prstGeom prst="rect">
@@ -26072,7 +25888,7 @@
         </p:nvSpPr>
         <p:spPr>
           <a:xfrm>
-            <a:off x="5803392" y="2258568"/>
+            <a:off x="4370832" y="2258568"/>
             <a:ext cx="1828800" cy="292608"/>
           </a:xfrm>
           <a:prstGeom prst="rect">
@@ -26097,7 +25913,7 @@
                 <a:ea typeface="Trebuchet MS" pitchFamily="34" charset="-122"/>
                 <a:cs typeface="Trebuchet MS" pitchFamily="34" charset="-120"/>
               </a:rPr>
-              <a:t>ed</a:t>
+              <a:t>er</a:t>
             </a:r>
             <a:endParaRPr lang="en-US" sz="1300" dirty="0"/>
           </a:p>
@@ -26111,7 +25927,7 @@
         </p:nvSpPr>
         <p:spPr>
           <a:xfrm>
-            <a:off x="5803392" y="2569464"/>
+            <a:off x="4370832" y="2569464"/>
             <a:ext cx="1828800" cy="201168"/>
           </a:xfrm>
           <a:prstGeom prst="rect">
@@ -26136,7 +25952,7 @@
                 <a:ea typeface="Calibri" pitchFamily="34" charset="-122"/>
                 <a:cs typeface="Calibri" pitchFamily="34" charset="-120"/>
               </a:rPr>
-              <a:t>past tense</a:t>
+              <a:t>person who; more</a:t>
             </a:r>
             <a:endParaRPr lang="en-US" sz="850" dirty="0"/>
           </a:p>
@@ -26145,6 +25961,118 @@
       <p:sp>
         <p:nvSpPr>
           <p:cNvPr id="22" name="Shape 20"/>
+          <p:cNvSpPr/>
+          <p:nvPr/>
+        </p:nvSpPr>
+        <p:spPr>
+          <a:xfrm>
+            <a:off x="6519672" y="2258568"/>
+            <a:ext cx="1828800" cy="292608"/>
+          </a:xfrm>
+          <a:prstGeom prst="rect">
+            <a:avLst>
+              <a:gd name="adj" fmla="val 25000"/>
+            </a:avLst>
+          </a:prstGeom>
+          <a:solidFill>
+            <a:srgbClr val="FCE7F3"/>
+          </a:solidFill>
+          <a:ln w="19050">
+            <a:solidFill>
+              <a:srgbClr val="DB2777"/>
+            </a:solidFill>
+            <a:prstDash val="solid"/>
+          </a:ln>
+          <a:effectLst>
+            <a:outerShdw sx="100000" sy="100000" kx="0" ky="0" algn="bl" rotWithShape="0" blurRad="101600" dist="38100" dir="8100000">
+              <a:srgbClr val="000000">
+                <a:alpha val="12000"/>
+              </a:srgbClr>
+            </a:outerShdw>
+          </a:effectLst>
+        </p:spPr>
+      </p:sp>
+      <p:sp>
+        <p:nvSpPr>
+          <p:cNvPr id="23" name="Text 21"/>
+          <p:cNvSpPr/>
+          <p:nvPr/>
+        </p:nvSpPr>
+        <p:spPr>
+          <a:xfrm>
+            <a:off x="6519672" y="2258568"/>
+            <a:ext cx="1828800" cy="292608"/>
+          </a:xfrm>
+          <a:prstGeom prst="rect">
+            <a:avLst/>
+          </a:prstGeom>
+          <a:noFill/>
+          <a:ln/>
+        </p:spPr>
+        <p:txBody>
+          <a:bodyPr wrap="square" lIns="0" tIns="0" rIns="0" bIns="0" rtlCol="0" anchor="ctr"/>
+          <a:lstStyle/>
+          <a:p>
+            <a:pPr algn="ctr" indent="0" marL="0">
+              <a:buNone/>
+            </a:pPr>
+            <a:r>
+              <a:rPr lang="en-US" sz="1300" b="1" dirty="0">
+                <a:solidFill>
+                  <a:srgbClr val="9D174D"/>
+                </a:solidFill>
+                <a:latin typeface="Trebuchet MS" pitchFamily="34" charset="0"/>
+                <a:ea typeface="Trebuchet MS" pitchFamily="34" charset="-122"/>
+                <a:cs typeface="Trebuchet MS" pitchFamily="34" charset="-120"/>
+              </a:rPr>
+              <a:t>s</a:t>
+            </a:r>
+            <a:endParaRPr lang="en-US" sz="1300" dirty="0"/>
+          </a:p>
+        </p:txBody>
+      </p:sp>
+      <p:sp>
+        <p:nvSpPr>
+          <p:cNvPr id="24" name="Text 22"/>
+          <p:cNvSpPr/>
+          <p:nvPr/>
+        </p:nvSpPr>
+        <p:spPr>
+          <a:xfrm>
+            <a:off x="6519672" y="2569464"/>
+            <a:ext cx="1828800" cy="201168"/>
+          </a:xfrm>
+          <a:prstGeom prst="rect">
+            <a:avLst/>
+          </a:prstGeom>
+          <a:noFill/>
+          <a:ln/>
+        </p:spPr>
+        <p:txBody>
+          <a:bodyPr wrap="square" lIns="0" tIns="0" rIns="0" bIns="0" rtlCol="0" anchor="t"/>
+          <a:lstStyle/>
+          <a:p>
+            <a:pPr algn="ctr" indent="0" marL="0">
+              <a:buNone/>
+            </a:pPr>
+            <a:r>
+              <a:rPr lang="en-US" sz="850" dirty="0">
+                <a:solidFill>
+                  <a:srgbClr val="475569"/>
+                </a:solidFill>
+                <a:latin typeface="Calibri" pitchFamily="34" charset="0"/>
+                <a:ea typeface="Calibri" pitchFamily="34" charset="-122"/>
+                <a:cs typeface="Calibri" pitchFamily="34" charset="-120"/>
+              </a:rPr>
+              <a:t>plural or present tense</a:t>
+            </a:r>
+            <a:endParaRPr lang="en-US" sz="850" dirty="0"/>
+          </a:p>
+        </p:txBody>
+      </p:sp>
+      <p:sp>
+        <p:nvSpPr>
+          <p:cNvPr id="25" name="Shape 23"/>
           <p:cNvSpPr/>
           <p:nvPr/>
         </p:nvSpPr>
@@ -26171,7 +26099,7 @@
       </p:sp>
       <p:sp>
         <p:nvSpPr>
-          <p:cNvPr id="23" name="Text 21"/>
+          <p:cNvPr id="26" name="Text 24"/>
           <p:cNvSpPr/>
           <p:nvPr/>
         </p:nvSpPr>
@@ -26210,7 +26138,7 @@
       </p:sp>
       <p:sp>
         <p:nvSpPr>
-          <p:cNvPr id="24" name="Shape 22"/>
+          <p:cNvPr id="27" name="Shape 25"/>
           <p:cNvSpPr/>
           <p:nvPr/>
         </p:nvSpPr>
@@ -26237,7 +26165,7 @@
       </p:sp>
       <p:sp>
         <p:nvSpPr>
-          <p:cNvPr id="25" name="Shape 23"/>
+          <p:cNvPr id="28" name="Shape 26"/>
           <p:cNvSpPr/>
           <p:nvPr/>
         </p:nvSpPr>
@@ -26264,7 +26192,7 @@
       </p:sp>
       <p:sp>
         <p:nvSpPr>
-          <p:cNvPr id="26" name="Text 24"/>
+          <p:cNvPr id="29" name="Text 27"/>
           <p:cNvSpPr/>
           <p:nvPr/>
         </p:nvSpPr>
@@ -26303,7 +26231,7 @@
       </p:sp>
       <p:sp>
         <p:nvSpPr>
-          <p:cNvPr id="27" name="Text 25"/>
+          <p:cNvPr id="30" name="Text 28"/>
           <p:cNvSpPr/>
           <p:nvPr/>
         </p:nvSpPr>
@@ -26342,7 +26270,7 @@
       </p:sp>
       <p:sp>
         <p:nvSpPr>
-          <p:cNvPr id="28" name="Shape 26"/>
+          <p:cNvPr id="31" name="Shape 29"/>
           <p:cNvSpPr/>
           <p:nvPr/>
         </p:nvSpPr>
@@ -26369,7 +26297,7 @@
       </p:sp>
       <p:sp>
         <p:nvSpPr>
-          <p:cNvPr id="29" name="Text 27"/>
+          <p:cNvPr id="32" name="Text 30"/>
           <p:cNvSpPr/>
           <p:nvPr/>
         </p:nvSpPr>
@@ -26400,7 +26328,7 @@
                 <a:ea typeface="Trebuchet MS" pitchFamily="34" charset="-122"/>
                 <a:cs typeface="Trebuchet MS" pitchFamily="34" charset="-120"/>
               </a:rPr>
-              <a:t>ed</a:t>
+              <a:t>ers</a:t>
             </a:r>
             <a:endParaRPr lang="en-US" sz="1400" dirty="0"/>
           </a:p>
@@ -26408,7 +26336,7 @@
       </p:sp>
       <p:sp>
         <p:nvSpPr>
-          <p:cNvPr id="30" name="Shape 28"/>
+          <p:cNvPr id="33" name="Shape 31"/>
           <p:cNvSpPr/>
           <p:nvPr/>
         </p:nvSpPr>
@@ -26435,7 +26363,7 @@
       </p:sp>
       <p:sp>
         <p:nvSpPr>
-          <p:cNvPr id="31" name="Text 29"/>
+          <p:cNvPr id="34" name="Text 32"/>
           <p:cNvSpPr/>
           <p:nvPr/>
         </p:nvSpPr>
@@ -26474,7 +26402,7 @@
       </p:sp>
       <p:sp>
         <p:nvSpPr>
-          <p:cNvPr id="32" name="Shape 30"/>
+          <p:cNvPr id="35" name="Shape 33"/>
           <p:cNvSpPr/>
           <p:nvPr/>
         </p:nvSpPr>
@@ -26501,7 +26429,7 @@
       </p:sp>
       <p:sp>
         <p:nvSpPr>
-          <p:cNvPr id="33" name="Shape 31"/>
+          <p:cNvPr id="36" name="Shape 34"/>
           <p:cNvSpPr/>
           <p:nvPr/>
         </p:nvSpPr>
@@ -26528,7 +26456,7 @@
       </p:sp>
       <p:sp>
         <p:nvSpPr>
-          <p:cNvPr id="34" name="Text 32"/>
+          <p:cNvPr id="37" name="Text 35"/>
           <p:cNvSpPr/>
           <p:nvPr/>
         </p:nvSpPr>
@@ -26567,7 +26495,7 @@
       </p:sp>
       <p:sp>
         <p:nvSpPr>
-          <p:cNvPr id="35" name="Shape 33"/>
+          <p:cNvPr id="38" name="Shape 36"/>
           <p:cNvSpPr/>
           <p:nvPr/>
         </p:nvSpPr>
@@ -26594,7 +26522,7 @@
       </p:sp>
       <p:sp>
         <p:nvSpPr>
-          <p:cNvPr id="36" name="Text 34"/>
+          <p:cNvPr id="39" name="Text 37"/>
           <p:cNvSpPr/>
           <p:nvPr/>
         </p:nvSpPr>
@@ -26633,7 +26561,7 @@
       </p:sp>
       <p:sp>
         <p:nvSpPr>
-          <p:cNvPr id="37" name="Shape 35"/>
+          <p:cNvPr id="40" name="Shape 38"/>
           <p:cNvSpPr/>
           <p:nvPr/>
         </p:nvSpPr>
@@ -26660,7 +26588,7 @@
       </p:sp>
       <p:sp>
         <p:nvSpPr>
-          <p:cNvPr id="38" name="Text 36"/>
+          <p:cNvPr id="41" name="Text 39"/>
           <p:cNvSpPr/>
           <p:nvPr/>
         </p:nvSpPr>
@@ -26699,7 +26627,7 @@
       </p:sp>
       <p:sp>
         <p:nvSpPr>
-          <p:cNvPr id="39" name="Shape 37"/>
+          <p:cNvPr id="42" name="Shape 40"/>
           <p:cNvSpPr/>
           <p:nvPr/>
         </p:nvSpPr>
@@ -26726,7 +26654,7 @@
       </p:sp>
       <p:sp>
         <p:nvSpPr>
-          <p:cNvPr id="40" name="Text 38"/>
+          <p:cNvPr id="43" name="Text 41"/>
           <p:cNvSpPr/>
           <p:nvPr/>
         </p:nvSpPr>
@@ -26765,7 +26693,7 @@
       </p:sp>
       <p:sp>
         <p:nvSpPr>
-          <p:cNvPr id="41" name="Shape 39"/>
+          <p:cNvPr id="44" name="Shape 42"/>
           <p:cNvSpPr/>
           <p:nvPr/>
         </p:nvSpPr>
@@ -26792,7 +26720,7 @@
       </p:sp>
       <p:sp>
         <p:nvSpPr>
-          <p:cNvPr id="42" name="Text 40"/>
+          <p:cNvPr id="45" name="Text 43"/>
           <p:cNvSpPr/>
           <p:nvPr/>
         </p:nvSpPr>
@@ -26823,7 +26751,7 @@
                 <a:ea typeface="Trebuchet MS" pitchFamily="34" charset="-122"/>
                 <a:cs typeface="Trebuchet MS" pitchFamily="34" charset="-120"/>
               </a:rPr>
-              <a:t>e</a:t>
+              <a:t>er</a:t>
             </a:r>
             <a:endParaRPr lang="en-US" sz="900" dirty="0"/>
           </a:p>
@@ -26831,7 +26759,7 @@
       </p:sp>
       <p:sp>
         <p:nvSpPr>
-          <p:cNvPr id="43" name="Shape 41"/>
+          <p:cNvPr id="46" name="Shape 44"/>
           <p:cNvSpPr/>
           <p:nvPr/>
         </p:nvSpPr>
@@ -26858,7 +26786,7 @@
       </p:sp>
       <p:sp>
         <p:nvSpPr>
-          <p:cNvPr id="44" name="Text 42"/>
+          <p:cNvPr id="47" name="Text 45"/>
           <p:cNvSpPr/>
           <p:nvPr/>
         </p:nvSpPr>
@@ -26889,7 +26817,7 @@
                 <a:ea typeface="Trebuchet MS" pitchFamily="34" charset="-122"/>
                 <a:cs typeface="Trebuchet MS" pitchFamily="34" charset="-120"/>
               </a:rPr>
-              <a:t>d</a:t>
+              <a:t>s</a:t>
             </a:r>
             <a:endParaRPr lang="en-US" sz="900" dirty="0"/>
           </a:p>
@@ -27181,7 +27109,7 @@
                 <a:ea typeface="Calibri" pitchFamily="34" charset="-122"/>
                 <a:cs typeface="Calibri" pitchFamily="34" charset="-120"/>
               </a:rPr>
-              <a:t>Word Labs  •  wordlabs.app  •  Root: 'lift' = to raise or elevate</a:t>
+              <a:t>Word Labs  •  wordlabs.app  •  Root: 'lift' = to raise; to pick up</a:t>
             </a:r>
             <a:endParaRPr lang="en-US" sz="800" dirty="0"/>
           </a:p>
@@ -27320,7 +27248,7 @@
                 <a:ea typeface="Trebuchet MS" pitchFamily="34" charset="-122"/>
                 <a:cs typeface="Trebuchet MS" pitchFamily="34" charset="-120"/>
               </a:rPr>
-              <a:t>lifter</a:t>
+              <a:t>lifting</a:t>
             </a:r>
             <a:endParaRPr lang="en-US" sz="2800" dirty="0"/>
           </a:p>
@@ -28008,7 +27936,7 @@
                 <a:ea typeface="Calibri" pitchFamily="34" charset="-122"/>
                 <a:cs typeface="Calibri" pitchFamily="34" charset="-120"/>
               </a:rPr>
-              <a:t>Word Labs  •  wordlabs.app  •  Root: 'lift' = to raise or elevate</a:t>
+              <a:t>Word Labs  •  wordlabs.app  •  Root: 'lift' = to raise; to pick up</a:t>
             </a:r>
             <a:endParaRPr lang="en-US" sz="800" dirty="0"/>
           </a:p>
@@ -28147,7 +28075,7 @@
                 <a:ea typeface="Trebuchet MS" pitchFamily="34" charset="-122"/>
                 <a:cs typeface="Trebuchet MS" pitchFamily="34" charset="-120"/>
               </a:rPr>
-              <a:t>lifter</a:t>
+              <a:t>lifting</a:t>
             </a:r>
             <a:endParaRPr lang="en-US" sz="2800" dirty="0"/>
           </a:p>
@@ -28325,7 +28253,7 @@
                 <a:ea typeface="Calibri" pitchFamily="34" charset="-122"/>
                 <a:cs typeface="Calibri" pitchFamily="34" charset="-120"/>
               </a:rPr>
-              <a:t>to raise or elevate</a:t>
+              <a:t>to raise; to pick up</a:t>
             </a:r>
             <a:endParaRPr lang="en-US" sz="850" dirty="0"/>
           </a:p>
@@ -28398,7 +28326,7 @@
                 <a:ea typeface="Trebuchet MS" pitchFamily="34" charset="-122"/>
                 <a:cs typeface="Trebuchet MS" pitchFamily="34" charset="-120"/>
               </a:rPr>
-              <a:t>er</a:t>
+              <a:t>ing</a:t>
             </a:r>
             <a:endParaRPr lang="en-US" sz="1300" dirty="0"/>
           </a:p>
@@ -28437,7 +28365,7 @@
                 <a:ea typeface="Calibri" pitchFamily="34" charset="-122"/>
                 <a:cs typeface="Calibri" pitchFamily="34" charset="-120"/>
               </a:rPr>
-              <a:t>a person or thing that does something</a:t>
+              <a:t>happening now</a:t>
             </a:r>
             <a:endParaRPr lang="en-US" sz="850" dirty="0"/>
           </a:p>
@@ -28993,7 +28921,7 @@
                 <a:ea typeface="Calibri" pitchFamily="34" charset="-122"/>
                 <a:cs typeface="Calibri" pitchFamily="34" charset="-120"/>
               </a:rPr>
-              <a:t>Word Labs  •  wordlabs.app  •  Root: 'lift' = to raise or elevate</a:t>
+              <a:t>Word Labs  •  wordlabs.app  •  Root: 'lift' = to raise; to pick up</a:t>
             </a:r>
             <a:endParaRPr lang="en-US" sz="800" dirty="0"/>
           </a:p>
@@ -29132,7 +29060,7 @@
                 <a:ea typeface="Trebuchet MS" pitchFamily="34" charset="-122"/>
                 <a:cs typeface="Trebuchet MS" pitchFamily="34" charset="-120"/>
               </a:rPr>
-              <a:t>lifter</a:t>
+              <a:t>lifting</a:t>
             </a:r>
             <a:endParaRPr lang="en-US" sz="2800" dirty="0"/>
           </a:p>
@@ -29310,7 +29238,7 @@
                 <a:ea typeface="Calibri" pitchFamily="34" charset="-122"/>
                 <a:cs typeface="Calibri" pitchFamily="34" charset="-120"/>
               </a:rPr>
-              <a:t>to raise or elevate</a:t>
+              <a:t>to raise; to pick up</a:t>
             </a:r>
             <a:endParaRPr lang="en-US" sz="850" dirty="0"/>
           </a:p>
@@ -29383,7 +29311,7 @@
                 <a:ea typeface="Trebuchet MS" pitchFamily="34" charset="-122"/>
                 <a:cs typeface="Trebuchet MS" pitchFamily="34" charset="-120"/>
               </a:rPr>
-              <a:t>er</a:t>
+              <a:t>ing</a:t>
             </a:r>
             <a:endParaRPr lang="en-US" sz="1300" dirty="0"/>
           </a:p>
@@ -29422,7 +29350,7 @@
                 <a:ea typeface="Calibri" pitchFamily="34" charset="-122"/>
                 <a:cs typeface="Calibri" pitchFamily="34" charset="-120"/>
               </a:rPr>
-              <a:t>a person or thing that does something</a:t>
+              <a:t>happening now</a:t>
             </a:r>
             <a:endParaRPr lang="en-US" sz="850" dirty="0"/>
           </a:p>
@@ -29686,7 +29614,7 @@
                 <a:ea typeface="Trebuchet MS" pitchFamily="34" charset="-122"/>
                 <a:cs typeface="Trebuchet MS" pitchFamily="34" charset="-120"/>
               </a:rPr>
-              <a:t>er</a:t>
+              <a:t>ing</a:t>
             </a:r>
             <a:endParaRPr lang="en-US" sz="1400" dirty="0"/>
           </a:p>
@@ -30110,7 +30038,7 @@
                 <a:ea typeface="Calibri" pitchFamily="34" charset="-122"/>
                 <a:cs typeface="Calibri" pitchFamily="34" charset="-120"/>
               </a:rPr>
-              <a:t>Word Labs  •  wordlabs.app  •  Root: 'lift' = to raise or elevate</a:t>
+              <a:t>Word Labs  •  wordlabs.app  •  Root: 'lift' = to raise; to pick up</a:t>
             </a:r>
             <a:endParaRPr lang="en-US" sz="800" dirty="0"/>
           </a:p>
@@ -30249,7 +30177,7 @@
                 <a:ea typeface="Trebuchet MS" pitchFamily="34" charset="-122"/>
                 <a:cs typeface="Trebuchet MS" pitchFamily="34" charset="-120"/>
               </a:rPr>
-              <a:t>lifter</a:t>
+              <a:t>lifting</a:t>
             </a:r>
             <a:endParaRPr lang="en-US" sz="2800" dirty="0"/>
           </a:p>
@@ -30427,7 +30355,7 @@
                 <a:ea typeface="Calibri" pitchFamily="34" charset="-122"/>
                 <a:cs typeface="Calibri" pitchFamily="34" charset="-120"/>
               </a:rPr>
-              <a:t>to raise or elevate</a:t>
+              <a:t>to raise; to pick up</a:t>
             </a:r>
             <a:endParaRPr lang="en-US" sz="850" dirty="0"/>
           </a:p>
@@ -30500,7 +30428,7 @@
                 <a:ea typeface="Trebuchet MS" pitchFamily="34" charset="-122"/>
                 <a:cs typeface="Trebuchet MS" pitchFamily="34" charset="-120"/>
               </a:rPr>
-              <a:t>er</a:t>
+              <a:t>ing</a:t>
             </a:r>
             <a:endParaRPr lang="en-US" sz="1300" dirty="0"/>
           </a:p>
@@ -30539,7 +30467,7 @@
                 <a:ea typeface="Calibri" pitchFamily="34" charset="-122"/>
                 <a:cs typeface="Calibri" pitchFamily="34" charset="-120"/>
               </a:rPr>
-              <a:t>a person or thing that does something</a:t>
+              <a:t>happening now</a:t>
             </a:r>
             <a:endParaRPr lang="en-US" sz="850" dirty="0"/>
           </a:p>
@@ -30803,7 +30731,7 @@
                 <a:ea typeface="Trebuchet MS" pitchFamily="34" charset="-122"/>
                 <a:cs typeface="Trebuchet MS" pitchFamily="34" charset="-120"/>
               </a:rPr>
-              <a:t>er</a:t>
+              <a:t>ing</a:t>
             </a:r>
             <a:endParaRPr lang="en-US" sz="1400" dirty="0"/>
           </a:p>
@@ -30910,7 +30838,7 @@
         </p:nvSpPr>
         <p:spPr>
           <a:xfrm>
-            <a:off x="2427732" y="4169664"/>
+            <a:off x="2254649" y="4169664"/>
             <a:ext cx="685800" cy="475488"/>
           </a:xfrm>
           <a:prstGeom prst="rect">
@@ -30937,7 +30865,7 @@
         </p:nvSpPr>
         <p:spPr>
           <a:xfrm>
-            <a:off x="2427732" y="4169664"/>
+            <a:off x="2254649" y="4169664"/>
             <a:ext cx="685800" cy="475488"/>
           </a:xfrm>
           <a:prstGeom prst="rect">
@@ -30976,7 +30904,7 @@
         </p:nvSpPr>
         <p:spPr>
           <a:xfrm>
-            <a:off x="3639312" y="4169664"/>
+            <a:off x="3293146" y="4169664"/>
             <a:ext cx="685800" cy="475488"/>
           </a:xfrm>
           <a:prstGeom prst="rect">
@@ -31003,7 +30931,7 @@
         </p:nvSpPr>
         <p:spPr>
           <a:xfrm>
-            <a:off x="3639312" y="4169664"/>
+            <a:off x="3293146" y="4169664"/>
             <a:ext cx="685800" cy="475488"/>
           </a:xfrm>
           <a:prstGeom prst="rect">
@@ -31042,7 +30970,7 @@
         </p:nvSpPr>
         <p:spPr>
           <a:xfrm>
-            <a:off x="4850892" y="4169664"/>
+            <a:off x="4331643" y="4169664"/>
             <a:ext cx="685800" cy="475488"/>
           </a:xfrm>
           <a:prstGeom prst="rect">
@@ -31069,7 +30997,7 @@
         </p:nvSpPr>
         <p:spPr>
           <a:xfrm>
-            <a:off x="4850892" y="4169664"/>
+            <a:off x="4331643" y="4169664"/>
             <a:ext cx="685800" cy="475488"/>
           </a:xfrm>
           <a:prstGeom prst="rect">
@@ -31108,7 +31036,7 @@
         </p:nvSpPr>
         <p:spPr>
           <a:xfrm>
-            <a:off x="6062472" y="4169664"/>
+            <a:off x="5370141" y="4169664"/>
             <a:ext cx="685800" cy="475488"/>
           </a:xfrm>
           <a:prstGeom prst="rect">
@@ -31135,7 +31063,7 @@
         </p:nvSpPr>
         <p:spPr>
           <a:xfrm>
-            <a:off x="6062472" y="4169664"/>
+            <a:off x="5370141" y="4169664"/>
             <a:ext cx="685800" cy="475488"/>
           </a:xfrm>
           <a:prstGeom prst="rect">
@@ -31174,7 +31102,7 @@
         </p:nvSpPr>
         <p:spPr>
           <a:xfrm>
-            <a:off x="7274052" y="4169664"/>
+            <a:off x="6408638" y="4169664"/>
             <a:ext cx="685800" cy="475488"/>
           </a:xfrm>
           <a:prstGeom prst="rect">
@@ -31201,7 +31129,7 @@
         </p:nvSpPr>
         <p:spPr>
           <a:xfrm>
-            <a:off x="7274052" y="4169664"/>
+            <a:off x="6408638" y="4169664"/>
             <a:ext cx="685800" cy="475488"/>
           </a:xfrm>
           <a:prstGeom prst="rect">
@@ -31226,7 +31154,73 @@
                 <a:ea typeface="Trebuchet MS" pitchFamily="34" charset="-122"/>
                 <a:cs typeface="Trebuchet MS" pitchFamily="34" charset="-120"/>
               </a:rPr>
-              <a:t>er</a:t>
+              <a:t>i</a:t>
+            </a:r>
+            <a:endParaRPr lang="en-US" sz="900" dirty="0"/>
+          </a:p>
+        </p:txBody>
+      </p:sp>
+      <p:sp>
+        <p:nvSpPr>
+          <p:cNvPr id="43" name="Shape 41"/>
+          <p:cNvSpPr/>
+          <p:nvPr/>
+        </p:nvSpPr>
+        <p:spPr>
+          <a:xfrm>
+            <a:off x="7447135" y="4169664"/>
+            <a:ext cx="685800" cy="475488"/>
+          </a:xfrm>
+          <a:prstGeom prst="rect">
+            <a:avLst>
+              <a:gd name="adj" fmla="val 7692"/>
+            </a:avLst>
+          </a:prstGeom>
+          <a:solidFill>
+            <a:srgbClr val="FFFFFF"/>
+          </a:solidFill>
+          <a:ln w="12700">
+            <a:solidFill>
+              <a:srgbClr val="DB2777"/>
+            </a:solidFill>
+            <a:prstDash val="solid"/>
+          </a:ln>
+        </p:spPr>
+      </p:sp>
+      <p:sp>
+        <p:nvSpPr>
+          <p:cNvPr id="44" name="Text 42"/>
+          <p:cNvSpPr/>
+          <p:nvPr/>
+        </p:nvSpPr>
+        <p:spPr>
+          <a:xfrm>
+            <a:off x="7447135" y="4169664"/>
+            <a:ext cx="685800" cy="475488"/>
+          </a:xfrm>
+          <a:prstGeom prst="rect">
+            <a:avLst/>
+          </a:prstGeom>
+          <a:noFill/>
+          <a:ln/>
+        </p:spPr>
+        <p:txBody>
+          <a:bodyPr wrap="square" lIns="0" tIns="0" rIns="0" bIns="0" rtlCol="0" anchor="ctr"/>
+          <a:lstStyle/>
+          <a:p>
+            <a:pPr algn="ctr" indent="0" marL="0">
+              <a:buNone/>
+            </a:pPr>
+            <a:r>
+              <a:rPr lang="en-US" sz="900" b="1" dirty="0">
+                <a:solidFill>
+                  <a:srgbClr val="9D174D"/>
+                </a:solidFill>
+                <a:latin typeface="Trebuchet MS" pitchFamily="34" charset="0"/>
+                <a:ea typeface="Trebuchet MS" pitchFamily="34" charset="-122"/>
+                <a:cs typeface="Trebuchet MS" pitchFamily="34" charset="-120"/>
+              </a:rPr>
+              <a:t>ng</a:t>
             </a:r>
             <a:endParaRPr lang="en-US" sz="900" dirty="0"/>
           </a:p>
@@ -31518,7 +31512,7 @@
                 <a:ea typeface="Calibri" pitchFamily="34" charset="-122"/>
                 <a:cs typeface="Calibri" pitchFamily="34" charset="-120"/>
               </a:rPr>
-              <a:t>Word Labs  •  wordlabs.app  •  Root: 'lift' = to raise or elevate</a:t>
+              <a:t>Word Labs  •  wordlabs.app  •  Root: 'lift' = to raise; to pick up</a:t>
             </a:r>
             <a:endParaRPr lang="en-US" sz="800" dirty="0"/>
           </a:p>
@@ -32687,7 +32681,7 @@
                 <a:ea typeface="Calibri" pitchFamily="34" charset="-122"/>
                 <a:cs typeface="Calibri" pitchFamily="34" charset="-120"/>
               </a:rPr>
-              <a:t>Word Labs  •  wordlabs.app  •  Root: 'lift' = to raise or elevate</a:t>
+              <a:t>Word Labs  •  wordlabs.app  •  Root: 'lift' = to raise; to pick up</a:t>
             </a:r>
             <a:endParaRPr lang="en-US" sz="800" dirty="0"/>
           </a:p>
@@ -32945,7 +32939,7 @@
             <a:avLst/>
           </a:prstGeom>
           <a:solidFill>
-            <a:srgbClr val="DDD6FE"/>
+            <a:srgbClr val="F8FAFC"/>
           </a:solidFill>
           <a:ln w="12700">
             <a:solidFill>
@@ -32957,14 +32951,39 @@
       </p:sp>
       <p:sp>
         <p:nvSpPr>
-          <p:cNvPr id="18" name="Text 16"/>
-          <p:cNvSpPr/>
-          <p:nvPr/>
-        </p:nvSpPr>
-        <p:spPr>
-          <a:xfrm>
-            <a:off x="365760" y="1563624"/>
-            <a:ext cx="2468880" cy="402336"/>
+          <p:cNvPr id="18" name="Shape 16"/>
+          <p:cNvSpPr/>
+          <p:nvPr/>
+        </p:nvSpPr>
+        <p:spPr>
+          <a:xfrm>
+            <a:off x="2971800" y="1563624"/>
+            <a:ext cx="2834640" cy="402336"/>
+          </a:xfrm>
+          <a:prstGeom prst="rect">
+            <a:avLst/>
+          </a:prstGeom>
+          <a:solidFill>
+            <a:srgbClr val="CCFBF1"/>
+          </a:solidFill>
+          <a:ln w="12700">
+            <a:solidFill>
+              <a:srgbClr val="E2E8F0"/>
+            </a:solidFill>
+            <a:prstDash val="solid"/>
+          </a:ln>
+        </p:spPr>
+      </p:sp>
+      <p:sp>
+        <p:nvSpPr>
+          <p:cNvPr id="19" name="Text 17"/>
+          <p:cNvSpPr/>
+          <p:nvPr/>
+        </p:nvSpPr>
+        <p:spPr>
+          <a:xfrm>
+            <a:off x="2971800" y="1563624"/>
+            <a:ext cx="2834640" cy="402336"/>
           </a:xfrm>
           <a:prstGeom prst="rect">
             <a:avLst/>
@@ -32982,13 +33001,13 @@
             <a:r>
               <a:rPr lang="en-US" sz="1300" b="1" dirty="0">
                 <a:solidFill>
-                  <a:srgbClr val="4C1D95"/>
+                  <a:srgbClr val="0F766E"/>
                 </a:solidFill>
                 <a:latin typeface="Trebuchet MS" pitchFamily="34" charset="0"/>
                 <a:ea typeface="Trebuchet MS" pitchFamily="34" charset="-122"/>
                 <a:cs typeface="Trebuchet MS" pitchFamily="34" charset="-120"/>
               </a:rPr>
-              <a:t>air-</a:t>
+              <a:t>lift</a:t>
             </a:r>
             <a:endParaRPr lang="en-US" sz="1300" dirty="0"/>
           </a:p>
@@ -32996,20 +33015,20 @@
       </p:sp>
       <p:sp>
         <p:nvSpPr>
-          <p:cNvPr id="19" name="Shape 17"/>
-          <p:cNvSpPr/>
-          <p:nvPr/>
-        </p:nvSpPr>
-        <p:spPr>
-          <a:xfrm>
-            <a:off x="2971800" y="1563624"/>
+          <p:cNvPr id="20" name="Shape 18"/>
+          <p:cNvSpPr/>
+          <p:nvPr/>
+        </p:nvSpPr>
+        <p:spPr>
+          <a:xfrm>
+            <a:off x="5943600" y="1563624"/>
             <a:ext cx="2834640" cy="402336"/>
           </a:xfrm>
           <a:prstGeom prst="rect">
             <a:avLst/>
           </a:prstGeom>
           <a:solidFill>
-            <a:srgbClr val="CCFBF1"/>
+            <a:srgbClr val="FCE7F3"/>
           </a:solidFill>
           <a:ln w="12700">
             <a:solidFill>
@@ -33021,13 +33040,13 @@
       </p:sp>
       <p:sp>
         <p:nvSpPr>
-          <p:cNvPr id="20" name="Text 18"/>
-          <p:cNvSpPr/>
-          <p:nvPr/>
-        </p:nvSpPr>
-        <p:spPr>
-          <a:xfrm>
-            <a:off x="2971800" y="1563624"/>
+          <p:cNvPr id="21" name="Text 19"/>
+          <p:cNvSpPr/>
+          <p:nvPr/>
+        </p:nvSpPr>
+        <p:spPr>
+          <a:xfrm>
+            <a:off x="5943600" y="1563624"/>
             <a:ext cx="2834640" cy="402336"/>
           </a:xfrm>
           <a:prstGeom prst="rect">
@@ -33046,13 +33065,13 @@
             <a:r>
               <a:rPr lang="en-US" sz="1300" b="1" dirty="0">
                 <a:solidFill>
-                  <a:srgbClr val="0F766E"/>
+                  <a:srgbClr val="9D174D"/>
                 </a:solidFill>
                 <a:latin typeface="Trebuchet MS" pitchFamily="34" charset="0"/>
                 <a:ea typeface="Trebuchet MS" pitchFamily="34" charset="-122"/>
                 <a:cs typeface="Trebuchet MS" pitchFamily="34" charset="-120"/>
               </a:rPr>
-              <a:t>lift</a:t>
+              <a:t>-ed</a:t>
             </a:r>
             <a:endParaRPr lang="en-US" sz="1300" dirty="0"/>
           </a:p>
@@ -33060,19 +33079,69 @@
       </p:sp>
       <p:sp>
         <p:nvSpPr>
-          <p:cNvPr id="21" name="Shape 19"/>
-          <p:cNvSpPr/>
-          <p:nvPr/>
-        </p:nvSpPr>
-        <p:spPr>
-          <a:xfrm>
-            <a:off x="5943600" y="1563624"/>
+          <p:cNvPr id="22" name="Shape 20"/>
+          <p:cNvSpPr/>
+          <p:nvPr/>
+        </p:nvSpPr>
+        <p:spPr>
+          <a:xfrm>
+            <a:off x="365760" y="1984248"/>
+            <a:ext cx="2468880" cy="402336"/>
+          </a:xfrm>
+          <a:prstGeom prst="rect">
+            <a:avLst/>
+          </a:prstGeom>
+          <a:solidFill>
+            <a:srgbClr val="F1F5F9"/>
+          </a:solidFill>
+          <a:ln w="12700">
+            <a:solidFill>
+              <a:srgbClr val="E2E8F0"/>
+            </a:solidFill>
+            <a:prstDash val="solid"/>
+          </a:ln>
+        </p:spPr>
+      </p:sp>
+      <p:sp>
+        <p:nvSpPr>
+          <p:cNvPr id="23" name="Shape 21"/>
+          <p:cNvSpPr/>
+          <p:nvPr/>
+        </p:nvSpPr>
+        <p:spPr>
+          <a:xfrm>
+            <a:off x="2971800" y="1984248"/>
             <a:ext cx="2834640" cy="402336"/>
           </a:xfrm>
           <a:prstGeom prst="rect">
             <a:avLst/>
           </a:prstGeom>
           <a:solidFill>
+            <a:srgbClr val="F1F5F9"/>
+          </a:solidFill>
+          <a:ln w="12700">
+            <a:solidFill>
+              <a:srgbClr val="E2E8F0"/>
+            </a:solidFill>
+            <a:prstDash val="solid"/>
+          </a:ln>
+        </p:spPr>
+      </p:sp>
+      <p:sp>
+        <p:nvSpPr>
+          <p:cNvPr id="24" name="Shape 22"/>
+          <p:cNvSpPr/>
+          <p:nvPr/>
+        </p:nvSpPr>
+        <p:spPr>
+          <a:xfrm>
+            <a:off x="5943600" y="1984248"/>
+            <a:ext cx="2834640" cy="402336"/>
+          </a:xfrm>
+          <a:prstGeom prst="rect">
+            <a:avLst/>
+          </a:prstGeom>
+          <a:solidFill>
             <a:srgbClr val="FCE7F3"/>
           </a:solidFill>
           <a:ln w="12700">
@@ -33085,13 +33154,13 @@
       </p:sp>
       <p:sp>
         <p:nvSpPr>
-          <p:cNvPr id="22" name="Text 20"/>
-          <p:cNvSpPr/>
-          <p:nvPr/>
-        </p:nvSpPr>
-        <p:spPr>
-          <a:xfrm>
-            <a:off x="5943600" y="1563624"/>
+          <p:cNvPr id="25" name="Text 23"/>
+          <p:cNvSpPr/>
+          <p:nvPr/>
+        </p:nvSpPr>
+        <p:spPr>
+          <a:xfrm>
+            <a:off x="5943600" y="1984248"/>
             <a:ext cx="2834640" cy="402336"/>
           </a:xfrm>
           <a:prstGeom prst="rect">
@@ -33116,7 +33185,7 @@
                 <a:ea typeface="Trebuchet MS" pitchFamily="34" charset="-122"/>
                 <a:cs typeface="Trebuchet MS" pitchFamily="34" charset="-120"/>
               </a:rPr>
-              <a:t>-ed</a:t>
+              <a:t>-er</a:t>
             </a:r>
             <a:endParaRPr lang="en-US" sz="1300" dirty="0"/>
           </a:p>
@@ -33124,20 +33193,20 @@
       </p:sp>
       <p:sp>
         <p:nvSpPr>
-          <p:cNvPr id="23" name="Shape 21"/>
-          <p:cNvSpPr/>
-          <p:nvPr/>
-        </p:nvSpPr>
-        <p:spPr>
-          <a:xfrm>
-            <a:off x="365760" y="1984248"/>
+          <p:cNvPr id="26" name="Shape 24"/>
+          <p:cNvSpPr/>
+          <p:nvPr/>
+        </p:nvSpPr>
+        <p:spPr>
+          <a:xfrm>
+            <a:off x="365760" y="2404872"/>
             <a:ext cx="2468880" cy="402336"/>
           </a:xfrm>
           <a:prstGeom prst="rect">
             <a:avLst/>
           </a:prstGeom>
           <a:solidFill>
-            <a:srgbClr val="DDD6FE"/>
+            <a:srgbClr val="F8FAFC"/>
           </a:solidFill>
           <a:ln w="12700">
             <a:solidFill>
@@ -33149,14 +33218,64 @@
       </p:sp>
       <p:sp>
         <p:nvSpPr>
-          <p:cNvPr id="24" name="Text 22"/>
-          <p:cNvSpPr/>
-          <p:nvPr/>
-        </p:nvSpPr>
-        <p:spPr>
-          <a:xfrm>
-            <a:off x="365760" y="1984248"/>
-            <a:ext cx="2468880" cy="402336"/>
+          <p:cNvPr id="27" name="Shape 25"/>
+          <p:cNvSpPr/>
+          <p:nvPr/>
+        </p:nvSpPr>
+        <p:spPr>
+          <a:xfrm>
+            <a:off x="2971800" y="2404872"/>
+            <a:ext cx="2834640" cy="402336"/>
+          </a:xfrm>
+          <a:prstGeom prst="rect">
+            <a:avLst/>
+          </a:prstGeom>
+          <a:solidFill>
+            <a:srgbClr val="F8FAFC"/>
+          </a:solidFill>
+          <a:ln w="12700">
+            <a:solidFill>
+              <a:srgbClr val="E2E8F0"/>
+            </a:solidFill>
+            <a:prstDash val="solid"/>
+          </a:ln>
+        </p:spPr>
+      </p:sp>
+      <p:sp>
+        <p:nvSpPr>
+          <p:cNvPr id="28" name="Shape 26"/>
+          <p:cNvSpPr/>
+          <p:nvPr/>
+        </p:nvSpPr>
+        <p:spPr>
+          <a:xfrm>
+            <a:off x="5943600" y="2404872"/>
+            <a:ext cx="2834640" cy="402336"/>
+          </a:xfrm>
+          <a:prstGeom prst="rect">
+            <a:avLst/>
+          </a:prstGeom>
+          <a:solidFill>
+            <a:srgbClr val="FCE7F3"/>
+          </a:solidFill>
+          <a:ln w="12700">
+            <a:solidFill>
+              <a:srgbClr val="E2E8F0"/>
+            </a:solidFill>
+            <a:prstDash val="solid"/>
+          </a:ln>
+        </p:spPr>
+      </p:sp>
+      <p:sp>
+        <p:nvSpPr>
+          <p:cNvPr id="29" name="Text 27"/>
+          <p:cNvSpPr/>
+          <p:nvPr/>
+        </p:nvSpPr>
+        <p:spPr>
+          <a:xfrm>
+            <a:off x="5943600" y="2404872"/>
+            <a:ext cx="2834640" cy="402336"/>
           </a:xfrm>
           <a:prstGeom prst="rect">
             <a:avLst/>
@@ -33174,13 +33293,13 @@
             <a:r>
               <a:rPr lang="en-US" sz="1300" b="1" dirty="0">
                 <a:solidFill>
-                  <a:srgbClr val="4C1D95"/>
+                  <a:srgbClr val="9D174D"/>
                 </a:solidFill>
                 <a:latin typeface="Trebuchet MS" pitchFamily="34" charset="0"/>
                 <a:ea typeface="Trebuchet MS" pitchFamily="34" charset="-122"/>
                 <a:cs typeface="Trebuchet MS" pitchFamily="34" charset="-120"/>
               </a:rPr>
-              <a:t>face-</a:t>
+              <a:t>-ing</a:t>
             </a:r>
             <a:endParaRPr lang="en-US" sz="1300" dirty="0"/>
           </a:p>
@@ -33188,13 +33307,38 @@
       </p:sp>
       <p:sp>
         <p:nvSpPr>
-          <p:cNvPr id="25" name="Shape 23"/>
-          <p:cNvSpPr/>
-          <p:nvPr/>
-        </p:nvSpPr>
-        <p:spPr>
-          <a:xfrm>
-            <a:off x="2971800" y="1984248"/>
+          <p:cNvPr id="30" name="Shape 28"/>
+          <p:cNvSpPr/>
+          <p:nvPr/>
+        </p:nvSpPr>
+        <p:spPr>
+          <a:xfrm>
+            <a:off x="365760" y="2825496"/>
+            <a:ext cx="2468880" cy="402336"/>
+          </a:xfrm>
+          <a:prstGeom prst="rect">
+            <a:avLst/>
+          </a:prstGeom>
+          <a:solidFill>
+            <a:srgbClr val="F1F5F9"/>
+          </a:solidFill>
+          <a:ln w="12700">
+            <a:solidFill>
+              <a:srgbClr val="E2E8F0"/>
+            </a:solidFill>
+            <a:prstDash val="solid"/>
+          </a:ln>
+        </p:spPr>
+      </p:sp>
+      <p:sp>
+        <p:nvSpPr>
+          <p:cNvPr id="31" name="Shape 29"/>
+          <p:cNvSpPr/>
+          <p:nvPr/>
+        </p:nvSpPr>
+        <p:spPr>
+          <a:xfrm>
+            <a:off x="2971800" y="2825496"/>
             <a:ext cx="2834640" cy="402336"/>
           </a:xfrm>
           <a:prstGeom prst="rect">
@@ -33213,13 +33357,13 @@
       </p:sp>
       <p:sp>
         <p:nvSpPr>
-          <p:cNvPr id="26" name="Shape 24"/>
-          <p:cNvSpPr/>
-          <p:nvPr/>
-        </p:nvSpPr>
-        <p:spPr>
-          <a:xfrm>
-            <a:off x="5943600" y="1984248"/>
+          <p:cNvPr id="32" name="Shape 30"/>
+          <p:cNvSpPr/>
+          <p:nvPr/>
+        </p:nvSpPr>
+        <p:spPr>
+          <a:xfrm>
+            <a:off x="5943600" y="2825496"/>
             <a:ext cx="2834640" cy="402336"/>
           </a:xfrm>
           <a:prstGeom prst="rect">
@@ -33238,13 +33382,13 @@
       </p:sp>
       <p:sp>
         <p:nvSpPr>
-          <p:cNvPr id="27" name="Text 25"/>
-          <p:cNvSpPr/>
-          <p:nvPr/>
-        </p:nvSpPr>
-        <p:spPr>
-          <a:xfrm>
-            <a:off x="5943600" y="1984248"/>
+          <p:cNvPr id="33" name="Text 31"/>
+          <p:cNvSpPr/>
+          <p:nvPr/>
+        </p:nvSpPr>
+        <p:spPr>
+          <a:xfrm>
+            <a:off x="5943600" y="2825496"/>
             <a:ext cx="2834640" cy="402336"/>
           </a:xfrm>
           <a:prstGeom prst="rect">
@@ -33269,7 +33413,7 @@
                 <a:ea typeface="Trebuchet MS" pitchFamily="34" charset="-122"/>
                 <a:cs typeface="Trebuchet MS" pitchFamily="34" charset="-120"/>
               </a:rPr>
-              <a:t>-er</a:t>
+              <a:t>-s</a:t>
             </a:r>
             <a:endParaRPr lang="en-US" sz="1300" dirty="0"/>
           </a:p>
@@ -33277,39 +33421,14 @@
       </p:sp>
       <p:sp>
         <p:nvSpPr>
-          <p:cNvPr id="28" name="Shape 26"/>
-          <p:cNvSpPr/>
-          <p:nvPr/>
-        </p:nvSpPr>
-        <p:spPr>
-          <a:xfrm>
-            <a:off x="365760" y="2404872"/>
-            <a:ext cx="2468880" cy="402336"/>
-          </a:xfrm>
-          <a:prstGeom prst="rect">
-            <a:avLst/>
-          </a:prstGeom>
-          <a:solidFill>
-            <a:srgbClr val="DDD6FE"/>
-          </a:solidFill>
-          <a:ln w="12700">
-            <a:solidFill>
-              <a:srgbClr val="E2E8F0"/>
-            </a:solidFill>
-            <a:prstDash val="solid"/>
-          </a:ln>
-        </p:spPr>
-      </p:sp>
-      <p:sp>
-        <p:nvSpPr>
-          <p:cNvPr id="29" name="Text 27"/>
-          <p:cNvSpPr/>
-          <p:nvPr/>
-        </p:nvSpPr>
-        <p:spPr>
-          <a:xfrm>
-            <a:off x="365760" y="2404872"/>
-            <a:ext cx="2468880" cy="402336"/>
+          <p:cNvPr id="34" name="Text 32"/>
+          <p:cNvSpPr/>
+          <p:nvPr/>
+        </p:nvSpPr>
+        <p:spPr>
+          <a:xfrm>
+            <a:off x="365760" y="3611880"/>
+            <a:ext cx="1828800" cy="347472"/>
           </a:xfrm>
           <a:prstGeom prst="rect">
             <a:avLst/>
@@ -33321,84 +33440,61 @@
           <a:bodyPr wrap="square" lIns="0" tIns="0" rIns="0" bIns="0" rtlCol="0" anchor="ctr"/>
           <a:lstStyle/>
           <a:p>
-            <a:pPr algn="ctr" indent="0" marL="0">
-              <a:buNone/>
-            </a:pPr>
-            <a:r>
-              <a:rPr lang="en-US" sz="1300" b="1" dirty="0">
-                <a:solidFill>
-                  <a:srgbClr val="4C1D95"/>
+            <a:pPr algn="l" indent="0" marL="0">
+              <a:buNone/>
+            </a:pPr>
+            <a:r>
+              <a:rPr lang="en-US" sz="1200" b="1" dirty="0">
+                <a:solidFill>
+                  <a:srgbClr val="0F172A"/>
                 </a:solidFill>
                 <a:latin typeface="Trebuchet MS" pitchFamily="34" charset="0"/>
                 <a:ea typeface="Trebuchet MS" pitchFamily="34" charset="-122"/>
                 <a:cs typeface="Trebuchet MS" pitchFamily="34" charset="-120"/>
               </a:rPr>
-              <a:t>fork-</a:t>
-            </a:r>
-            <a:endParaRPr lang="en-US" sz="1300" dirty="0"/>
-          </a:p>
-        </p:txBody>
-      </p:sp>
-      <p:sp>
-        <p:nvSpPr>
-          <p:cNvPr id="30" name="Shape 28"/>
-          <p:cNvSpPr/>
-          <p:nvPr/>
-        </p:nvSpPr>
-        <p:spPr>
-          <a:xfrm>
-            <a:off x="2971800" y="2404872"/>
-            <a:ext cx="2834640" cy="402336"/>
-          </a:xfrm>
-          <a:prstGeom prst="rect">
-            <a:avLst/>
-          </a:prstGeom>
-          <a:solidFill>
-            <a:srgbClr val="F8FAFC"/>
-          </a:solidFill>
-          <a:ln w="12700">
-            <a:solidFill>
-              <a:srgbClr val="E2E8F0"/>
-            </a:solidFill>
-            <a:prstDash val="solid"/>
-          </a:ln>
-        </p:spPr>
-      </p:sp>
-      <p:sp>
-        <p:nvSpPr>
-          <p:cNvPr id="31" name="Shape 29"/>
-          <p:cNvSpPr/>
-          <p:nvPr/>
-        </p:nvSpPr>
-        <p:spPr>
-          <a:xfrm>
-            <a:off x="5943600" y="2404872"/>
-            <a:ext cx="2834640" cy="402336"/>
-          </a:xfrm>
-          <a:prstGeom prst="rect">
-            <a:avLst/>
-          </a:prstGeom>
-          <a:solidFill>
-            <a:srgbClr val="FCE7F3"/>
-          </a:solidFill>
-          <a:ln w="12700">
-            <a:solidFill>
-              <a:srgbClr val="E2E8F0"/>
-            </a:solidFill>
-            <a:prstDash val="solid"/>
-          </a:ln>
-        </p:spPr>
-      </p:sp>
-      <p:sp>
-        <p:nvSpPr>
-          <p:cNvPr id="32" name="Text 30"/>
-          <p:cNvSpPr/>
-          <p:nvPr/>
-        </p:nvSpPr>
-        <p:spPr>
-          <a:xfrm>
-            <a:off x="5943600" y="2404872"/>
-            <a:ext cx="2834640" cy="402336"/>
+              <a:t>Sample words:</a:t>
+            </a:r>
+            <a:endParaRPr lang="en-US" sz="1200" dirty="0"/>
+          </a:p>
+        </p:txBody>
+      </p:sp>
+      <p:sp>
+        <p:nvSpPr>
+          <p:cNvPr id="35" name="Shape 33"/>
+          <p:cNvSpPr/>
+          <p:nvPr/>
+        </p:nvSpPr>
+        <p:spPr>
+          <a:xfrm>
+            <a:off x="365760" y="4023360"/>
+            <a:ext cx="2011680" cy="402336"/>
+          </a:xfrm>
+          <a:prstGeom prst="rect">
+            <a:avLst>
+              <a:gd name="adj" fmla="val 13636"/>
+            </a:avLst>
+          </a:prstGeom>
+          <a:solidFill>
+            <a:srgbClr val="EEF2FF"/>
+          </a:solidFill>
+          <a:ln w="12700">
+            <a:solidFill>
+              <a:srgbClr val="6366F1"/>
+            </a:solidFill>
+            <a:prstDash val="solid"/>
+          </a:ln>
+        </p:spPr>
+      </p:sp>
+      <p:sp>
+        <p:nvSpPr>
+          <p:cNvPr id="36" name="Text 34"/>
+          <p:cNvSpPr/>
+          <p:nvPr/>
+        </p:nvSpPr>
+        <p:spPr>
+          <a:xfrm>
+            <a:off x="365760" y="4023360"/>
+            <a:ext cx="2011680" cy="402336"/>
           </a:xfrm>
           <a:prstGeom prst="rect">
             <a:avLst/>
@@ -33414,888 +33510,15 @@
               <a:buNone/>
             </a:pPr>
             <a:r>
-              <a:rPr lang="en-US" sz="1300" b="1" dirty="0">
-                <a:solidFill>
-                  <a:srgbClr val="9D174D"/>
+              <a:rPr lang="en-US" sz="1200" b="1" dirty="0">
+                <a:solidFill>
+                  <a:srgbClr val="4338CA"/>
                 </a:solidFill>
                 <a:latin typeface="Trebuchet MS" pitchFamily="34" charset="0"/>
                 <a:ea typeface="Trebuchet MS" pitchFamily="34" charset="-122"/>
                 <a:cs typeface="Trebuchet MS" pitchFamily="34" charset="-120"/>
               </a:rPr>
-              <a:t>-ing</a:t>
-            </a:r>
-            <a:endParaRPr lang="en-US" sz="1300" dirty="0"/>
-          </a:p>
-        </p:txBody>
-      </p:sp>
-      <p:sp>
-        <p:nvSpPr>
-          <p:cNvPr id="33" name="Shape 31"/>
-          <p:cNvSpPr/>
-          <p:nvPr/>
-        </p:nvSpPr>
-        <p:spPr>
-          <a:xfrm>
-            <a:off x="365760" y="2825496"/>
-            <a:ext cx="2468880" cy="402336"/>
-          </a:xfrm>
-          <a:prstGeom prst="rect">
-            <a:avLst/>
-          </a:prstGeom>
-          <a:solidFill>
-            <a:srgbClr val="DDD6FE"/>
-          </a:solidFill>
-          <a:ln w="12700">
-            <a:solidFill>
-              <a:srgbClr val="E2E8F0"/>
-            </a:solidFill>
-            <a:prstDash val="solid"/>
-          </a:ln>
-        </p:spPr>
-      </p:sp>
-      <p:sp>
-        <p:nvSpPr>
-          <p:cNvPr id="34" name="Text 32"/>
-          <p:cNvSpPr/>
-          <p:nvPr/>
-        </p:nvSpPr>
-        <p:spPr>
-          <a:xfrm>
-            <a:off x="365760" y="2825496"/>
-            <a:ext cx="2468880" cy="402336"/>
-          </a:xfrm>
-          <a:prstGeom prst="rect">
-            <a:avLst/>
-          </a:prstGeom>
-          <a:noFill/>
-          <a:ln/>
-        </p:spPr>
-        <p:txBody>
-          <a:bodyPr wrap="square" lIns="0" tIns="0" rIns="0" bIns="0" rtlCol="0" anchor="ctr"/>
-          <a:lstStyle/>
-          <a:p>
-            <a:pPr algn="ctr" indent="0" marL="0">
-              <a:buNone/>
-            </a:pPr>
-            <a:r>
-              <a:rPr lang="en-US" sz="1300" b="1" dirty="0">
-                <a:solidFill>
-                  <a:srgbClr val="4C1D95"/>
-                </a:solidFill>
-                <a:latin typeface="Trebuchet MS" pitchFamily="34" charset="0"/>
-                <a:ea typeface="Trebuchet MS" pitchFamily="34" charset="-122"/>
-                <a:cs typeface="Trebuchet MS" pitchFamily="34" charset="-120"/>
-              </a:rPr>
-              <a:t>shop-</a:t>
-            </a:r>
-            <a:endParaRPr lang="en-US" sz="1300" dirty="0"/>
-          </a:p>
-        </p:txBody>
-      </p:sp>
-      <p:sp>
-        <p:nvSpPr>
-          <p:cNvPr id="35" name="Shape 33"/>
-          <p:cNvSpPr/>
-          <p:nvPr/>
-        </p:nvSpPr>
-        <p:spPr>
-          <a:xfrm>
-            <a:off x="2971800" y="2825496"/>
-            <a:ext cx="2834640" cy="402336"/>
-          </a:xfrm>
-          <a:prstGeom prst="rect">
-            <a:avLst/>
-          </a:prstGeom>
-          <a:solidFill>
-            <a:srgbClr val="F1F5F9"/>
-          </a:solidFill>
-          <a:ln w="12700">
-            <a:solidFill>
-              <a:srgbClr val="E2E8F0"/>
-            </a:solidFill>
-            <a:prstDash val="solid"/>
-          </a:ln>
-        </p:spPr>
-      </p:sp>
-      <p:sp>
-        <p:nvSpPr>
-          <p:cNvPr id="36" name="Shape 34"/>
-          <p:cNvSpPr/>
-          <p:nvPr/>
-        </p:nvSpPr>
-        <p:spPr>
-          <a:xfrm>
-            <a:off x="5943600" y="2825496"/>
-            <a:ext cx="2834640" cy="402336"/>
-          </a:xfrm>
-          <a:prstGeom prst="rect">
-            <a:avLst/>
-          </a:prstGeom>
-          <a:solidFill>
-            <a:srgbClr val="FCE7F3"/>
-          </a:solidFill>
-          <a:ln w="12700">
-            <a:solidFill>
-              <a:srgbClr val="E2E8F0"/>
-            </a:solidFill>
-            <a:prstDash val="solid"/>
-          </a:ln>
-        </p:spPr>
-      </p:sp>
-      <p:sp>
-        <p:nvSpPr>
-          <p:cNvPr id="37" name="Text 35"/>
-          <p:cNvSpPr/>
-          <p:nvPr/>
-        </p:nvSpPr>
-        <p:spPr>
-          <a:xfrm>
-            <a:off x="5943600" y="2825496"/>
-            <a:ext cx="2834640" cy="402336"/>
-          </a:xfrm>
-          <a:prstGeom prst="rect">
-            <a:avLst/>
-          </a:prstGeom>
-          <a:noFill/>
-          <a:ln/>
-        </p:spPr>
-        <p:txBody>
-          <a:bodyPr wrap="square" lIns="0" tIns="0" rIns="0" bIns="0" rtlCol="0" anchor="ctr"/>
-          <a:lstStyle/>
-          <a:p>
-            <a:pPr algn="ctr" indent="0" marL="0">
-              <a:buNone/>
-            </a:pPr>
-            <a:r>
-              <a:rPr lang="en-US" sz="1300" b="1" dirty="0">
-                <a:solidFill>
-                  <a:srgbClr val="9D174D"/>
-                </a:solidFill>
-                <a:latin typeface="Trebuchet MS" pitchFamily="34" charset="0"/>
-                <a:ea typeface="Trebuchet MS" pitchFamily="34" charset="-122"/>
-                <a:cs typeface="Trebuchet MS" pitchFamily="34" charset="-120"/>
-              </a:rPr>
-              <a:t>-off</a:t>
-            </a:r>
-            <a:endParaRPr lang="en-US" sz="1300" dirty="0"/>
-          </a:p>
-        </p:txBody>
-      </p:sp>
-      <p:sp>
-        <p:nvSpPr>
-          <p:cNvPr id="38" name="Shape 36"/>
-          <p:cNvSpPr/>
-          <p:nvPr/>
-        </p:nvSpPr>
-        <p:spPr>
-          <a:xfrm>
-            <a:off x="365760" y="3246120"/>
-            <a:ext cx="2468880" cy="402336"/>
-          </a:xfrm>
-          <a:prstGeom prst="rect">
-            <a:avLst/>
-          </a:prstGeom>
-          <a:solidFill>
-            <a:srgbClr val="DDD6FE"/>
-          </a:solidFill>
-          <a:ln w="12700">
-            <a:solidFill>
-              <a:srgbClr val="E2E8F0"/>
-            </a:solidFill>
-            <a:prstDash val="solid"/>
-          </a:ln>
-        </p:spPr>
-      </p:sp>
-      <p:sp>
-        <p:nvSpPr>
-          <p:cNvPr id="39" name="Text 37"/>
-          <p:cNvSpPr/>
-          <p:nvPr/>
-        </p:nvSpPr>
-        <p:spPr>
-          <a:xfrm>
-            <a:off x="365760" y="3246120"/>
-            <a:ext cx="2468880" cy="402336"/>
-          </a:xfrm>
-          <a:prstGeom prst="rect">
-            <a:avLst/>
-          </a:prstGeom>
-          <a:noFill/>
-          <a:ln/>
-        </p:spPr>
-        <p:txBody>
-          <a:bodyPr wrap="square" lIns="0" tIns="0" rIns="0" bIns="0" rtlCol="0" anchor="ctr"/>
-          <a:lstStyle/>
-          <a:p>
-            <a:pPr algn="ctr" indent="0" marL="0">
-              <a:buNone/>
-            </a:pPr>
-            <a:r>
-              <a:rPr lang="en-US" sz="1300" b="1" dirty="0">
-                <a:solidFill>
-                  <a:srgbClr val="4C1D95"/>
-                </a:solidFill>
-                <a:latin typeface="Trebuchet MS" pitchFamily="34" charset="0"/>
-                <a:ea typeface="Trebuchet MS" pitchFamily="34" charset="-122"/>
-                <a:cs typeface="Trebuchet MS" pitchFamily="34" charset="-120"/>
-              </a:rPr>
-              <a:t>up-</a:t>
-            </a:r>
-            <a:endParaRPr lang="en-US" sz="1300" dirty="0"/>
-          </a:p>
-        </p:txBody>
-      </p:sp>
-      <p:sp>
-        <p:nvSpPr>
-          <p:cNvPr id="40" name="Shape 38"/>
-          <p:cNvSpPr/>
-          <p:nvPr/>
-        </p:nvSpPr>
-        <p:spPr>
-          <a:xfrm>
-            <a:off x="2971800" y="3246120"/>
-            <a:ext cx="2834640" cy="402336"/>
-          </a:xfrm>
-          <a:prstGeom prst="rect">
-            <a:avLst/>
-          </a:prstGeom>
-          <a:solidFill>
-            <a:srgbClr val="F8FAFC"/>
-          </a:solidFill>
-          <a:ln w="12700">
-            <a:solidFill>
-              <a:srgbClr val="E2E8F0"/>
-            </a:solidFill>
-            <a:prstDash val="solid"/>
-          </a:ln>
-        </p:spPr>
-      </p:sp>
-      <p:sp>
-        <p:nvSpPr>
-          <p:cNvPr id="41" name="Shape 39"/>
-          <p:cNvSpPr/>
-          <p:nvPr/>
-        </p:nvSpPr>
-        <p:spPr>
-          <a:xfrm>
-            <a:off x="5943600" y="3246120"/>
-            <a:ext cx="2834640" cy="402336"/>
-          </a:xfrm>
-          <a:prstGeom prst="rect">
-            <a:avLst/>
-          </a:prstGeom>
-          <a:solidFill>
-            <a:srgbClr val="FCE7F3"/>
-          </a:solidFill>
-          <a:ln w="12700">
-            <a:solidFill>
-              <a:srgbClr val="E2E8F0"/>
-            </a:solidFill>
-            <a:prstDash val="solid"/>
-          </a:ln>
-        </p:spPr>
-      </p:sp>
-      <p:sp>
-        <p:nvSpPr>
-          <p:cNvPr id="42" name="Text 40"/>
-          <p:cNvSpPr/>
-          <p:nvPr/>
-        </p:nvSpPr>
-        <p:spPr>
-          <a:xfrm>
-            <a:off x="5943600" y="3246120"/>
-            <a:ext cx="2834640" cy="402336"/>
-          </a:xfrm>
-          <a:prstGeom prst="rect">
-            <a:avLst/>
-          </a:prstGeom>
-          <a:noFill/>
-          <a:ln/>
-        </p:spPr>
-        <p:txBody>
-          <a:bodyPr wrap="square" lIns="0" tIns="0" rIns="0" bIns="0" rtlCol="0" anchor="ctr"/>
-          <a:lstStyle/>
-          <a:p>
-            <a:pPr algn="ctr" indent="0" marL="0">
-              <a:buNone/>
-            </a:pPr>
-            <a:r>
-              <a:rPr lang="en-US" sz="1300" b="1" dirty="0">
-                <a:solidFill>
-                  <a:srgbClr val="9D174D"/>
-                </a:solidFill>
-                <a:latin typeface="Trebuchet MS" pitchFamily="34" charset="0"/>
-                <a:ea typeface="Trebuchet MS" pitchFamily="34" charset="-122"/>
-                <a:cs typeface="Trebuchet MS" pitchFamily="34" charset="-120"/>
-              </a:rPr>
-              <a:t>-s</a:t>
-            </a:r>
-            <a:endParaRPr lang="en-US" sz="1300" dirty="0"/>
-          </a:p>
-        </p:txBody>
-      </p:sp>
-      <p:sp>
-        <p:nvSpPr>
-          <p:cNvPr id="43" name="Text 41"/>
-          <p:cNvSpPr/>
-          <p:nvPr/>
-        </p:nvSpPr>
-        <p:spPr>
-          <a:xfrm>
-            <a:off x="365760" y="3611880"/>
-            <a:ext cx="1828800" cy="347472"/>
-          </a:xfrm>
-          <a:prstGeom prst="rect">
-            <a:avLst/>
-          </a:prstGeom>
-          <a:noFill/>
-          <a:ln/>
-        </p:spPr>
-        <p:txBody>
-          <a:bodyPr wrap="square" lIns="0" tIns="0" rIns="0" bIns="0" rtlCol="0" anchor="ctr"/>
-          <a:lstStyle/>
-          <a:p>
-            <a:pPr algn="l" indent="0" marL="0">
-              <a:buNone/>
-            </a:pPr>
-            <a:r>
-              <a:rPr lang="en-US" sz="1200" b="1" dirty="0">
-                <a:solidFill>
-                  <a:srgbClr val="0F172A"/>
-                </a:solidFill>
-                <a:latin typeface="Trebuchet MS" pitchFamily="34" charset="0"/>
-                <a:ea typeface="Trebuchet MS" pitchFamily="34" charset="-122"/>
-                <a:cs typeface="Trebuchet MS" pitchFamily="34" charset="-120"/>
-              </a:rPr>
-              <a:t>Sample words:</a:t>
-            </a:r>
-            <a:endParaRPr lang="en-US" sz="1200" dirty="0"/>
-          </a:p>
-        </p:txBody>
-      </p:sp>
-      <p:sp>
-        <p:nvSpPr>
-          <p:cNvPr id="44" name="Shape 42"/>
-          <p:cNvSpPr/>
-          <p:nvPr/>
-        </p:nvSpPr>
-        <p:spPr>
-          <a:xfrm>
-            <a:off x="365760" y="4023360"/>
-            <a:ext cx="2011680" cy="402336"/>
-          </a:xfrm>
-          <a:prstGeom prst="rect">
-            <a:avLst>
-              <a:gd name="adj" fmla="val 13636"/>
-            </a:avLst>
-          </a:prstGeom>
-          <a:solidFill>
-            <a:srgbClr val="EEF2FF"/>
-          </a:solidFill>
-          <a:ln w="12700">
-            <a:solidFill>
-              <a:srgbClr val="6366F1"/>
-            </a:solidFill>
-            <a:prstDash val="solid"/>
-          </a:ln>
-        </p:spPr>
-      </p:sp>
-      <p:sp>
-        <p:nvSpPr>
-          <p:cNvPr id="45" name="Text 43"/>
-          <p:cNvSpPr/>
-          <p:nvPr/>
-        </p:nvSpPr>
-        <p:spPr>
-          <a:xfrm>
-            <a:off x="365760" y="4023360"/>
-            <a:ext cx="2011680" cy="402336"/>
-          </a:xfrm>
-          <a:prstGeom prst="rect">
-            <a:avLst/>
-          </a:prstGeom>
-          <a:noFill/>
-          <a:ln/>
-        </p:spPr>
-        <p:txBody>
-          <a:bodyPr wrap="square" lIns="0" tIns="0" rIns="0" bIns="0" rtlCol="0" anchor="ctr"/>
-          <a:lstStyle/>
-          <a:p>
-            <a:pPr algn="ctr" indent="0" marL="0">
-              <a:buNone/>
-            </a:pPr>
-            <a:r>
-              <a:rPr lang="en-US" sz="1200" b="1" dirty="0">
-                <a:solidFill>
-                  <a:srgbClr val="4338CA"/>
-                </a:solidFill>
-                <a:latin typeface="Trebuchet MS" pitchFamily="34" charset="0"/>
-                <a:ea typeface="Trebuchet MS" pitchFamily="34" charset="-122"/>
-                <a:cs typeface="Trebuchet MS" pitchFamily="34" charset="-120"/>
-              </a:rPr>
-              <a:t>lifted</a:t>
-            </a:r>
-            <a:endParaRPr lang="en-US" sz="1200" dirty="0"/>
-          </a:p>
-        </p:txBody>
-      </p:sp>
-      <p:sp>
-        <p:nvSpPr>
-          <p:cNvPr id="46" name="Shape 44"/>
-          <p:cNvSpPr/>
-          <p:nvPr/>
-        </p:nvSpPr>
-        <p:spPr>
-          <a:xfrm>
-            <a:off x="2542032" y="4023360"/>
-            <a:ext cx="2011680" cy="402336"/>
-          </a:xfrm>
-          <a:prstGeom prst="rect">
-            <a:avLst>
-              <a:gd name="adj" fmla="val 13636"/>
-            </a:avLst>
-          </a:prstGeom>
-          <a:solidFill>
-            <a:srgbClr val="EEF2FF"/>
-          </a:solidFill>
-          <a:ln w="12700">
-            <a:solidFill>
-              <a:srgbClr val="6366F1"/>
-            </a:solidFill>
-            <a:prstDash val="solid"/>
-          </a:ln>
-        </p:spPr>
-      </p:sp>
-      <p:sp>
-        <p:nvSpPr>
-          <p:cNvPr id="47" name="Text 45"/>
-          <p:cNvSpPr/>
-          <p:nvPr/>
-        </p:nvSpPr>
-        <p:spPr>
-          <a:xfrm>
-            <a:off x="2542032" y="4023360"/>
-            <a:ext cx="2011680" cy="402336"/>
-          </a:xfrm>
-          <a:prstGeom prst="rect">
-            <a:avLst/>
-          </a:prstGeom>
-          <a:noFill/>
-          <a:ln/>
-        </p:spPr>
-        <p:txBody>
-          <a:bodyPr wrap="square" lIns="0" tIns="0" rIns="0" bIns="0" rtlCol="0" anchor="ctr"/>
-          <a:lstStyle/>
-          <a:p>
-            <a:pPr algn="ctr" indent="0" marL="0">
-              <a:buNone/>
-            </a:pPr>
-            <a:r>
-              <a:rPr lang="en-US" sz="1200" b="1" dirty="0">
-                <a:solidFill>
-                  <a:srgbClr val="4338CA"/>
-                </a:solidFill>
-                <a:latin typeface="Trebuchet MS" pitchFamily="34" charset="0"/>
-                <a:ea typeface="Trebuchet MS" pitchFamily="34" charset="-122"/>
-                <a:cs typeface="Trebuchet MS" pitchFamily="34" charset="-120"/>
-              </a:rPr>
-              <a:t>lifting</a:t>
-            </a:r>
-            <a:endParaRPr lang="en-US" sz="1200" dirty="0"/>
-          </a:p>
-        </p:txBody>
-      </p:sp>
-      <p:sp>
-        <p:nvSpPr>
-          <p:cNvPr id="48" name="Shape 46"/>
-          <p:cNvSpPr/>
-          <p:nvPr/>
-        </p:nvSpPr>
-        <p:spPr>
-          <a:xfrm>
-            <a:off x="4718304" y="4023360"/>
-            <a:ext cx="2011680" cy="402336"/>
-          </a:xfrm>
-          <a:prstGeom prst="rect">
-            <a:avLst>
-              <a:gd name="adj" fmla="val 13636"/>
-            </a:avLst>
-          </a:prstGeom>
-          <a:solidFill>
-            <a:srgbClr val="EEF2FF"/>
-          </a:solidFill>
-          <a:ln w="12700">
-            <a:solidFill>
-              <a:srgbClr val="6366F1"/>
-            </a:solidFill>
-            <a:prstDash val="solid"/>
-          </a:ln>
-        </p:spPr>
-      </p:sp>
-      <p:sp>
-        <p:nvSpPr>
-          <p:cNvPr id="49" name="Text 47"/>
-          <p:cNvSpPr/>
-          <p:nvPr/>
-        </p:nvSpPr>
-        <p:spPr>
-          <a:xfrm>
-            <a:off x="4718304" y="4023360"/>
-            <a:ext cx="2011680" cy="402336"/>
-          </a:xfrm>
-          <a:prstGeom prst="rect">
-            <a:avLst/>
-          </a:prstGeom>
-          <a:noFill/>
-          <a:ln/>
-        </p:spPr>
-        <p:txBody>
-          <a:bodyPr wrap="square" lIns="0" tIns="0" rIns="0" bIns="0" rtlCol="0" anchor="ctr"/>
-          <a:lstStyle/>
-          <a:p>
-            <a:pPr algn="ctr" indent="0" marL="0">
-              <a:buNone/>
-            </a:pPr>
-            <a:r>
-              <a:rPr lang="en-US" sz="1200" b="1" dirty="0">
-                <a:solidFill>
-                  <a:srgbClr val="4338CA"/>
-                </a:solidFill>
-                <a:latin typeface="Trebuchet MS" pitchFamily="34" charset="0"/>
-                <a:ea typeface="Trebuchet MS" pitchFamily="34" charset="-122"/>
-                <a:cs typeface="Trebuchet MS" pitchFamily="34" charset="-120"/>
-              </a:rPr>
-              <a:t>lifter</a:t>
-            </a:r>
-            <a:endParaRPr lang="en-US" sz="1200" dirty="0"/>
-          </a:p>
-        </p:txBody>
-      </p:sp>
-      <p:sp>
-        <p:nvSpPr>
-          <p:cNvPr id="50" name="Shape 48"/>
-          <p:cNvSpPr/>
-          <p:nvPr/>
-        </p:nvSpPr>
-        <p:spPr>
-          <a:xfrm>
-            <a:off x="6894576" y="4023360"/>
-            <a:ext cx="2011680" cy="402336"/>
-          </a:xfrm>
-          <a:prstGeom prst="rect">
-            <a:avLst>
-              <a:gd name="adj" fmla="val 13636"/>
-            </a:avLst>
-          </a:prstGeom>
-          <a:solidFill>
-            <a:srgbClr val="EEF2FF"/>
-          </a:solidFill>
-          <a:ln w="12700">
-            <a:solidFill>
-              <a:srgbClr val="6366F1"/>
-            </a:solidFill>
-            <a:prstDash val="solid"/>
-          </a:ln>
-        </p:spPr>
-      </p:sp>
-      <p:sp>
-        <p:nvSpPr>
-          <p:cNvPr id="51" name="Text 49"/>
-          <p:cNvSpPr/>
-          <p:nvPr/>
-        </p:nvSpPr>
-        <p:spPr>
-          <a:xfrm>
-            <a:off x="6894576" y="4023360"/>
-            <a:ext cx="2011680" cy="402336"/>
-          </a:xfrm>
-          <a:prstGeom prst="rect">
-            <a:avLst/>
-          </a:prstGeom>
-          <a:noFill/>
-          <a:ln/>
-        </p:spPr>
-        <p:txBody>
-          <a:bodyPr wrap="square" lIns="0" tIns="0" rIns="0" bIns="0" rtlCol="0" anchor="ctr"/>
-          <a:lstStyle/>
-          <a:p>
-            <a:pPr algn="ctr" indent="0" marL="0">
-              <a:buNone/>
-            </a:pPr>
-            <a:r>
-              <a:rPr lang="en-US" sz="1200" b="1" dirty="0">
-                <a:solidFill>
-                  <a:srgbClr val="4338CA"/>
-                </a:solidFill>
-                <a:latin typeface="Trebuchet MS" pitchFamily="34" charset="0"/>
-                <a:ea typeface="Trebuchet MS" pitchFamily="34" charset="-122"/>
-                <a:cs typeface="Trebuchet MS" pitchFamily="34" charset="-120"/>
-              </a:rPr>
-              <a:t>airlift</a:t>
-            </a:r>
-            <a:endParaRPr lang="en-US" sz="1200" dirty="0"/>
-          </a:p>
-        </p:txBody>
-      </p:sp>
-      <p:sp>
-        <p:nvSpPr>
-          <p:cNvPr id="52" name="Shape 50"/>
-          <p:cNvSpPr/>
-          <p:nvPr/>
-        </p:nvSpPr>
-        <p:spPr>
-          <a:xfrm>
-            <a:off x="365760" y="4498848"/>
-            <a:ext cx="2011680" cy="402336"/>
-          </a:xfrm>
-          <a:prstGeom prst="rect">
-            <a:avLst>
-              <a:gd name="adj" fmla="val 13636"/>
-            </a:avLst>
-          </a:prstGeom>
-          <a:solidFill>
-            <a:srgbClr val="EEF2FF"/>
-          </a:solidFill>
-          <a:ln w="12700">
-            <a:solidFill>
-              <a:srgbClr val="6366F1"/>
-            </a:solidFill>
-            <a:prstDash val="solid"/>
-          </a:ln>
-        </p:spPr>
-      </p:sp>
-      <p:sp>
-        <p:nvSpPr>
-          <p:cNvPr id="53" name="Text 51"/>
-          <p:cNvSpPr/>
-          <p:nvPr/>
-        </p:nvSpPr>
-        <p:spPr>
-          <a:xfrm>
-            <a:off x="365760" y="4498848"/>
-            <a:ext cx="2011680" cy="402336"/>
-          </a:xfrm>
-          <a:prstGeom prst="rect">
-            <a:avLst/>
-          </a:prstGeom>
-          <a:noFill/>
-          <a:ln/>
-        </p:spPr>
-        <p:txBody>
-          <a:bodyPr wrap="square" lIns="0" tIns="0" rIns="0" bIns="0" rtlCol="0" anchor="ctr"/>
-          <a:lstStyle/>
-          <a:p>
-            <a:pPr algn="ctr" indent="0" marL="0">
-              <a:buNone/>
-            </a:pPr>
-            <a:r>
-              <a:rPr lang="en-US" sz="1200" b="1" dirty="0">
-                <a:solidFill>
-                  <a:srgbClr val="4338CA"/>
-                </a:solidFill>
-                <a:latin typeface="Trebuchet MS" pitchFamily="34" charset="0"/>
-                <a:ea typeface="Trebuchet MS" pitchFamily="34" charset="-122"/>
-                <a:cs typeface="Trebuchet MS" pitchFamily="34" charset="-120"/>
-              </a:rPr>
-              <a:t>facelift</a:t>
-            </a:r>
-            <a:endParaRPr lang="en-US" sz="1200" dirty="0"/>
-          </a:p>
-        </p:txBody>
-      </p:sp>
-      <p:sp>
-        <p:nvSpPr>
-          <p:cNvPr id="54" name="Shape 52"/>
-          <p:cNvSpPr/>
-          <p:nvPr/>
-        </p:nvSpPr>
-        <p:spPr>
-          <a:xfrm>
-            <a:off x="2542032" y="4498848"/>
-            <a:ext cx="2011680" cy="402336"/>
-          </a:xfrm>
-          <a:prstGeom prst="rect">
-            <a:avLst>
-              <a:gd name="adj" fmla="val 13636"/>
-            </a:avLst>
-          </a:prstGeom>
-          <a:solidFill>
-            <a:srgbClr val="EEF2FF"/>
-          </a:solidFill>
-          <a:ln w="12700">
-            <a:solidFill>
-              <a:srgbClr val="6366F1"/>
-            </a:solidFill>
-            <a:prstDash val="solid"/>
-          </a:ln>
-        </p:spPr>
-      </p:sp>
-      <p:sp>
-        <p:nvSpPr>
-          <p:cNvPr id="55" name="Text 53"/>
-          <p:cNvSpPr/>
-          <p:nvPr/>
-        </p:nvSpPr>
-        <p:spPr>
-          <a:xfrm>
-            <a:off x="2542032" y="4498848"/>
-            <a:ext cx="2011680" cy="402336"/>
-          </a:xfrm>
-          <a:prstGeom prst="rect">
-            <a:avLst/>
-          </a:prstGeom>
-          <a:noFill/>
-          <a:ln/>
-        </p:spPr>
-        <p:txBody>
-          <a:bodyPr wrap="square" lIns="0" tIns="0" rIns="0" bIns="0" rtlCol="0" anchor="ctr"/>
-          <a:lstStyle/>
-          <a:p>
-            <a:pPr algn="ctr" indent="0" marL="0">
-              <a:buNone/>
-            </a:pPr>
-            <a:r>
-              <a:rPr lang="en-US" sz="1200" b="1" dirty="0">
-                <a:solidFill>
-                  <a:srgbClr val="4338CA"/>
-                </a:solidFill>
-                <a:latin typeface="Trebuchet MS" pitchFamily="34" charset="0"/>
-                <a:ea typeface="Trebuchet MS" pitchFamily="34" charset="-122"/>
-                <a:cs typeface="Trebuchet MS" pitchFamily="34" charset="-120"/>
-              </a:rPr>
-              <a:t>shoplift</a:t>
-            </a:r>
-            <a:endParaRPr lang="en-US" sz="1200" dirty="0"/>
-          </a:p>
-        </p:txBody>
-      </p:sp>
-      <p:sp>
-        <p:nvSpPr>
-          <p:cNvPr id="56" name="Shape 54"/>
-          <p:cNvSpPr/>
-          <p:nvPr/>
-        </p:nvSpPr>
-        <p:spPr>
-          <a:xfrm>
-            <a:off x="4718304" y="4498848"/>
-            <a:ext cx="2011680" cy="402336"/>
-          </a:xfrm>
-          <a:prstGeom prst="rect">
-            <a:avLst>
-              <a:gd name="adj" fmla="val 13636"/>
-            </a:avLst>
-          </a:prstGeom>
-          <a:solidFill>
-            <a:srgbClr val="EEF2FF"/>
-          </a:solidFill>
-          <a:ln w="12700">
-            <a:solidFill>
-              <a:srgbClr val="6366F1"/>
-            </a:solidFill>
-            <a:prstDash val="solid"/>
-          </a:ln>
-        </p:spPr>
-      </p:sp>
-      <p:sp>
-        <p:nvSpPr>
-          <p:cNvPr id="57" name="Text 55"/>
-          <p:cNvSpPr/>
-          <p:nvPr/>
-        </p:nvSpPr>
-        <p:spPr>
-          <a:xfrm>
-            <a:off x="4718304" y="4498848"/>
-            <a:ext cx="2011680" cy="402336"/>
-          </a:xfrm>
-          <a:prstGeom prst="rect">
-            <a:avLst/>
-          </a:prstGeom>
-          <a:noFill/>
-          <a:ln/>
-        </p:spPr>
-        <p:txBody>
-          <a:bodyPr wrap="square" lIns="0" tIns="0" rIns="0" bIns="0" rtlCol="0" anchor="ctr"/>
-          <a:lstStyle/>
-          <a:p>
-            <a:pPr algn="ctr" indent="0" marL="0">
-              <a:buNone/>
-            </a:pPr>
-            <a:r>
-              <a:rPr lang="en-US" sz="1200" b="1" dirty="0">
-                <a:solidFill>
-                  <a:srgbClr val="4338CA"/>
-                </a:solidFill>
-                <a:latin typeface="Trebuchet MS" pitchFamily="34" charset="0"/>
-                <a:ea typeface="Trebuchet MS" pitchFamily="34" charset="-122"/>
-                <a:cs typeface="Trebuchet MS" pitchFamily="34" charset="-120"/>
-              </a:rPr>
-              <a:t>forklift</a:t>
-            </a:r>
-            <a:endParaRPr lang="en-US" sz="1200" dirty="0"/>
-          </a:p>
-        </p:txBody>
-      </p:sp>
-      <p:sp>
-        <p:nvSpPr>
-          <p:cNvPr id="58" name="Shape 56"/>
-          <p:cNvSpPr/>
-          <p:nvPr/>
-        </p:nvSpPr>
-        <p:spPr>
-          <a:xfrm>
-            <a:off x="6894576" y="4498848"/>
-            <a:ext cx="2011680" cy="402336"/>
-          </a:xfrm>
-          <a:prstGeom prst="rect">
-            <a:avLst>
-              <a:gd name="adj" fmla="val 13636"/>
-            </a:avLst>
-          </a:prstGeom>
-          <a:solidFill>
-            <a:srgbClr val="EEF2FF"/>
-          </a:solidFill>
-          <a:ln w="12700">
-            <a:solidFill>
-              <a:srgbClr val="6366F1"/>
-            </a:solidFill>
-            <a:prstDash val="solid"/>
-          </a:ln>
-        </p:spPr>
-      </p:sp>
-      <p:sp>
-        <p:nvSpPr>
-          <p:cNvPr id="59" name="Text 57"/>
-          <p:cNvSpPr/>
-          <p:nvPr/>
-        </p:nvSpPr>
-        <p:spPr>
-          <a:xfrm>
-            <a:off x="6894576" y="4498848"/>
-            <a:ext cx="2011680" cy="402336"/>
-          </a:xfrm>
-          <a:prstGeom prst="rect">
-            <a:avLst/>
-          </a:prstGeom>
-          <a:noFill/>
-          <a:ln/>
-        </p:spPr>
-        <p:txBody>
-          <a:bodyPr wrap="square" lIns="0" tIns="0" rIns="0" bIns="0" rtlCol="0" anchor="ctr"/>
-          <a:lstStyle/>
-          <a:p>
-            <a:pPr algn="ctr" indent="0" marL="0">
-              <a:buNone/>
-            </a:pPr>
-            <a:r>
-              <a:rPr lang="en-US" sz="1200" b="1" dirty="0">
-                <a:solidFill>
-                  <a:srgbClr val="4338CA"/>
-                </a:solidFill>
-                <a:latin typeface="Trebuchet MS" pitchFamily="34" charset="0"/>
-                <a:ea typeface="Trebuchet MS" pitchFamily="34" charset="-122"/>
-                <a:cs typeface="Trebuchet MS" pitchFamily="34" charset="-120"/>
-              </a:rPr>
-              <a:t>liftoff</a:t>
+              <a:t>lift</a:t>
             </a:r>
             <a:endParaRPr lang="en-US" sz="1200" dirty="0"/>
           </a:p>
@@ -34587,7 +33810,7 @@
                 <a:ea typeface="Calibri" pitchFamily="34" charset="-122"/>
                 <a:cs typeface="Calibri" pitchFamily="34" charset="-120"/>
               </a:rPr>
-              <a:t>Word Labs  •  wordlabs.app  •  Root: 'lift' = to raise or elevate</a:t>
+              <a:t>Word Labs  •  wordlabs.app  •  Root: 'lift' = to raise; to pick up</a:t>
             </a:r>
             <a:endParaRPr lang="en-US" sz="800" dirty="0"/>
           </a:p>
@@ -34751,7 +33974,7 @@
                 <a:ea typeface="Calibri" pitchFamily="34" charset="-122"/>
                 <a:cs typeface="Calibri" pitchFamily="34" charset="-120"/>
               </a:rPr>
-              <a:t>The core part of a word carrying its basic meaning. For example, 'lift' means 'to raise or elevate'.</a:t>
+              <a:t>The core part of a word carrying its basic meaning. For example, 'lift' means 'to raise; to pick up'.</a:t>
             </a:r>
             <a:endParaRPr lang="en-US" sz="1350" dirty="0"/>
           </a:p>
@@ -35371,7 +34594,7 @@
                 <a:ea typeface="Calibri" pitchFamily="34" charset="-122"/>
                 <a:cs typeface="Calibri" pitchFamily="34" charset="-120"/>
               </a:rPr>
-              <a:t>Word Labs  •  wordlabs.app  •  Root: 'lift' = to raise or elevate</a:t>
+              <a:t>Word Labs  •  wordlabs.app  •  Root: 'lift' = to raise; to pick up</a:t>
             </a:r>
             <a:endParaRPr lang="en-US" sz="800" dirty="0"/>
           </a:p>
@@ -35483,7 +34706,7 @@
                 <a:ea typeface="Calibri" pitchFamily="34" charset="-122"/>
                 <a:cs typeface="Calibri" pitchFamily="34" charset="-120"/>
               </a:rPr>
-              <a:t>1.  A forklift is a machine that uses the idea of lifting to move heavy objects.</a:t>
+              <a:t>1.  'lift' means 'to raise; to pick up'.</a:t>
             </a:r>
             <a:endParaRPr lang="en-US" sz="1300" dirty="0"/>
           </a:p>
@@ -35622,7 +34845,7 @@
                 <a:ea typeface="Calibri" pitchFamily="34" charset="-122"/>
                 <a:cs typeface="Calibri" pitchFamily="34" charset="-120"/>
               </a:rPr>
-              <a:t>2.  Liftoff describes the moment a rocket rises up from the ground.</a:t>
+              <a:t>2.  'lift' means 'to cook food slowly over low heat'.</a:t>
             </a:r>
             <a:endParaRPr lang="en-US" sz="1300" dirty="0"/>
           </a:p>
@@ -35645,11 +34868,11 @@
             </a:avLst>
           </a:prstGeom>
           <a:solidFill>
-            <a:srgbClr val="DCFCE7"/>
-          </a:solidFill>
-          <a:ln w="12700">
-            <a:solidFill>
-              <a:srgbClr val="16A34A"/>
+            <a:srgbClr val="FEE2E2"/>
+          </a:solidFill>
+          <a:ln w="12700">
+            <a:solidFill>
+              <a:srgbClr val="DC2626"/>
             </a:solidFill>
             <a:prstDash val="solid"/>
           </a:ln>
@@ -35682,13 +34905,13 @@
             <a:r>
               <a:rPr lang="en-US" sz="1100" b="1" dirty="0">
                 <a:solidFill>
-                  <a:srgbClr val="16A34A"/>
+                  <a:srgbClr val="DC2626"/>
                 </a:solidFill>
                 <a:latin typeface="Trebuchet MS" pitchFamily="34" charset="0"/>
                 <a:ea typeface="Trebuchet MS" pitchFamily="34" charset="-122"/>
                 <a:cs typeface="Trebuchet MS" pitchFamily="34" charset="-120"/>
               </a:rPr>
-              <a:t>TRUE</a:t>
+              <a:t>FALSE</a:t>
             </a:r>
             <a:endParaRPr lang="en-US" sz="1100" dirty="0"/>
           </a:p>
@@ -35761,7 +34984,7 @@
                 <a:ea typeface="Calibri" pitchFamily="34" charset="-122"/>
                 <a:cs typeface="Calibri" pitchFamily="34" charset="-120"/>
               </a:rPr>
-              <a:t>3.  The morpheme 'lift' carries the meaning of raising something upward.</a:t>
+              <a:t>3.  'lift' means 'to raise something up, or a machine that carries people between floors'.</a:t>
             </a:r>
             <a:endParaRPr lang="en-US" sz="1300" dirty="0"/>
           </a:p>
@@ -35828,284 +35051,6 @@
                 <a:cs typeface="Trebuchet MS" pitchFamily="34" charset="-120"/>
               </a:rPr>
               <a:t>TRUE</a:t>
-            </a:r>
-            <a:endParaRPr lang="en-US" sz="1100" dirty="0"/>
-          </a:p>
-        </p:txBody>
-      </p:sp>
-      <p:sp>
-        <p:nvSpPr>
-          <p:cNvPr id="23" name="Shape 21"/>
-          <p:cNvSpPr/>
-          <p:nvPr/>
-        </p:nvSpPr>
-        <p:spPr>
-          <a:xfrm>
-            <a:off x="365760" y="3291840"/>
-            <a:ext cx="7315200" cy="566928"/>
-          </a:xfrm>
-          <a:prstGeom prst="rect">
-            <a:avLst>
-              <a:gd name="adj" fmla="val 12903"/>
-            </a:avLst>
-          </a:prstGeom>
-          <a:solidFill>
-            <a:srgbClr val="F8FAFC"/>
-          </a:solidFill>
-          <a:ln w="12700">
-            <a:solidFill>
-              <a:srgbClr val="E2E8F0"/>
-            </a:solidFill>
-            <a:prstDash val="solid"/>
-          </a:ln>
-          <a:effectLst>
-            <a:outerShdw sx="100000" sy="100000" kx="0" ky="0" algn="bl" rotWithShape="0" blurRad="101600" dist="38100" dir="8100000">
-              <a:srgbClr val="000000">
-                <a:alpha val="12000"/>
-              </a:srgbClr>
-            </a:outerShdw>
-          </a:effectLst>
-        </p:spPr>
-      </p:sp>
-      <p:sp>
-        <p:nvSpPr>
-          <p:cNvPr id="24" name="Text 22"/>
-          <p:cNvSpPr/>
-          <p:nvPr/>
-        </p:nvSpPr>
-        <p:spPr>
-          <a:xfrm>
-            <a:off x="548640" y="3291840"/>
-            <a:ext cx="6949440" cy="566928"/>
-          </a:xfrm>
-          <a:prstGeom prst="rect">
-            <a:avLst/>
-          </a:prstGeom>
-          <a:noFill/>
-          <a:ln/>
-        </p:spPr>
-        <p:txBody>
-          <a:bodyPr wrap="square" rtlCol="0" anchor="ctr"/>
-          <a:lstStyle/>
-          <a:p>
-            <a:pPr algn="l" indent="0" marL="0">
-              <a:buNone/>
-            </a:pPr>
-            <a:r>
-              <a:rPr lang="en-US" sz="1300" dirty="0">
-                <a:solidFill>
-                  <a:srgbClr val="0F172A"/>
-                </a:solidFill>
-                <a:latin typeface="Calibri" pitchFamily="34" charset="0"/>
-                <a:ea typeface="Calibri" pitchFamily="34" charset="-122"/>
-                <a:cs typeface="Calibri" pitchFamily="34" charset="-120"/>
-              </a:rPr>
-              <a:t>4.  The word 'lift' comes originally from ancient Greek.</a:t>
-            </a:r>
-            <a:endParaRPr lang="en-US" sz="1300" dirty="0"/>
-          </a:p>
-        </p:txBody>
-      </p:sp>
-      <p:sp>
-        <p:nvSpPr>
-          <p:cNvPr id="25" name="Shape 23"/>
-          <p:cNvSpPr/>
-          <p:nvPr/>
-        </p:nvSpPr>
-        <p:spPr>
-          <a:xfrm>
-            <a:off x="7772400" y="3291840"/>
-            <a:ext cx="1005840" cy="566928"/>
-          </a:xfrm>
-          <a:prstGeom prst="rect">
-            <a:avLst>
-              <a:gd name="adj" fmla="val 12903"/>
-            </a:avLst>
-          </a:prstGeom>
-          <a:solidFill>
-            <a:srgbClr val="FEE2E2"/>
-          </a:solidFill>
-          <a:ln w="12700">
-            <a:solidFill>
-              <a:srgbClr val="DC2626"/>
-            </a:solidFill>
-            <a:prstDash val="solid"/>
-          </a:ln>
-        </p:spPr>
-      </p:sp>
-      <p:sp>
-        <p:nvSpPr>
-          <p:cNvPr id="26" name="Text 24"/>
-          <p:cNvSpPr/>
-          <p:nvPr/>
-        </p:nvSpPr>
-        <p:spPr>
-          <a:xfrm>
-            <a:off x="7772400" y="3291840"/>
-            <a:ext cx="1005840" cy="566928"/>
-          </a:xfrm>
-          <a:prstGeom prst="rect">
-            <a:avLst/>
-          </a:prstGeom>
-          <a:noFill/>
-          <a:ln/>
-        </p:spPr>
-        <p:txBody>
-          <a:bodyPr wrap="square" lIns="0" tIns="0" rIns="0" bIns="0" rtlCol="0" anchor="ctr"/>
-          <a:lstStyle/>
-          <a:p>
-            <a:pPr algn="ctr" indent="0" marL="0">
-              <a:buNone/>
-            </a:pPr>
-            <a:r>
-              <a:rPr lang="en-US" sz="1100" b="1" dirty="0">
-                <a:solidFill>
-                  <a:srgbClr val="DC2626"/>
-                </a:solidFill>
-                <a:latin typeface="Trebuchet MS" pitchFamily="34" charset="0"/>
-                <a:ea typeface="Trebuchet MS" pitchFamily="34" charset="-122"/>
-                <a:cs typeface="Trebuchet MS" pitchFamily="34" charset="-120"/>
-              </a:rPr>
-              <a:t>FALSE</a:t>
-            </a:r>
-            <a:endParaRPr lang="en-US" sz="1100" dirty="0"/>
-          </a:p>
-        </p:txBody>
-      </p:sp>
-      <p:sp>
-        <p:nvSpPr>
-          <p:cNvPr id="27" name="Shape 25"/>
-          <p:cNvSpPr/>
-          <p:nvPr/>
-        </p:nvSpPr>
-        <p:spPr>
-          <a:xfrm>
-            <a:off x="365760" y="3986784"/>
-            <a:ext cx="7315200" cy="566928"/>
-          </a:xfrm>
-          <a:prstGeom prst="rect">
-            <a:avLst>
-              <a:gd name="adj" fmla="val 12903"/>
-            </a:avLst>
-          </a:prstGeom>
-          <a:solidFill>
-            <a:srgbClr val="F8FAFC"/>
-          </a:solidFill>
-          <a:ln w="12700">
-            <a:solidFill>
-              <a:srgbClr val="E2E8F0"/>
-            </a:solidFill>
-            <a:prstDash val="solid"/>
-          </a:ln>
-          <a:effectLst>
-            <a:outerShdw sx="100000" sy="100000" kx="0" ky="0" algn="bl" rotWithShape="0" blurRad="101600" dist="38100" dir="8100000">
-              <a:srgbClr val="000000">
-                <a:alpha val="12000"/>
-              </a:srgbClr>
-            </a:outerShdw>
-          </a:effectLst>
-        </p:spPr>
-      </p:sp>
-      <p:sp>
-        <p:nvSpPr>
-          <p:cNvPr id="28" name="Text 26"/>
-          <p:cNvSpPr/>
-          <p:nvPr/>
-        </p:nvSpPr>
-        <p:spPr>
-          <a:xfrm>
-            <a:off x="548640" y="3986784"/>
-            <a:ext cx="6949440" cy="566928"/>
-          </a:xfrm>
-          <a:prstGeom prst="rect">
-            <a:avLst/>
-          </a:prstGeom>
-          <a:noFill/>
-          <a:ln/>
-        </p:spPr>
-        <p:txBody>
-          <a:bodyPr wrap="square" rtlCol="0" anchor="ctr"/>
-          <a:lstStyle/>
-          <a:p>
-            <a:pPr algn="l" indent="0" marL="0">
-              <a:buNone/>
-            </a:pPr>
-            <a:r>
-              <a:rPr lang="en-US" sz="1300" dirty="0">
-                <a:solidFill>
-                  <a:srgbClr val="0F172A"/>
-                </a:solidFill>
-                <a:latin typeface="Calibri" pitchFamily="34" charset="0"/>
-                <a:ea typeface="Calibri" pitchFamily="34" charset="-122"/>
-                <a:cs typeface="Calibri" pitchFamily="34" charset="-120"/>
-              </a:rPr>
-              <a:t>5.  Shoplifting means buying things from a shop at a discount.</a:t>
-            </a:r>
-            <a:endParaRPr lang="en-US" sz="1300" dirty="0"/>
-          </a:p>
-        </p:txBody>
-      </p:sp>
-      <p:sp>
-        <p:nvSpPr>
-          <p:cNvPr id="29" name="Shape 27"/>
-          <p:cNvSpPr/>
-          <p:nvPr/>
-        </p:nvSpPr>
-        <p:spPr>
-          <a:xfrm>
-            <a:off x="7772400" y="3986784"/>
-            <a:ext cx="1005840" cy="566928"/>
-          </a:xfrm>
-          <a:prstGeom prst="rect">
-            <a:avLst>
-              <a:gd name="adj" fmla="val 12903"/>
-            </a:avLst>
-          </a:prstGeom>
-          <a:solidFill>
-            <a:srgbClr val="FEE2E2"/>
-          </a:solidFill>
-          <a:ln w="12700">
-            <a:solidFill>
-              <a:srgbClr val="DC2626"/>
-            </a:solidFill>
-            <a:prstDash val="solid"/>
-          </a:ln>
-        </p:spPr>
-      </p:sp>
-      <p:sp>
-        <p:nvSpPr>
-          <p:cNvPr id="30" name="Text 28"/>
-          <p:cNvSpPr/>
-          <p:nvPr/>
-        </p:nvSpPr>
-        <p:spPr>
-          <a:xfrm>
-            <a:off x="7772400" y="3986784"/>
-            <a:ext cx="1005840" cy="566928"/>
-          </a:xfrm>
-          <a:prstGeom prst="rect">
-            <a:avLst/>
-          </a:prstGeom>
-          <a:noFill/>
-          <a:ln/>
-        </p:spPr>
-        <p:txBody>
-          <a:bodyPr wrap="square" lIns="0" tIns="0" rIns="0" bIns="0" rtlCol="0" anchor="ctr"/>
-          <a:lstStyle/>
-          <a:p>
-            <a:pPr algn="ctr" indent="0" marL="0">
-              <a:buNone/>
-            </a:pPr>
-            <a:r>
-              <a:rPr lang="en-US" sz="1100" b="1" dirty="0">
-                <a:solidFill>
-                  <a:srgbClr val="DC2626"/>
-                </a:solidFill>
-                <a:latin typeface="Trebuchet MS" pitchFamily="34" charset="0"/>
-                <a:ea typeface="Trebuchet MS" pitchFamily="34" charset="-122"/>
-                <a:cs typeface="Trebuchet MS" pitchFamily="34" charset="-120"/>
-              </a:rPr>
-              <a:t>FALSE</a:t>
             </a:r>
             <a:endParaRPr lang="en-US" sz="1100" dirty="0"/>
           </a:p>
@@ -36397,7 +35342,7 @@
                 <a:ea typeface="Calibri" pitchFamily="34" charset="-122"/>
                 <a:cs typeface="Calibri" pitchFamily="34" charset="-120"/>
               </a:rPr>
-              <a:t>Word Labs  •  wordlabs.app  •  Root: 'lift' = to raise or elevate</a:t>
+              <a:t>Word Labs  •  wordlabs.app  •  Root: 'lift' = to raise; to pick up</a:t>
             </a:r>
             <a:endParaRPr lang="en-US" sz="800" dirty="0"/>
           </a:p>
@@ -36534,7 +35479,7 @@
                 <a:ea typeface="Trebuchet MS" pitchFamily="34" charset="-122"/>
                 <a:cs typeface="Trebuchet MS" pitchFamily="34" charset="-120"/>
               </a:rPr>
-              <a:t>to raise or elevate</a:t>
+              <a:t>to raise; to pick up</a:t>
             </a:r>
             <a:endParaRPr lang="en-US" sz="2000" dirty="0"/>
           </a:p>
@@ -36573,7 +35518,7 @@
                 <a:ea typeface="Calibri" pitchFamily="34" charset="-122"/>
                 <a:cs typeface="Calibri" pitchFamily="34" charset="-120"/>
               </a:rPr>
-              <a:t>Origin: Old Norse: lypta</a:t>
+              <a:t>Origin: Anglo-Saxon (Old English) root</a:t>
             </a:r>
             <a:endParaRPr lang="en-US" sz="1100" dirty="0"/>
           </a:p>
@@ -36678,403 +35623,7 @@
                 <a:ea typeface="Trebuchet MS" pitchFamily="34" charset="-122"/>
                 <a:cs typeface="Trebuchet MS" pitchFamily="34" charset="-120"/>
               </a:rPr>
-              <a:t>lifted</a:t>
-            </a:r>
-            <a:endParaRPr lang="en-US" sz="1300" dirty="0"/>
-          </a:p>
-        </p:txBody>
-      </p:sp>
-      <p:sp>
-        <p:nvSpPr>
-          <p:cNvPr id="18" name="Shape 16"/>
-          <p:cNvSpPr/>
-          <p:nvPr/>
-        </p:nvSpPr>
-        <p:spPr>
-          <a:xfrm>
-            <a:off x="2514600" y="2743200"/>
-            <a:ext cx="2011680" cy="502920"/>
-          </a:xfrm>
-          <a:prstGeom prst="rect">
-            <a:avLst>
-              <a:gd name="adj" fmla="val 14545"/>
-            </a:avLst>
-          </a:prstGeom>
-          <a:solidFill>
-            <a:srgbClr val="EEF2FF"/>
-          </a:solidFill>
-          <a:ln w="12700">
-            <a:solidFill>
-              <a:srgbClr val="6366F1"/>
-            </a:solidFill>
-            <a:prstDash val="solid"/>
-          </a:ln>
-        </p:spPr>
-      </p:sp>
-      <p:sp>
-        <p:nvSpPr>
-          <p:cNvPr id="19" name="Text 17"/>
-          <p:cNvSpPr/>
-          <p:nvPr/>
-        </p:nvSpPr>
-        <p:spPr>
-          <a:xfrm>
-            <a:off x="2514600" y="2743200"/>
-            <a:ext cx="2011680" cy="502920"/>
-          </a:xfrm>
-          <a:prstGeom prst="rect">
-            <a:avLst/>
-          </a:prstGeom>
-          <a:noFill/>
-          <a:ln/>
-        </p:spPr>
-        <p:txBody>
-          <a:bodyPr wrap="square" lIns="0" tIns="0" rIns="0" bIns="0" rtlCol="0" anchor="ctr"/>
-          <a:lstStyle/>
-          <a:p>
-            <a:pPr algn="ctr" indent="0" marL="0">
-              <a:buNone/>
-            </a:pPr>
-            <a:r>
-              <a:rPr lang="en-US" sz="1300" b="1" dirty="0">
-                <a:solidFill>
-                  <a:srgbClr val="4338CA"/>
-                </a:solidFill>
-                <a:latin typeface="Trebuchet MS" pitchFamily="34" charset="0"/>
-                <a:ea typeface="Trebuchet MS" pitchFamily="34" charset="-122"/>
-                <a:cs typeface="Trebuchet MS" pitchFamily="34" charset="-120"/>
-              </a:rPr>
-              <a:t>lifting</a:t>
-            </a:r>
-            <a:endParaRPr lang="en-US" sz="1300" dirty="0"/>
-          </a:p>
-        </p:txBody>
-      </p:sp>
-      <p:sp>
-        <p:nvSpPr>
-          <p:cNvPr id="20" name="Shape 18"/>
-          <p:cNvSpPr/>
-          <p:nvPr/>
-        </p:nvSpPr>
-        <p:spPr>
-          <a:xfrm>
-            <a:off x="4663440" y="2743200"/>
-            <a:ext cx="2011680" cy="502920"/>
-          </a:xfrm>
-          <a:prstGeom prst="rect">
-            <a:avLst>
-              <a:gd name="adj" fmla="val 14545"/>
-            </a:avLst>
-          </a:prstGeom>
-          <a:solidFill>
-            <a:srgbClr val="EEF2FF"/>
-          </a:solidFill>
-          <a:ln w="12700">
-            <a:solidFill>
-              <a:srgbClr val="6366F1"/>
-            </a:solidFill>
-            <a:prstDash val="solid"/>
-          </a:ln>
-        </p:spPr>
-      </p:sp>
-      <p:sp>
-        <p:nvSpPr>
-          <p:cNvPr id="21" name="Text 19"/>
-          <p:cNvSpPr/>
-          <p:nvPr/>
-        </p:nvSpPr>
-        <p:spPr>
-          <a:xfrm>
-            <a:off x="4663440" y="2743200"/>
-            <a:ext cx="2011680" cy="502920"/>
-          </a:xfrm>
-          <a:prstGeom prst="rect">
-            <a:avLst/>
-          </a:prstGeom>
-          <a:noFill/>
-          <a:ln/>
-        </p:spPr>
-        <p:txBody>
-          <a:bodyPr wrap="square" lIns="0" tIns="0" rIns="0" bIns="0" rtlCol="0" anchor="ctr"/>
-          <a:lstStyle/>
-          <a:p>
-            <a:pPr algn="ctr" indent="0" marL="0">
-              <a:buNone/>
-            </a:pPr>
-            <a:r>
-              <a:rPr lang="en-US" sz="1300" b="1" dirty="0">
-                <a:solidFill>
-                  <a:srgbClr val="4338CA"/>
-                </a:solidFill>
-                <a:latin typeface="Trebuchet MS" pitchFamily="34" charset="0"/>
-                <a:ea typeface="Trebuchet MS" pitchFamily="34" charset="-122"/>
-                <a:cs typeface="Trebuchet MS" pitchFamily="34" charset="-120"/>
-              </a:rPr>
-              <a:t>lifter</a:t>
-            </a:r>
-            <a:endParaRPr lang="en-US" sz="1300" dirty="0"/>
-          </a:p>
-        </p:txBody>
-      </p:sp>
-      <p:sp>
-        <p:nvSpPr>
-          <p:cNvPr id="22" name="Shape 20"/>
-          <p:cNvSpPr/>
-          <p:nvPr/>
-        </p:nvSpPr>
-        <p:spPr>
-          <a:xfrm>
-            <a:off x="6812280" y="2743200"/>
-            <a:ext cx="2011680" cy="502920"/>
-          </a:xfrm>
-          <a:prstGeom prst="rect">
-            <a:avLst>
-              <a:gd name="adj" fmla="val 14545"/>
-            </a:avLst>
-          </a:prstGeom>
-          <a:solidFill>
-            <a:srgbClr val="EEF2FF"/>
-          </a:solidFill>
-          <a:ln w="12700">
-            <a:solidFill>
-              <a:srgbClr val="6366F1"/>
-            </a:solidFill>
-            <a:prstDash val="solid"/>
-          </a:ln>
-        </p:spPr>
-      </p:sp>
-      <p:sp>
-        <p:nvSpPr>
-          <p:cNvPr id="23" name="Text 21"/>
-          <p:cNvSpPr/>
-          <p:nvPr/>
-        </p:nvSpPr>
-        <p:spPr>
-          <a:xfrm>
-            <a:off x="6812280" y="2743200"/>
-            <a:ext cx="2011680" cy="502920"/>
-          </a:xfrm>
-          <a:prstGeom prst="rect">
-            <a:avLst/>
-          </a:prstGeom>
-          <a:noFill/>
-          <a:ln/>
-        </p:spPr>
-        <p:txBody>
-          <a:bodyPr wrap="square" lIns="0" tIns="0" rIns="0" bIns="0" rtlCol="0" anchor="ctr"/>
-          <a:lstStyle/>
-          <a:p>
-            <a:pPr algn="ctr" indent="0" marL="0">
-              <a:buNone/>
-            </a:pPr>
-            <a:r>
-              <a:rPr lang="en-US" sz="1300" b="1" dirty="0">
-                <a:solidFill>
-                  <a:srgbClr val="4338CA"/>
-                </a:solidFill>
-                <a:latin typeface="Trebuchet MS" pitchFamily="34" charset="0"/>
-                <a:ea typeface="Trebuchet MS" pitchFamily="34" charset="-122"/>
-                <a:cs typeface="Trebuchet MS" pitchFamily="34" charset="-120"/>
-              </a:rPr>
-              <a:t>airlift</a:t>
-            </a:r>
-            <a:endParaRPr lang="en-US" sz="1300" dirty="0"/>
-          </a:p>
-        </p:txBody>
-      </p:sp>
-      <p:sp>
-        <p:nvSpPr>
-          <p:cNvPr id="24" name="Shape 22"/>
-          <p:cNvSpPr/>
-          <p:nvPr/>
-        </p:nvSpPr>
-        <p:spPr>
-          <a:xfrm>
-            <a:off x="365760" y="3401568"/>
-            <a:ext cx="2011680" cy="502920"/>
-          </a:xfrm>
-          <a:prstGeom prst="rect">
-            <a:avLst>
-              <a:gd name="adj" fmla="val 14545"/>
-            </a:avLst>
-          </a:prstGeom>
-          <a:solidFill>
-            <a:srgbClr val="EEF2FF"/>
-          </a:solidFill>
-          <a:ln w="12700">
-            <a:solidFill>
-              <a:srgbClr val="6366F1"/>
-            </a:solidFill>
-            <a:prstDash val="solid"/>
-          </a:ln>
-        </p:spPr>
-      </p:sp>
-      <p:sp>
-        <p:nvSpPr>
-          <p:cNvPr id="25" name="Text 23"/>
-          <p:cNvSpPr/>
-          <p:nvPr/>
-        </p:nvSpPr>
-        <p:spPr>
-          <a:xfrm>
-            <a:off x="365760" y="3401568"/>
-            <a:ext cx="2011680" cy="502920"/>
-          </a:xfrm>
-          <a:prstGeom prst="rect">
-            <a:avLst/>
-          </a:prstGeom>
-          <a:noFill/>
-          <a:ln/>
-        </p:spPr>
-        <p:txBody>
-          <a:bodyPr wrap="square" lIns="0" tIns="0" rIns="0" bIns="0" rtlCol="0" anchor="ctr"/>
-          <a:lstStyle/>
-          <a:p>
-            <a:pPr algn="ctr" indent="0" marL="0">
-              <a:buNone/>
-            </a:pPr>
-            <a:r>
-              <a:rPr lang="en-US" sz="1300" b="1" dirty="0">
-                <a:solidFill>
-                  <a:srgbClr val="4338CA"/>
-                </a:solidFill>
-                <a:latin typeface="Trebuchet MS" pitchFamily="34" charset="0"/>
-                <a:ea typeface="Trebuchet MS" pitchFamily="34" charset="-122"/>
-                <a:cs typeface="Trebuchet MS" pitchFamily="34" charset="-120"/>
-              </a:rPr>
-              <a:t>facelift</a:t>
-            </a:r>
-            <a:endParaRPr lang="en-US" sz="1300" dirty="0"/>
-          </a:p>
-        </p:txBody>
-      </p:sp>
-      <p:sp>
-        <p:nvSpPr>
-          <p:cNvPr id="26" name="Shape 24"/>
-          <p:cNvSpPr/>
-          <p:nvPr/>
-        </p:nvSpPr>
-        <p:spPr>
-          <a:xfrm>
-            <a:off x="2514600" y="3401568"/>
-            <a:ext cx="2011680" cy="502920"/>
-          </a:xfrm>
-          <a:prstGeom prst="rect">
-            <a:avLst>
-              <a:gd name="adj" fmla="val 14545"/>
-            </a:avLst>
-          </a:prstGeom>
-          <a:solidFill>
-            <a:srgbClr val="EEF2FF"/>
-          </a:solidFill>
-          <a:ln w="12700">
-            <a:solidFill>
-              <a:srgbClr val="6366F1"/>
-            </a:solidFill>
-            <a:prstDash val="solid"/>
-          </a:ln>
-        </p:spPr>
-      </p:sp>
-      <p:sp>
-        <p:nvSpPr>
-          <p:cNvPr id="27" name="Text 25"/>
-          <p:cNvSpPr/>
-          <p:nvPr/>
-        </p:nvSpPr>
-        <p:spPr>
-          <a:xfrm>
-            <a:off x="2514600" y="3401568"/>
-            <a:ext cx="2011680" cy="502920"/>
-          </a:xfrm>
-          <a:prstGeom prst="rect">
-            <a:avLst/>
-          </a:prstGeom>
-          <a:noFill/>
-          <a:ln/>
-        </p:spPr>
-        <p:txBody>
-          <a:bodyPr wrap="square" lIns="0" tIns="0" rIns="0" bIns="0" rtlCol="0" anchor="ctr"/>
-          <a:lstStyle/>
-          <a:p>
-            <a:pPr algn="ctr" indent="0" marL="0">
-              <a:buNone/>
-            </a:pPr>
-            <a:r>
-              <a:rPr lang="en-US" sz="1300" b="1" dirty="0">
-                <a:solidFill>
-                  <a:srgbClr val="4338CA"/>
-                </a:solidFill>
-                <a:latin typeface="Trebuchet MS" pitchFamily="34" charset="0"/>
-                <a:ea typeface="Trebuchet MS" pitchFamily="34" charset="-122"/>
-                <a:cs typeface="Trebuchet MS" pitchFamily="34" charset="-120"/>
-              </a:rPr>
-              <a:t>shoplift</a:t>
-            </a:r>
-            <a:endParaRPr lang="en-US" sz="1300" dirty="0"/>
-          </a:p>
-        </p:txBody>
-      </p:sp>
-      <p:sp>
-        <p:nvSpPr>
-          <p:cNvPr id="28" name="Shape 26"/>
-          <p:cNvSpPr/>
-          <p:nvPr/>
-        </p:nvSpPr>
-        <p:spPr>
-          <a:xfrm>
-            <a:off x="4663440" y="3401568"/>
-            <a:ext cx="2011680" cy="502920"/>
-          </a:xfrm>
-          <a:prstGeom prst="rect">
-            <a:avLst>
-              <a:gd name="adj" fmla="val 14545"/>
-            </a:avLst>
-          </a:prstGeom>
-          <a:solidFill>
-            <a:srgbClr val="EEF2FF"/>
-          </a:solidFill>
-          <a:ln w="12700">
-            <a:solidFill>
-              <a:srgbClr val="6366F1"/>
-            </a:solidFill>
-            <a:prstDash val="solid"/>
-          </a:ln>
-        </p:spPr>
-      </p:sp>
-      <p:sp>
-        <p:nvSpPr>
-          <p:cNvPr id="29" name="Text 27"/>
-          <p:cNvSpPr/>
-          <p:nvPr/>
-        </p:nvSpPr>
-        <p:spPr>
-          <a:xfrm>
-            <a:off x="4663440" y="3401568"/>
-            <a:ext cx="2011680" cy="502920"/>
-          </a:xfrm>
-          <a:prstGeom prst="rect">
-            <a:avLst/>
-          </a:prstGeom>
-          <a:noFill/>
-          <a:ln/>
-        </p:spPr>
-        <p:txBody>
-          <a:bodyPr wrap="square" lIns="0" tIns="0" rIns="0" bIns="0" rtlCol="0" anchor="ctr"/>
-          <a:lstStyle/>
-          <a:p>
-            <a:pPr algn="ctr" indent="0" marL="0">
-              <a:buNone/>
-            </a:pPr>
-            <a:r>
-              <a:rPr lang="en-US" sz="1300" b="1" dirty="0">
-                <a:solidFill>
-                  <a:srgbClr val="4338CA"/>
-                </a:solidFill>
-                <a:latin typeface="Trebuchet MS" pitchFamily="34" charset="0"/>
-                <a:ea typeface="Trebuchet MS" pitchFamily="34" charset="-122"/>
-                <a:cs typeface="Trebuchet MS" pitchFamily="34" charset="-120"/>
-              </a:rPr>
-              <a:t>forklift</a:t>
+              <a:t>lift</a:t>
             </a:r>
             <a:endParaRPr lang="en-US" sz="1300" dirty="0"/>
           </a:p>
@@ -37366,7 +35915,7 @@
                 <a:ea typeface="Calibri" pitchFamily="34" charset="-122"/>
                 <a:cs typeface="Calibri" pitchFamily="34" charset="-120"/>
               </a:rPr>
-              <a:t>Word Labs  •  wordlabs.app  •  Root: 'lift' = to raise or elevate</a:t>
+              <a:t>Word Labs  •  wordlabs.app  •  Root: 'lift' = to raise; to pick up</a:t>
             </a:r>
             <a:endParaRPr lang="en-US" sz="800" dirty="0"/>
           </a:p>
@@ -37624,7 +36173,7 @@
             <a:avLst/>
           </a:prstGeom>
           <a:solidFill>
-            <a:srgbClr val="DDD6FE"/>
+            <a:srgbClr val="F8FAFC"/>
           </a:solidFill>
           <a:ln w="12700">
             <a:solidFill>
@@ -37636,14 +36185,39 @@
       </p:sp>
       <p:sp>
         <p:nvSpPr>
-          <p:cNvPr id="18" name="Text 16"/>
-          <p:cNvSpPr/>
-          <p:nvPr/>
-        </p:nvSpPr>
-        <p:spPr>
-          <a:xfrm>
-            <a:off x="640080" y="1755648"/>
-            <a:ext cx="1463040" cy="420624"/>
+          <p:cNvPr id="18" name="Shape 16"/>
+          <p:cNvSpPr/>
+          <p:nvPr/>
+        </p:nvSpPr>
+        <p:spPr>
+          <a:xfrm>
+            <a:off x="3291840" y="1755648"/>
+            <a:ext cx="1645920" cy="420624"/>
+          </a:xfrm>
+          <a:prstGeom prst="rect">
+            <a:avLst/>
+          </a:prstGeom>
+          <a:solidFill>
+            <a:srgbClr val="CCFBF1"/>
+          </a:solidFill>
+          <a:ln w="12700">
+            <a:solidFill>
+              <a:srgbClr val="E5E7EB"/>
+            </a:solidFill>
+            <a:prstDash val="solid"/>
+          </a:ln>
+        </p:spPr>
+      </p:sp>
+      <p:sp>
+        <p:nvSpPr>
+          <p:cNvPr id="19" name="Text 17"/>
+          <p:cNvSpPr/>
+          <p:nvPr/>
+        </p:nvSpPr>
+        <p:spPr>
+          <a:xfrm>
+            <a:off x="3291840" y="1755648"/>
+            <a:ext cx="1645920" cy="420624"/>
           </a:xfrm>
           <a:prstGeom prst="rect">
             <a:avLst/>
@@ -37661,13 +36235,13 @@
             <a:r>
               <a:rPr lang="en-US" sz="1300" b="1" dirty="0">
                 <a:solidFill>
-                  <a:srgbClr val="4C1D95"/>
+                  <a:srgbClr val="0F766E"/>
                 </a:solidFill>
                 <a:latin typeface="Trebuchet MS" pitchFamily="34" charset="0"/>
                 <a:ea typeface="Trebuchet MS" pitchFamily="34" charset="-122"/>
                 <a:cs typeface="Trebuchet MS" pitchFamily="34" charset="-120"/>
               </a:rPr>
-              <a:t>air-</a:t>
+              <a:t>lift</a:t>
             </a:r>
             <a:endParaRPr lang="en-US" sz="1300" dirty="0"/>
           </a:p>
@@ -37675,20 +36249,20 @@
       </p:sp>
       <p:sp>
         <p:nvSpPr>
-          <p:cNvPr id="19" name="Shape 17"/>
-          <p:cNvSpPr/>
-          <p:nvPr/>
-        </p:nvSpPr>
-        <p:spPr>
-          <a:xfrm>
-            <a:off x="3291840" y="1755648"/>
-            <a:ext cx="1645920" cy="420624"/>
-          </a:xfrm>
-          <a:prstGeom prst="rect">
-            <a:avLst/>
-          </a:prstGeom>
-          <a:solidFill>
-            <a:srgbClr val="CCFBF1"/>
+          <p:cNvPr id="20" name="Shape 18"/>
+          <p:cNvSpPr/>
+          <p:nvPr/>
+        </p:nvSpPr>
+        <p:spPr>
+          <a:xfrm>
+            <a:off x="5943600" y="1755648"/>
+            <a:ext cx="1463040" cy="420624"/>
+          </a:xfrm>
+          <a:prstGeom prst="rect">
+            <a:avLst/>
+          </a:prstGeom>
+          <a:solidFill>
+            <a:srgbClr val="FCE7F3"/>
           </a:solidFill>
           <a:ln w="12700">
             <a:solidFill>
@@ -37700,14 +36274,14 @@
       </p:sp>
       <p:sp>
         <p:nvSpPr>
-          <p:cNvPr id="20" name="Text 18"/>
-          <p:cNvSpPr/>
-          <p:nvPr/>
-        </p:nvSpPr>
-        <p:spPr>
-          <a:xfrm>
-            <a:off x="3291840" y="1755648"/>
-            <a:ext cx="1645920" cy="420624"/>
+          <p:cNvPr id="21" name="Text 19"/>
+          <p:cNvSpPr/>
+          <p:nvPr/>
+        </p:nvSpPr>
+        <p:spPr>
+          <a:xfrm>
+            <a:off x="5943600" y="1755648"/>
+            <a:ext cx="1463040" cy="420624"/>
           </a:xfrm>
           <a:prstGeom prst="rect">
             <a:avLst/>
@@ -37725,13 +36299,13 @@
             <a:r>
               <a:rPr lang="en-US" sz="1300" b="1" dirty="0">
                 <a:solidFill>
-                  <a:srgbClr val="0F766E"/>
+                  <a:srgbClr val="9D174D"/>
                 </a:solidFill>
                 <a:latin typeface="Trebuchet MS" pitchFamily="34" charset="0"/>
                 <a:ea typeface="Trebuchet MS" pitchFamily="34" charset="-122"/>
                 <a:cs typeface="Trebuchet MS" pitchFamily="34" charset="-120"/>
               </a:rPr>
-              <a:t>lift</a:t>
+              <a:t>-ed</a:t>
             </a:r>
             <a:endParaRPr lang="en-US" sz="1300" dirty="0"/>
           </a:p>
@@ -37739,19 +36313,69 @@
       </p:sp>
       <p:sp>
         <p:nvSpPr>
-          <p:cNvPr id="21" name="Shape 19"/>
-          <p:cNvSpPr/>
-          <p:nvPr/>
-        </p:nvSpPr>
-        <p:spPr>
-          <a:xfrm>
-            <a:off x="5943600" y="1755648"/>
+          <p:cNvPr id="22" name="Shape 20"/>
+          <p:cNvSpPr/>
+          <p:nvPr/>
+        </p:nvSpPr>
+        <p:spPr>
+          <a:xfrm>
+            <a:off x="640080" y="2212848"/>
             <a:ext cx="1463040" cy="420624"/>
           </a:xfrm>
           <a:prstGeom prst="rect">
             <a:avLst/>
           </a:prstGeom>
           <a:solidFill>
+            <a:srgbClr val="F1F5F9"/>
+          </a:solidFill>
+          <a:ln w="12700">
+            <a:solidFill>
+              <a:srgbClr val="E5E7EB"/>
+            </a:solidFill>
+            <a:prstDash val="solid"/>
+          </a:ln>
+        </p:spPr>
+      </p:sp>
+      <p:sp>
+        <p:nvSpPr>
+          <p:cNvPr id="23" name="Shape 21"/>
+          <p:cNvSpPr/>
+          <p:nvPr/>
+        </p:nvSpPr>
+        <p:spPr>
+          <a:xfrm>
+            <a:off x="3291840" y="2212848"/>
+            <a:ext cx="1645920" cy="420624"/>
+          </a:xfrm>
+          <a:prstGeom prst="rect">
+            <a:avLst/>
+          </a:prstGeom>
+          <a:solidFill>
+            <a:srgbClr val="F1F5F9"/>
+          </a:solidFill>
+          <a:ln w="12700">
+            <a:solidFill>
+              <a:srgbClr val="E5E7EB"/>
+            </a:solidFill>
+            <a:prstDash val="solid"/>
+          </a:ln>
+        </p:spPr>
+      </p:sp>
+      <p:sp>
+        <p:nvSpPr>
+          <p:cNvPr id="24" name="Shape 22"/>
+          <p:cNvSpPr/>
+          <p:nvPr/>
+        </p:nvSpPr>
+        <p:spPr>
+          <a:xfrm>
+            <a:off x="5943600" y="2212848"/>
+            <a:ext cx="1463040" cy="420624"/>
+          </a:xfrm>
+          <a:prstGeom prst="rect">
+            <a:avLst/>
+          </a:prstGeom>
+          <a:solidFill>
             <a:srgbClr val="FCE7F3"/>
           </a:solidFill>
           <a:ln w="12700">
@@ -37764,13 +36388,13 @@
       </p:sp>
       <p:sp>
         <p:nvSpPr>
-          <p:cNvPr id="22" name="Text 20"/>
-          <p:cNvSpPr/>
-          <p:nvPr/>
-        </p:nvSpPr>
-        <p:spPr>
-          <a:xfrm>
-            <a:off x="5943600" y="1755648"/>
+          <p:cNvPr id="25" name="Text 23"/>
+          <p:cNvSpPr/>
+          <p:nvPr/>
+        </p:nvSpPr>
+        <p:spPr>
+          <a:xfrm>
+            <a:off x="5943600" y="2212848"/>
             <a:ext cx="1463040" cy="420624"/>
           </a:xfrm>
           <a:prstGeom prst="rect">
@@ -37795,7 +36419,7 @@
                 <a:ea typeface="Trebuchet MS" pitchFamily="34" charset="-122"/>
                 <a:cs typeface="Trebuchet MS" pitchFamily="34" charset="-120"/>
               </a:rPr>
-              <a:t>-ed</a:t>
+              <a:t>-er</a:t>
             </a:r>
             <a:endParaRPr lang="en-US" sz="1300" dirty="0"/>
           </a:p>
@@ -37803,20 +36427,20 @@
       </p:sp>
       <p:sp>
         <p:nvSpPr>
-          <p:cNvPr id="23" name="Shape 21"/>
-          <p:cNvSpPr/>
-          <p:nvPr/>
-        </p:nvSpPr>
-        <p:spPr>
-          <a:xfrm>
-            <a:off x="640080" y="2212848"/>
+          <p:cNvPr id="26" name="Shape 24"/>
+          <p:cNvSpPr/>
+          <p:nvPr/>
+        </p:nvSpPr>
+        <p:spPr>
+          <a:xfrm>
+            <a:off x="640080" y="2670048"/>
             <a:ext cx="1463040" cy="420624"/>
           </a:xfrm>
           <a:prstGeom prst="rect">
             <a:avLst/>
           </a:prstGeom>
           <a:solidFill>
-            <a:srgbClr val="DDD6FE"/>
+            <a:srgbClr val="F8FAFC"/>
           </a:solidFill>
           <a:ln w="12700">
             <a:solidFill>
@@ -37828,18 +36452,68 @@
       </p:sp>
       <p:sp>
         <p:nvSpPr>
-          <p:cNvPr id="24" name="Text 22"/>
-          <p:cNvSpPr/>
-          <p:nvPr/>
-        </p:nvSpPr>
-        <p:spPr>
-          <a:xfrm>
-            <a:off x="640080" y="2212848"/>
+          <p:cNvPr id="27" name="Shape 25"/>
+          <p:cNvSpPr/>
+          <p:nvPr/>
+        </p:nvSpPr>
+        <p:spPr>
+          <a:xfrm>
+            <a:off x="3291840" y="2670048"/>
+            <a:ext cx="1645920" cy="420624"/>
+          </a:xfrm>
+          <a:prstGeom prst="rect">
+            <a:avLst/>
+          </a:prstGeom>
+          <a:solidFill>
+            <a:srgbClr val="F8FAFC"/>
+          </a:solidFill>
+          <a:ln w="12700">
+            <a:solidFill>
+              <a:srgbClr val="E5E7EB"/>
+            </a:solidFill>
+            <a:prstDash val="solid"/>
+          </a:ln>
+        </p:spPr>
+      </p:sp>
+      <p:sp>
+        <p:nvSpPr>
+          <p:cNvPr id="28" name="Shape 26"/>
+          <p:cNvSpPr/>
+          <p:nvPr/>
+        </p:nvSpPr>
+        <p:spPr>
+          <a:xfrm>
+            <a:off x="5943600" y="2670048"/>
             <a:ext cx="1463040" cy="420624"/>
           </a:xfrm>
           <a:prstGeom prst="rect">
             <a:avLst/>
           </a:prstGeom>
+          <a:solidFill>
+            <a:srgbClr val="FCE7F3"/>
+          </a:solidFill>
+          <a:ln w="12700">
+            <a:solidFill>
+              <a:srgbClr val="E5E7EB"/>
+            </a:solidFill>
+            <a:prstDash val="solid"/>
+          </a:ln>
+        </p:spPr>
+      </p:sp>
+      <p:sp>
+        <p:nvSpPr>
+          <p:cNvPr id="29" name="Text 27"/>
+          <p:cNvSpPr/>
+          <p:nvPr/>
+        </p:nvSpPr>
+        <p:spPr>
+          <a:xfrm>
+            <a:off x="5943600" y="2670048"/>
+            <a:ext cx="1463040" cy="420624"/>
+          </a:xfrm>
+          <a:prstGeom prst="rect">
+            <a:avLst/>
+          </a:prstGeom>
           <a:noFill/>
           <a:ln/>
         </p:spPr>
@@ -37853,13 +36527,13 @@
             <a:r>
               <a:rPr lang="en-US" sz="1300" b="1" dirty="0">
                 <a:solidFill>
-                  <a:srgbClr val="4C1D95"/>
+                  <a:srgbClr val="9D174D"/>
                 </a:solidFill>
                 <a:latin typeface="Trebuchet MS" pitchFamily="34" charset="0"/>
                 <a:ea typeface="Trebuchet MS" pitchFamily="34" charset="-122"/>
                 <a:cs typeface="Trebuchet MS" pitchFamily="34" charset="-120"/>
               </a:rPr>
-              <a:t>face-</a:t>
+              <a:t>-ing</a:t>
             </a:r>
             <a:endParaRPr lang="en-US" sz="1300" dirty="0"/>
           </a:p>
@@ -37867,13 +36541,38 @@
       </p:sp>
       <p:sp>
         <p:nvSpPr>
-          <p:cNvPr id="25" name="Shape 23"/>
-          <p:cNvSpPr/>
-          <p:nvPr/>
-        </p:nvSpPr>
-        <p:spPr>
-          <a:xfrm>
-            <a:off x="3291840" y="2212848"/>
+          <p:cNvPr id="30" name="Shape 28"/>
+          <p:cNvSpPr/>
+          <p:nvPr/>
+        </p:nvSpPr>
+        <p:spPr>
+          <a:xfrm>
+            <a:off x="640080" y="3127248"/>
+            <a:ext cx="1463040" cy="420624"/>
+          </a:xfrm>
+          <a:prstGeom prst="rect">
+            <a:avLst/>
+          </a:prstGeom>
+          <a:solidFill>
+            <a:srgbClr val="F1F5F9"/>
+          </a:solidFill>
+          <a:ln w="12700">
+            <a:solidFill>
+              <a:srgbClr val="E5E7EB"/>
+            </a:solidFill>
+            <a:prstDash val="solid"/>
+          </a:ln>
+        </p:spPr>
+      </p:sp>
+      <p:sp>
+        <p:nvSpPr>
+          <p:cNvPr id="31" name="Shape 29"/>
+          <p:cNvSpPr/>
+          <p:nvPr/>
+        </p:nvSpPr>
+        <p:spPr>
+          <a:xfrm>
+            <a:off x="3291840" y="3127248"/>
             <a:ext cx="1645920" cy="420624"/>
           </a:xfrm>
           <a:prstGeom prst="rect">
@@ -37892,13 +36591,13 @@
       </p:sp>
       <p:sp>
         <p:nvSpPr>
-          <p:cNvPr id="26" name="Shape 24"/>
-          <p:cNvSpPr/>
-          <p:nvPr/>
-        </p:nvSpPr>
-        <p:spPr>
-          <a:xfrm>
-            <a:off x="5943600" y="2212848"/>
+          <p:cNvPr id="32" name="Shape 30"/>
+          <p:cNvSpPr/>
+          <p:nvPr/>
+        </p:nvSpPr>
+        <p:spPr>
+          <a:xfrm>
+            <a:off x="5943600" y="3127248"/>
             <a:ext cx="1463040" cy="420624"/>
           </a:xfrm>
           <a:prstGeom prst="rect">
@@ -37917,13 +36616,13 @@
       </p:sp>
       <p:sp>
         <p:nvSpPr>
-          <p:cNvPr id="27" name="Text 25"/>
-          <p:cNvSpPr/>
-          <p:nvPr/>
-        </p:nvSpPr>
-        <p:spPr>
-          <a:xfrm>
-            <a:off x="5943600" y="2212848"/>
+          <p:cNvPr id="33" name="Text 31"/>
+          <p:cNvSpPr/>
+          <p:nvPr/>
+        </p:nvSpPr>
+        <p:spPr>
+          <a:xfrm>
+            <a:off x="5943600" y="3127248"/>
             <a:ext cx="1463040" cy="420624"/>
           </a:xfrm>
           <a:prstGeom prst="rect">
@@ -37948,7 +36647,7 @@
                 <a:ea typeface="Trebuchet MS" pitchFamily="34" charset="-122"/>
                 <a:cs typeface="Trebuchet MS" pitchFamily="34" charset="-120"/>
               </a:rPr>
-              <a:t>-er</a:t>
+              <a:t>-s</a:t>
             </a:r>
             <a:endParaRPr lang="en-US" sz="1300" dirty="0"/>
           </a:p>
@@ -37956,472 +36655,13 @@
       </p:sp>
       <p:sp>
         <p:nvSpPr>
-          <p:cNvPr id="28" name="Shape 26"/>
-          <p:cNvSpPr/>
-          <p:nvPr/>
-        </p:nvSpPr>
-        <p:spPr>
-          <a:xfrm>
-            <a:off x="640080" y="2670048"/>
-            <a:ext cx="1463040" cy="420624"/>
-          </a:xfrm>
-          <a:prstGeom prst="rect">
-            <a:avLst/>
-          </a:prstGeom>
-          <a:solidFill>
-            <a:srgbClr val="DDD6FE"/>
-          </a:solidFill>
-          <a:ln w="12700">
-            <a:solidFill>
-              <a:srgbClr val="E5E7EB"/>
-            </a:solidFill>
-            <a:prstDash val="solid"/>
-          </a:ln>
-        </p:spPr>
-      </p:sp>
-      <p:sp>
-        <p:nvSpPr>
-          <p:cNvPr id="29" name="Text 27"/>
-          <p:cNvSpPr/>
-          <p:nvPr/>
-        </p:nvSpPr>
-        <p:spPr>
-          <a:xfrm>
-            <a:off x="640080" y="2670048"/>
-            <a:ext cx="1463040" cy="420624"/>
-          </a:xfrm>
-          <a:prstGeom prst="rect">
-            <a:avLst/>
-          </a:prstGeom>
-          <a:noFill/>
-          <a:ln/>
-        </p:spPr>
-        <p:txBody>
-          <a:bodyPr wrap="square" lIns="0" tIns="0" rIns="0" bIns="0" rtlCol="0" anchor="ctr"/>
-          <a:lstStyle/>
-          <a:p>
-            <a:pPr algn="ctr" indent="0" marL="0">
-              <a:buNone/>
-            </a:pPr>
-            <a:r>
-              <a:rPr lang="en-US" sz="1300" b="1" dirty="0">
-                <a:solidFill>
-                  <a:srgbClr val="4C1D95"/>
-                </a:solidFill>
-                <a:latin typeface="Trebuchet MS" pitchFamily="34" charset="0"/>
-                <a:ea typeface="Trebuchet MS" pitchFamily="34" charset="-122"/>
-                <a:cs typeface="Trebuchet MS" pitchFamily="34" charset="-120"/>
-              </a:rPr>
-              <a:t>fork-</a:t>
-            </a:r>
-            <a:endParaRPr lang="en-US" sz="1300" dirty="0"/>
-          </a:p>
-        </p:txBody>
-      </p:sp>
-      <p:sp>
-        <p:nvSpPr>
-          <p:cNvPr id="30" name="Shape 28"/>
-          <p:cNvSpPr/>
-          <p:nvPr/>
-        </p:nvSpPr>
-        <p:spPr>
-          <a:xfrm>
-            <a:off x="3291840" y="2670048"/>
-            <a:ext cx="1645920" cy="420624"/>
-          </a:xfrm>
-          <a:prstGeom prst="rect">
-            <a:avLst/>
-          </a:prstGeom>
-          <a:solidFill>
-            <a:srgbClr val="F8FAFC"/>
-          </a:solidFill>
-          <a:ln w="12700">
-            <a:solidFill>
-              <a:srgbClr val="E5E7EB"/>
-            </a:solidFill>
-            <a:prstDash val="solid"/>
-          </a:ln>
-        </p:spPr>
-      </p:sp>
-      <p:sp>
-        <p:nvSpPr>
-          <p:cNvPr id="31" name="Shape 29"/>
-          <p:cNvSpPr/>
-          <p:nvPr/>
-        </p:nvSpPr>
-        <p:spPr>
-          <a:xfrm>
-            <a:off x="5943600" y="2670048"/>
-            <a:ext cx="1463040" cy="420624"/>
-          </a:xfrm>
-          <a:prstGeom prst="rect">
-            <a:avLst/>
-          </a:prstGeom>
-          <a:solidFill>
-            <a:srgbClr val="FCE7F3"/>
-          </a:solidFill>
-          <a:ln w="12700">
-            <a:solidFill>
-              <a:srgbClr val="E5E7EB"/>
-            </a:solidFill>
-            <a:prstDash val="solid"/>
-          </a:ln>
-        </p:spPr>
-      </p:sp>
-      <p:sp>
-        <p:nvSpPr>
-          <p:cNvPr id="32" name="Text 30"/>
-          <p:cNvSpPr/>
-          <p:nvPr/>
-        </p:nvSpPr>
-        <p:spPr>
-          <a:xfrm>
-            <a:off x="5943600" y="2670048"/>
-            <a:ext cx="1463040" cy="420624"/>
-          </a:xfrm>
-          <a:prstGeom prst="rect">
-            <a:avLst/>
-          </a:prstGeom>
-          <a:noFill/>
-          <a:ln/>
-        </p:spPr>
-        <p:txBody>
-          <a:bodyPr wrap="square" lIns="0" tIns="0" rIns="0" bIns="0" rtlCol="0" anchor="ctr"/>
-          <a:lstStyle/>
-          <a:p>
-            <a:pPr algn="ctr" indent="0" marL="0">
-              <a:buNone/>
-            </a:pPr>
-            <a:r>
-              <a:rPr lang="en-US" sz="1300" b="1" dirty="0">
-                <a:solidFill>
-                  <a:srgbClr val="9D174D"/>
-                </a:solidFill>
-                <a:latin typeface="Trebuchet MS" pitchFamily="34" charset="0"/>
-                <a:ea typeface="Trebuchet MS" pitchFamily="34" charset="-122"/>
-                <a:cs typeface="Trebuchet MS" pitchFamily="34" charset="-120"/>
-              </a:rPr>
-              <a:t>-ing</a:t>
-            </a:r>
-            <a:endParaRPr lang="en-US" sz="1300" dirty="0"/>
-          </a:p>
-        </p:txBody>
-      </p:sp>
-      <p:sp>
-        <p:nvSpPr>
-          <p:cNvPr id="33" name="Shape 31"/>
-          <p:cNvSpPr/>
-          <p:nvPr/>
-        </p:nvSpPr>
-        <p:spPr>
-          <a:xfrm>
-            <a:off x="640080" y="3127248"/>
-            <a:ext cx="1463040" cy="420624"/>
-          </a:xfrm>
-          <a:prstGeom prst="rect">
-            <a:avLst/>
-          </a:prstGeom>
-          <a:solidFill>
-            <a:srgbClr val="DDD6FE"/>
-          </a:solidFill>
-          <a:ln w="12700">
-            <a:solidFill>
-              <a:srgbClr val="E5E7EB"/>
-            </a:solidFill>
-            <a:prstDash val="solid"/>
-          </a:ln>
-        </p:spPr>
-      </p:sp>
-      <p:sp>
-        <p:nvSpPr>
           <p:cNvPr id="34" name="Text 32"/>
           <p:cNvSpPr/>
           <p:nvPr/>
         </p:nvSpPr>
         <p:spPr>
           <a:xfrm>
-            <a:off x="640080" y="3127248"/>
-            <a:ext cx="1463040" cy="420624"/>
-          </a:xfrm>
-          <a:prstGeom prst="rect">
-            <a:avLst/>
-          </a:prstGeom>
-          <a:noFill/>
-          <a:ln/>
-        </p:spPr>
-        <p:txBody>
-          <a:bodyPr wrap="square" lIns="0" tIns="0" rIns="0" bIns="0" rtlCol="0" anchor="ctr"/>
-          <a:lstStyle/>
-          <a:p>
-            <a:pPr algn="ctr" indent="0" marL="0">
-              <a:buNone/>
-            </a:pPr>
-            <a:r>
-              <a:rPr lang="en-US" sz="1300" b="1" dirty="0">
-                <a:solidFill>
-                  <a:srgbClr val="4C1D95"/>
-                </a:solidFill>
-                <a:latin typeface="Trebuchet MS" pitchFamily="34" charset="0"/>
-                <a:ea typeface="Trebuchet MS" pitchFamily="34" charset="-122"/>
-                <a:cs typeface="Trebuchet MS" pitchFamily="34" charset="-120"/>
-              </a:rPr>
-              <a:t>shop-</a:t>
-            </a:r>
-            <a:endParaRPr lang="en-US" sz="1300" dirty="0"/>
-          </a:p>
-        </p:txBody>
-      </p:sp>
-      <p:sp>
-        <p:nvSpPr>
-          <p:cNvPr id="35" name="Shape 33"/>
-          <p:cNvSpPr/>
-          <p:nvPr/>
-        </p:nvSpPr>
-        <p:spPr>
-          <a:xfrm>
-            <a:off x="3291840" y="3127248"/>
-            <a:ext cx="1645920" cy="420624"/>
-          </a:xfrm>
-          <a:prstGeom prst="rect">
-            <a:avLst/>
-          </a:prstGeom>
-          <a:solidFill>
-            <a:srgbClr val="F1F5F9"/>
-          </a:solidFill>
-          <a:ln w="12700">
-            <a:solidFill>
-              <a:srgbClr val="E5E7EB"/>
-            </a:solidFill>
-            <a:prstDash val="solid"/>
-          </a:ln>
-        </p:spPr>
-      </p:sp>
-      <p:sp>
-        <p:nvSpPr>
-          <p:cNvPr id="36" name="Shape 34"/>
-          <p:cNvSpPr/>
-          <p:nvPr/>
-        </p:nvSpPr>
-        <p:spPr>
-          <a:xfrm>
-            <a:off x="5943600" y="3127248"/>
-            <a:ext cx="1463040" cy="420624"/>
-          </a:xfrm>
-          <a:prstGeom prst="rect">
-            <a:avLst/>
-          </a:prstGeom>
-          <a:solidFill>
-            <a:srgbClr val="FCE7F3"/>
-          </a:solidFill>
-          <a:ln w="12700">
-            <a:solidFill>
-              <a:srgbClr val="E5E7EB"/>
-            </a:solidFill>
-            <a:prstDash val="solid"/>
-          </a:ln>
-        </p:spPr>
-      </p:sp>
-      <p:sp>
-        <p:nvSpPr>
-          <p:cNvPr id="37" name="Text 35"/>
-          <p:cNvSpPr/>
-          <p:nvPr/>
-        </p:nvSpPr>
-        <p:spPr>
-          <a:xfrm>
-            <a:off x="5943600" y="3127248"/>
-            <a:ext cx="1463040" cy="420624"/>
-          </a:xfrm>
-          <a:prstGeom prst="rect">
-            <a:avLst/>
-          </a:prstGeom>
-          <a:noFill/>
-          <a:ln/>
-        </p:spPr>
-        <p:txBody>
-          <a:bodyPr wrap="square" lIns="0" tIns="0" rIns="0" bIns="0" rtlCol="0" anchor="ctr"/>
-          <a:lstStyle/>
-          <a:p>
-            <a:pPr algn="ctr" indent="0" marL="0">
-              <a:buNone/>
-            </a:pPr>
-            <a:r>
-              <a:rPr lang="en-US" sz="1300" b="1" dirty="0">
-                <a:solidFill>
-                  <a:srgbClr val="9D174D"/>
-                </a:solidFill>
-                <a:latin typeface="Trebuchet MS" pitchFamily="34" charset="0"/>
-                <a:ea typeface="Trebuchet MS" pitchFamily="34" charset="-122"/>
-                <a:cs typeface="Trebuchet MS" pitchFamily="34" charset="-120"/>
-              </a:rPr>
-              <a:t>-off</a:t>
-            </a:r>
-            <a:endParaRPr lang="en-US" sz="1300" dirty="0"/>
-          </a:p>
-        </p:txBody>
-      </p:sp>
-      <p:sp>
-        <p:nvSpPr>
-          <p:cNvPr id="38" name="Shape 36"/>
-          <p:cNvSpPr/>
-          <p:nvPr/>
-        </p:nvSpPr>
-        <p:spPr>
-          <a:xfrm>
-            <a:off x="640080" y="3584448"/>
-            <a:ext cx="1463040" cy="420624"/>
-          </a:xfrm>
-          <a:prstGeom prst="rect">
-            <a:avLst/>
-          </a:prstGeom>
-          <a:solidFill>
-            <a:srgbClr val="DDD6FE"/>
-          </a:solidFill>
-          <a:ln w="12700">
-            <a:solidFill>
-              <a:srgbClr val="E5E7EB"/>
-            </a:solidFill>
-            <a:prstDash val="solid"/>
-          </a:ln>
-        </p:spPr>
-      </p:sp>
-      <p:sp>
-        <p:nvSpPr>
-          <p:cNvPr id="39" name="Text 37"/>
-          <p:cNvSpPr/>
-          <p:nvPr/>
-        </p:nvSpPr>
-        <p:spPr>
-          <a:xfrm>
-            <a:off x="640080" y="3584448"/>
-            <a:ext cx="1463040" cy="420624"/>
-          </a:xfrm>
-          <a:prstGeom prst="rect">
-            <a:avLst/>
-          </a:prstGeom>
-          <a:noFill/>
-          <a:ln/>
-        </p:spPr>
-        <p:txBody>
-          <a:bodyPr wrap="square" lIns="0" tIns="0" rIns="0" bIns="0" rtlCol="0" anchor="ctr"/>
-          <a:lstStyle/>
-          <a:p>
-            <a:pPr algn="ctr" indent="0" marL="0">
-              <a:buNone/>
-            </a:pPr>
-            <a:r>
-              <a:rPr lang="en-US" sz="1300" b="1" dirty="0">
-                <a:solidFill>
-                  <a:srgbClr val="4C1D95"/>
-                </a:solidFill>
-                <a:latin typeface="Trebuchet MS" pitchFamily="34" charset="0"/>
-                <a:ea typeface="Trebuchet MS" pitchFamily="34" charset="-122"/>
-                <a:cs typeface="Trebuchet MS" pitchFamily="34" charset="-120"/>
-              </a:rPr>
-              <a:t>up-</a:t>
-            </a:r>
-            <a:endParaRPr lang="en-US" sz="1300" dirty="0"/>
-          </a:p>
-        </p:txBody>
-      </p:sp>
-      <p:sp>
-        <p:nvSpPr>
-          <p:cNvPr id="40" name="Shape 38"/>
-          <p:cNvSpPr/>
-          <p:nvPr/>
-        </p:nvSpPr>
-        <p:spPr>
-          <a:xfrm>
-            <a:off x="3291840" y="3584448"/>
-            <a:ext cx="1645920" cy="420624"/>
-          </a:xfrm>
-          <a:prstGeom prst="rect">
-            <a:avLst/>
-          </a:prstGeom>
-          <a:solidFill>
-            <a:srgbClr val="F8FAFC"/>
-          </a:solidFill>
-          <a:ln w="12700">
-            <a:solidFill>
-              <a:srgbClr val="E5E7EB"/>
-            </a:solidFill>
-            <a:prstDash val="solid"/>
-          </a:ln>
-        </p:spPr>
-      </p:sp>
-      <p:sp>
-        <p:nvSpPr>
-          <p:cNvPr id="41" name="Shape 39"/>
-          <p:cNvSpPr/>
-          <p:nvPr/>
-        </p:nvSpPr>
-        <p:spPr>
-          <a:xfrm>
-            <a:off x="5943600" y="3584448"/>
-            <a:ext cx="1463040" cy="420624"/>
-          </a:xfrm>
-          <a:prstGeom prst="rect">
-            <a:avLst/>
-          </a:prstGeom>
-          <a:solidFill>
-            <a:srgbClr val="FCE7F3"/>
-          </a:solidFill>
-          <a:ln w="12700">
-            <a:solidFill>
-              <a:srgbClr val="E5E7EB"/>
-            </a:solidFill>
-            <a:prstDash val="solid"/>
-          </a:ln>
-        </p:spPr>
-      </p:sp>
-      <p:sp>
-        <p:nvSpPr>
-          <p:cNvPr id="42" name="Text 40"/>
-          <p:cNvSpPr/>
-          <p:nvPr/>
-        </p:nvSpPr>
-        <p:spPr>
-          <a:xfrm>
-            <a:off x="5943600" y="3584448"/>
-            <a:ext cx="1463040" cy="420624"/>
-          </a:xfrm>
-          <a:prstGeom prst="rect">
-            <a:avLst/>
-          </a:prstGeom>
-          <a:noFill/>
-          <a:ln/>
-        </p:spPr>
-        <p:txBody>
-          <a:bodyPr wrap="square" lIns="0" tIns="0" rIns="0" bIns="0" rtlCol="0" anchor="ctr"/>
-          <a:lstStyle/>
-          <a:p>
-            <a:pPr algn="ctr" indent="0" marL="0">
-              <a:buNone/>
-            </a:pPr>
-            <a:r>
-              <a:rPr lang="en-US" sz="1300" b="1" dirty="0">
-                <a:solidFill>
-                  <a:srgbClr val="9D174D"/>
-                </a:solidFill>
-                <a:latin typeface="Trebuchet MS" pitchFamily="34" charset="0"/>
-                <a:ea typeface="Trebuchet MS" pitchFamily="34" charset="-122"/>
-                <a:cs typeface="Trebuchet MS" pitchFamily="34" charset="-120"/>
-              </a:rPr>
-              <a:t>-s</a:t>
-            </a:r>
-            <a:endParaRPr lang="en-US" sz="1300" dirty="0"/>
-          </a:p>
-        </p:txBody>
-      </p:sp>
-      <p:sp>
-        <p:nvSpPr>
-          <p:cNvPr id="43" name="Text 41"/>
-          <p:cNvSpPr/>
-          <p:nvPr/>
-        </p:nvSpPr>
-        <p:spPr>
-          <a:xfrm>
-            <a:off x="365760" y="4178808"/>
+            <a:off x="365760" y="3721608"/>
             <a:ext cx="1097280" cy="420624"/>
           </a:xfrm>
           <a:prstGeom prst="rect">
@@ -38454,14 +36694,14 @@
       </p:sp>
       <p:sp>
         <p:nvSpPr>
-          <p:cNvPr id="44" name="Shape 42"/>
-          <p:cNvSpPr/>
-          <p:nvPr/>
-        </p:nvSpPr>
-        <p:spPr>
-          <a:xfrm>
-            <a:off x="1508760" y="4178808"/>
-            <a:ext cx="950976" cy="420624"/>
+          <p:cNvPr id="35" name="Shape 33"/>
+          <p:cNvSpPr/>
+          <p:nvPr/>
+        </p:nvSpPr>
+        <p:spPr>
+          <a:xfrm>
+            <a:off x="1508760" y="3721608"/>
+            <a:ext cx="1243584" cy="420624"/>
           </a:xfrm>
           <a:prstGeom prst="rect">
             <a:avLst>
@@ -38469,11 +36709,11 @@
             </a:avLst>
           </a:prstGeom>
           <a:solidFill>
-            <a:srgbClr val="DDD6FE"/>
+            <a:srgbClr val="CCFBF1"/>
           </a:solidFill>
           <a:ln w="19050">
             <a:solidFill>
-              <a:srgbClr val="7C3AED"/>
+              <a:srgbClr val="0D9488"/>
             </a:solidFill>
             <a:prstDash val="solid"/>
           </a:ln>
@@ -38488,14 +36728,14 @@
       </p:sp>
       <p:sp>
         <p:nvSpPr>
-          <p:cNvPr id="45" name="Text 43"/>
-          <p:cNvSpPr/>
-          <p:nvPr/>
-        </p:nvSpPr>
-        <p:spPr>
-          <a:xfrm>
-            <a:off x="1508760" y="4178808"/>
-            <a:ext cx="950976" cy="420624"/>
+          <p:cNvPr id="36" name="Text 34"/>
+          <p:cNvSpPr/>
+          <p:nvPr/>
+        </p:nvSpPr>
+        <p:spPr>
+          <a:xfrm>
+            <a:off x="1508760" y="3721608"/>
+            <a:ext cx="1243584" cy="420624"/>
           </a:xfrm>
           <a:prstGeom prst="rect">
             <a:avLst/>
@@ -38513,13 +36753,13 @@
             <a:r>
               <a:rPr lang="en-US" sz="1300" b="1" dirty="0">
                 <a:solidFill>
-                  <a:srgbClr val="4C1D95"/>
+                  <a:srgbClr val="0F766E"/>
                 </a:solidFill>
                 <a:latin typeface="Trebuchet MS" pitchFamily="34" charset="0"/>
                 <a:ea typeface="Trebuchet MS" pitchFamily="34" charset="-122"/>
                 <a:cs typeface="Trebuchet MS" pitchFamily="34" charset="-120"/>
               </a:rPr>
-              <a:t>air-</a:t>
+              <a:t>'lift'</a:t>
             </a:r>
             <a:endParaRPr lang="en-US" sz="1300" dirty="0"/>
           </a:p>
@@ -38527,13 +36767,13 @@
       </p:sp>
       <p:sp>
         <p:nvSpPr>
-          <p:cNvPr id="46" name="Text 44"/>
-          <p:cNvSpPr/>
-          <p:nvPr/>
-        </p:nvSpPr>
-        <p:spPr>
-          <a:xfrm>
-            <a:off x="2487168" y="4178808"/>
+          <p:cNvPr id="37" name="Text 35"/>
+          <p:cNvSpPr/>
+          <p:nvPr/>
+        </p:nvSpPr>
+        <p:spPr>
+          <a:xfrm>
+            <a:off x="2779776" y="3721608"/>
             <a:ext cx="320040" cy="420624"/>
           </a:xfrm>
           <a:prstGeom prst="rect">
@@ -38566,14 +36806,14 @@
       </p:sp>
       <p:sp>
         <p:nvSpPr>
-          <p:cNvPr id="47" name="Shape 45"/>
-          <p:cNvSpPr/>
-          <p:nvPr/>
-        </p:nvSpPr>
-        <p:spPr>
-          <a:xfrm>
-            <a:off x="2834640" y="4178808"/>
-            <a:ext cx="1243584" cy="420624"/>
+          <p:cNvPr id="38" name="Shape 36"/>
+          <p:cNvSpPr/>
+          <p:nvPr/>
+        </p:nvSpPr>
+        <p:spPr>
+          <a:xfrm>
+            <a:off x="3127248" y="3721608"/>
+            <a:ext cx="822960" cy="420624"/>
           </a:xfrm>
           <a:prstGeom prst="rect">
             <a:avLst>
@@ -38581,11 +36821,11 @@
             </a:avLst>
           </a:prstGeom>
           <a:solidFill>
-            <a:srgbClr val="CCFBF1"/>
+            <a:srgbClr val="FCE7F3"/>
           </a:solidFill>
           <a:ln w="19050">
             <a:solidFill>
-              <a:srgbClr val="0D9488"/>
+              <a:srgbClr val="DB2777"/>
             </a:solidFill>
             <a:prstDash val="solid"/>
           </a:ln>
@@ -38600,14 +36840,14 @@
       </p:sp>
       <p:sp>
         <p:nvSpPr>
-          <p:cNvPr id="48" name="Text 46"/>
-          <p:cNvSpPr/>
-          <p:nvPr/>
-        </p:nvSpPr>
-        <p:spPr>
-          <a:xfrm>
-            <a:off x="2834640" y="4178808"/>
-            <a:ext cx="1243584" cy="420624"/>
+          <p:cNvPr id="39" name="Text 37"/>
+          <p:cNvSpPr/>
+          <p:nvPr/>
+        </p:nvSpPr>
+        <p:spPr>
+          <a:xfrm>
+            <a:off x="3127248" y="3721608"/>
+            <a:ext cx="822960" cy="420624"/>
           </a:xfrm>
           <a:prstGeom prst="rect">
             <a:avLst/>
@@ -38625,13 +36865,13 @@
             <a:r>
               <a:rPr lang="en-US" sz="1300" b="1" dirty="0">
                 <a:solidFill>
-                  <a:srgbClr val="0F766E"/>
+                  <a:srgbClr val="9D174D"/>
                 </a:solidFill>
                 <a:latin typeface="Trebuchet MS" pitchFamily="34" charset="0"/>
                 <a:ea typeface="Trebuchet MS" pitchFamily="34" charset="-122"/>
                 <a:cs typeface="Trebuchet MS" pitchFamily="34" charset="-120"/>
               </a:rPr>
-              <a:t>'lift'</a:t>
+              <a:t>-ed</a:t>
             </a:r>
             <a:endParaRPr lang="en-US" sz="1300" dirty="0"/>
           </a:p>
@@ -38639,14 +36879,14 @@
       </p:sp>
       <p:sp>
         <p:nvSpPr>
-          <p:cNvPr id="49" name="Text 47"/>
-          <p:cNvSpPr/>
-          <p:nvPr/>
-        </p:nvSpPr>
-        <p:spPr>
-          <a:xfrm>
-            <a:off x="4105656" y="4178808"/>
-            <a:ext cx="320040" cy="420624"/>
+          <p:cNvPr id="40" name="Text 38"/>
+          <p:cNvSpPr/>
+          <p:nvPr/>
+        </p:nvSpPr>
+        <p:spPr>
+          <a:xfrm>
+            <a:off x="4023360" y="3721608"/>
+            <a:ext cx="365760" cy="420624"/>
           </a:xfrm>
           <a:prstGeom prst="rect">
             <a:avLst/>
@@ -38662,30 +36902,30 @@
               <a:buNone/>
             </a:pPr>
             <a:r>
-              <a:rPr lang="en-US" sz="1400" dirty="0">
-                <a:solidFill>
-                  <a:srgbClr val="475569"/>
+              <a:rPr lang="en-US" sz="1800" b="1" dirty="0">
+                <a:solidFill>
+                  <a:srgbClr val="0D9488"/>
                 </a:solidFill>
                 <a:latin typeface="Trebuchet MS" pitchFamily="34" charset="0"/>
                 <a:ea typeface="Trebuchet MS" pitchFamily="34" charset="-122"/>
                 <a:cs typeface="Trebuchet MS" pitchFamily="34" charset="-120"/>
               </a:rPr>
-              <a:t>+</a:t>
-            </a:r>
-            <a:endParaRPr lang="en-US" sz="1400" dirty="0"/>
-          </a:p>
-        </p:txBody>
-      </p:sp>
-      <p:sp>
-        <p:nvSpPr>
-          <p:cNvPr id="50" name="Shape 48"/>
-          <p:cNvSpPr/>
-          <p:nvPr/>
-        </p:nvSpPr>
-        <p:spPr>
-          <a:xfrm>
-            <a:off x="4453128" y="4178808"/>
-            <a:ext cx="822960" cy="420624"/>
+              <a:t>=</a:t>
+            </a:r>
+            <a:endParaRPr lang="en-US" sz="1800" dirty="0"/>
+          </a:p>
+        </p:txBody>
+      </p:sp>
+      <p:sp>
+        <p:nvSpPr>
+          <p:cNvPr id="41" name="Shape 39"/>
+          <p:cNvSpPr/>
+          <p:nvPr/>
+        </p:nvSpPr>
+        <p:spPr>
+          <a:xfrm>
+            <a:off x="4434840" y="3721608"/>
+            <a:ext cx="2194560" cy="420624"/>
           </a:xfrm>
           <a:prstGeom prst="rect">
             <a:avLst>
@@ -38693,33 +36933,26 @@
             </a:avLst>
           </a:prstGeom>
           <a:solidFill>
-            <a:srgbClr val="FCE7F3"/>
-          </a:solidFill>
-          <a:ln w="19050">
-            <a:solidFill>
-              <a:srgbClr val="DB2777"/>
-            </a:solidFill>
-            <a:prstDash val="solid"/>
-          </a:ln>
-          <a:effectLst>
-            <a:outerShdw sx="100000" sy="100000" kx="0" ky="0" algn="bl" rotWithShape="0" blurRad="101600" dist="38100" dir="8100000">
-              <a:srgbClr val="000000">
-                <a:alpha val="12000"/>
-              </a:srgbClr>
-            </a:outerShdw>
-          </a:effectLst>
-        </p:spPr>
-      </p:sp>
-      <p:sp>
-        <p:nvSpPr>
-          <p:cNvPr id="51" name="Text 49"/>
-          <p:cNvSpPr/>
-          <p:nvPr/>
-        </p:nvSpPr>
-        <p:spPr>
-          <a:xfrm>
-            <a:off x="4453128" y="4178808"/>
-            <a:ext cx="822960" cy="420624"/>
+            <a:srgbClr val="0D9488"/>
+          </a:solidFill>
+          <a:ln w="12700">
+            <a:solidFill>
+              <a:srgbClr val="0D9488"/>
+            </a:solidFill>
+            <a:prstDash val="solid"/>
+          </a:ln>
+        </p:spPr>
+      </p:sp>
+      <p:sp>
+        <p:nvSpPr>
+          <p:cNvPr id="42" name="Text 40"/>
+          <p:cNvSpPr/>
+          <p:nvPr/>
+        </p:nvSpPr>
+        <p:spPr>
+          <a:xfrm>
+            <a:off x="4434840" y="3721608"/>
+            <a:ext cx="2194560" cy="420624"/>
           </a:xfrm>
           <a:prstGeom prst="rect">
             <a:avLst/>
@@ -38735,120 +36968,15 @@
               <a:buNone/>
             </a:pPr>
             <a:r>
-              <a:rPr lang="en-US" sz="1300" b="1" dirty="0">
-                <a:solidFill>
-                  <a:srgbClr val="9D174D"/>
+              <a:rPr lang="en-US" sz="1400" b="1" dirty="0">
+                <a:solidFill>
+                  <a:srgbClr val="FFFFFF"/>
                 </a:solidFill>
                 <a:latin typeface="Trebuchet MS" pitchFamily="34" charset="0"/>
                 <a:ea typeface="Trebuchet MS" pitchFamily="34" charset="-122"/>
                 <a:cs typeface="Trebuchet MS" pitchFamily="34" charset="-120"/>
               </a:rPr>
-              <a:t>-ed</a:t>
-            </a:r>
-            <a:endParaRPr lang="en-US" sz="1300" dirty="0"/>
-          </a:p>
-        </p:txBody>
-      </p:sp>
-      <p:sp>
-        <p:nvSpPr>
-          <p:cNvPr id="52" name="Text 50"/>
-          <p:cNvSpPr/>
-          <p:nvPr/>
-        </p:nvSpPr>
-        <p:spPr>
-          <a:xfrm>
-            <a:off x="5349240" y="4178808"/>
-            <a:ext cx="365760" cy="420624"/>
-          </a:xfrm>
-          <a:prstGeom prst="rect">
-            <a:avLst/>
-          </a:prstGeom>
-          <a:noFill/>
-          <a:ln/>
-        </p:spPr>
-        <p:txBody>
-          <a:bodyPr wrap="square" lIns="0" tIns="0" rIns="0" bIns="0" rtlCol="0" anchor="ctr"/>
-          <a:lstStyle/>
-          <a:p>
-            <a:pPr algn="ctr" indent="0" marL="0">
-              <a:buNone/>
-            </a:pPr>
-            <a:r>
-              <a:rPr lang="en-US" sz="1800" b="1" dirty="0">
-                <a:solidFill>
-                  <a:srgbClr val="0D9488"/>
-                </a:solidFill>
-                <a:latin typeface="Trebuchet MS" pitchFamily="34" charset="0"/>
-                <a:ea typeface="Trebuchet MS" pitchFamily="34" charset="-122"/>
-                <a:cs typeface="Trebuchet MS" pitchFamily="34" charset="-120"/>
-              </a:rPr>
-              <a:t>=</a:t>
-            </a:r>
-            <a:endParaRPr lang="en-US" sz="1800" dirty="0"/>
-          </a:p>
-        </p:txBody>
-      </p:sp>
-      <p:sp>
-        <p:nvSpPr>
-          <p:cNvPr id="53" name="Shape 51"/>
-          <p:cNvSpPr/>
-          <p:nvPr/>
-        </p:nvSpPr>
-        <p:spPr>
-          <a:xfrm>
-            <a:off x="5760720" y="4178808"/>
-            <a:ext cx="2194560" cy="420624"/>
-          </a:xfrm>
-          <a:prstGeom prst="rect">
-            <a:avLst>
-              <a:gd name="adj" fmla="val 17391"/>
-            </a:avLst>
-          </a:prstGeom>
-          <a:solidFill>
-            <a:srgbClr val="0D9488"/>
-          </a:solidFill>
-          <a:ln w="12700">
-            <a:solidFill>
-              <a:srgbClr val="0D9488"/>
-            </a:solidFill>
-            <a:prstDash val="solid"/>
-          </a:ln>
-        </p:spPr>
-      </p:sp>
-      <p:sp>
-        <p:nvSpPr>
-          <p:cNvPr id="54" name="Text 52"/>
-          <p:cNvSpPr/>
-          <p:nvPr/>
-        </p:nvSpPr>
-        <p:spPr>
-          <a:xfrm>
-            <a:off x="5760720" y="4178808"/>
-            <a:ext cx="2194560" cy="420624"/>
-          </a:xfrm>
-          <a:prstGeom prst="rect">
-            <a:avLst/>
-          </a:prstGeom>
-          <a:noFill/>
-          <a:ln/>
-        </p:spPr>
-        <p:txBody>
-          <a:bodyPr wrap="square" lIns="0" tIns="0" rIns="0" bIns="0" rtlCol="0" anchor="ctr"/>
-          <a:lstStyle/>
-          <a:p>
-            <a:pPr algn="ctr" indent="0" marL="0">
-              <a:buNone/>
-            </a:pPr>
-            <a:r>
-              <a:rPr lang="en-US" sz="1400" b="1" dirty="0">
-                <a:solidFill>
-                  <a:srgbClr val="FFFFFF"/>
-                </a:solidFill>
-                <a:latin typeface="Trebuchet MS" pitchFamily="34" charset="0"/>
-                <a:ea typeface="Trebuchet MS" pitchFamily="34" charset="-122"/>
-                <a:cs typeface="Trebuchet MS" pitchFamily="34" charset="-120"/>
-              </a:rPr>
-              <a:t>lifted</a:t>
+              <a:t>lift</a:t>
             </a:r>
             <a:endParaRPr lang="en-US" sz="1400" dirty="0"/>
           </a:p>
@@ -39140,7 +37268,7 @@
                 <a:ea typeface="Calibri" pitchFamily="34" charset="-122"/>
                 <a:cs typeface="Calibri" pitchFamily="34" charset="-120"/>
               </a:rPr>
-              <a:t>Word Labs  •  wordlabs.app  •  Root: 'lift' = to raise or elevate</a:t>
+              <a:t>Word Labs  •  wordlabs.app  •  Root: 'lift' = to raise; to pick up</a:t>
             </a:r>
             <a:endParaRPr lang="en-US" sz="800" dirty="0"/>
           </a:p>
@@ -39252,7 +37380,7 @@
                 <a:ea typeface="Trebuchet MS" pitchFamily="34" charset="-122"/>
                 <a:cs typeface="Trebuchet MS" pitchFamily="34" charset="-120"/>
               </a:rPr>
-              <a:t>lifted</a:t>
+              <a:t>lift</a:t>
             </a:r>
             <a:endParaRPr lang="en-US" sz="1200" dirty="0"/>
           </a:p>
@@ -39318,841 +37446,7 @@
                 <a:ea typeface="Calibri" pitchFamily="34" charset="-122"/>
                 <a:cs typeface="Calibri" pitchFamily="34" charset="-120"/>
               </a:rPr>
-              <a:t>Picked something up and moved it higher.</a:t>
-            </a:r>
-            <a:endParaRPr lang="en-US" sz="1200" dirty="0"/>
-          </a:p>
-        </p:txBody>
-      </p:sp>
-      <p:sp>
-        <p:nvSpPr>
-          <p:cNvPr id="15" name="Shape 13"/>
-          <p:cNvSpPr/>
-          <p:nvPr/>
-        </p:nvSpPr>
-        <p:spPr>
-          <a:xfrm>
-            <a:off x="365760" y="1719072"/>
-            <a:ext cx="2011680" cy="457200"/>
-          </a:xfrm>
-          <a:prstGeom prst="rect">
-            <a:avLst>
-              <a:gd name="adj" fmla="val 12000"/>
-            </a:avLst>
-          </a:prstGeom>
-          <a:solidFill>
-            <a:srgbClr val="EEF2FF"/>
-          </a:solidFill>
-          <a:ln w="12700">
-            <a:solidFill>
-              <a:srgbClr val="6366F1"/>
-            </a:solidFill>
-            <a:prstDash val="solid"/>
-          </a:ln>
-          <a:effectLst>
-            <a:outerShdw sx="100000" sy="100000" kx="0" ky="0" algn="bl" rotWithShape="0" blurRad="101600" dist="38100" dir="8100000">
-              <a:srgbClr val="000000">
-                <a:alpha val="12000"/>
-              </a:srgbClr>
-            </a:outerShdw>
-          </a:effectLst>
-        </p:spPr>
-      </p:sp>
-      <p:sp>
-        <p:nvSpPr>
-          <p:cNvPr id="16" name="Text 14"/>
-          <p:cNvSpPr/>
-          <p:nvPr/>
-        </p:nvSpPr>
-        <p:spPr>
-          <a:xfrm>
-            <a:off x="365760" y="1719072"/>
-            <a:ext cx="2011680" cy="457200"/>
-          </a:xfrm>
-          <a:prstGeom prst="rect">
-            <a:avLst/>
-          </a:prstGeom>
-          <a:noFill/>
-          <a:ln/>
-        </p:spPr>
-        <p:txBody>
-          <a:bodyPr wrap="square" lIns="0" tIns="0" rIns="0" bIns="0" rtlCol="0" anchor="ctr"/>
-          <a:lstStyle/>
-          <a:p>
-            <a:pPr algn="ctr" indent="0" marL="0">
-              <a:buNone/>
-            </a:pPr>
-            <a:r>
-              <a:rPr lang="en-US" sz="1200" b="1" dirty="0">
-                <a:solidFill>
-                  <a:srgbClr val="4338CA"/>
-                </a:solidFill>
-                <a:latin typeface="Trebuchet MS" pitchFamily="34" charset="0"/>
-                <a:ea typeface="Trebuchet MS" pitchFamily="34" charset="-122"/>
-                <a:cs typeface="Trebuchet MS" pitchFamily="34" charset="-120"/>
-              </a:rPr>
-              <a:t>lifting</a:t>
-            </a:r>
-            <a:endParaRPr lang="en-US" sz="1200" dirty="0"/>
-          </a:p>
-        </p:txBody>
-      </p:sp>
-      <p:sp>
-        <p:nvSpPr>
-          <p:cNvPr id="17" name="Shape 15"/>
-          <p:cNvSpPr/>
-          <p:nvPr/>
-        </p:nvSpPr>
-        <p:spPr>
-          <a:xfrm>
-            <a:off x="2514600" y="1719072"/>
-            <a:ext cx="6263640" cy="457200"/>
-          </a:xfrm>
-          <a:prstGeom prst="rect">
-            <a:avLst>
-              <a:gd name="adj" fmla="val 12000"/>
-            </a:avLst>
-          </a:prstGeom>
-          <a:solidFill>
-            <a:srgbClr val="F8FAFC"/>
-          </a:solidFill>
-          <a:ln w="12700">
-            <a:solidFill>
-              <a:srgbClr val="E2E8F0"/>
-            </a:solidFill>
-            <a:prstDash val="solid"/>
-          </a:ln>
-        </p:spPr>
-      </p:sp>
-      <p:sp>
-        <p:nvSpPr>
-          <p:cNvPr id="18" name="Text 16"/>
-          <p:cNvSpPr/>
-          <p:nvPr/>
-        </p:nvSpPr>
-        <p:spPr>
-          <a:xfrm>
-            <a:off x="2651760" y="1719072"/>
-            <a:ext cx="6035040" cy="457200"/>
-          </a:xfrm>
-          <a:prstGeom prst="rect">
-            <a:avLst/>
-          </a:prstGeom>
-          <a:noFill/>
-          <a:ln/>
-        </p:spPr>
-        <p:txBody>
-          <a:bodyPr wrap="square" rtlCol="0" anchor="ctr"/>
-          <a:lstStyle/>
-          <a:p>
-            <a:pPr algn="l" indent="0" marL="0">
-              <a:buNone/>
-            </a:pPr>
-            <a:r>
-              <a:rPr lang="en-US" sz="1200" dirty="0">
-                <a:solidFill>
-                  <a:srgbClr val="0F172A"/>
-                </a:solidFill>
-                <a:latin typeface="Calibri" pitchFamily="34" charset="0"/>
-                <a:ea typeface="Calibri" pitchFamily="34" charset="-122"/>
-                <a:cs typeface="Calibri" pitchFamily="34" charset="-120"/>
-              </a:rPr>
-              <a:t>A machine with two metal prongs at the front used to lift heavy loads in warehouses.</a:t>
-            </a:r>
-            <a:endParaRPr lang="en-US" sz="1200" dirty="0"/>
-          </a:p>
-        </p:txBody>
-      </p:sp>
-      <p:sp>
-        <p:nvSpPr>
-          <p:cNvPr id="19" name="Shape 17"/>
-          <p:cNvSpPr/>
-          <p:nvPr/>
-        </p:nvSpPr>
-        <p:spPr>
-          <a:xfrm>
-            <a:off x="365760" y="2249424"/>
-            <a:ext cx="2011680" cy="457200"/>
-          </a:xfrm>
-          <a:prstGeom prst="rect">
-            <a:avLst>
-              <a:gd name="adj" fmla="val 12000"/>
-            </a:avLst>
-          </a:prstGeom>
-          <a:solidFill>
-            <a:srgbClr val="EEF2FF"/>
-          </a:solidFill>
-          <a:ln w="12700">
-            <a:solidFill>
-              <a:srgbClr val="6366F1"/>
-            </a:solidFill>
-            <a:prstDash val="solid"/>
-          </a:ln>
-          <a:effectLst>
-            <a:outerShdw sx="100000" sy="100000" kx="0" ky="0" algn="bl" rotWithShape="0" blurRad="101600" dist="38100" dir="8100000">
-              <a:srgbClr val="000000">
-                <a:alpha val="12000"/>
-              </a:srgbClr>
-            </a:outerShdw>
-          </a:effectLst>
-        </p:spPr>
-      </p:sp>
-      <p:sp>
-        <p:nvSpPr>
-          <p:cNvPr id="20" name="Text 18"/>
-          <p:cNvSpPr/>
-          <p:nvPr/>
-        </p:nvSpPr>
-        <p:spPr>
-          <a:xfrm>
-            <a:off x="365760" y="2249424"/>
-            <a:ext cx="2011680" cy="457200"/>
-          </a:xfrm>
-          <a:prstGeom prst="rect">
-            <a:avLst/>
-          </a:prstGeom>
-          <a:noFill/>
-          <a:ln/>
-        </p:spPr>
-        <p:txBody>
-          <a:bodyPr wrap="square" lIns="0" tIns="0" rIns="0" bIns="0" rtlCol="0" anchor="ctr"/>
-          <a:lstStyle/>
-          <a:p>
-            <a:pPr algn="ctr" indent="0" marL="0">
-              <a:buNone/>
-            </a:pPr>
-            <a:r>
-              <a:rPr lang="en-US" sz="1200" b="1" dirty="0">
-                <a:solidFill>
-                  <a:srgbClr val="4338CA"/>
-                </a:solidFill>
-                <a:latin typeface="Trebuchet MS" pitchFamily="34" charset="0"/>
-                <a:ea typeface="Trebuchet MS" pitchFamily="34" charset="-122"/>
-                <a:cs typeface="Trebuchet MS" pitchFamily="34" charset="-120"/>
-              </a:rPr>
-              <a:t>lifter</a:t>
-            </a:r>
-            <a:endParaRPr lang="en-US" sz="1200" dirty="0"/>
-          </a:p>
-        </p:txBody>
-      </p:sp>
-      <p:sp>
-        <p:nvSpPr>
-          <p:cNvPr id="21" name="Shape 19"/>
-          <p:cNvSpPr/>
-          <p:nvPr/>
-        </p:nvSpPr>
-        <p:spPr>
-          <a:xfrm>
-            <a:off x="2514600" y="2249424"/>
-            <a:ext cx="6263640" cy="457200"/>
-          </a:xfrm>
-          <a:prstGeom prst="rect">
-            <a:avLst>
-              <a:gd name="adj" fmla="val 12000"/>
-            </a:avLst>
-          </a:prstGeom>
-          <a:solidFill>
-            <a:srgbClr val="F8FAFC"/>
-          </a:solidFill>
-          <a:ln w="12700">
-            <a:solidFill>
-              <a:srgbClr val="E2E8F0"/>
-            </a:solidFill>
-            <a:prstDash val="solid"/>
-          </a:ln>
-        </p:spPr>
-      </p:sp>
-      <p:sp>
-        <p:nvSpPr>
-          <p:cNvPr id="22" name="Text 20"/>
-          <p:cNvSpPr/>
-          <p:nvPr/>
-        </p:nvSpPr>
-        <p:spPr>
-          <a:xfrm>
-            <a:off x="2651760" y="2249424"/>
-            <a:ext cx="6035040" cy="457200"/>
-          </a:xfrm>
-          <a:prstGeom prst="rect">
-            <a:avLst/>
-          </a:prstGeom>
-          <a:noFill/>
-          <a:ln/>
-        </p:spPr>
-        <p:txBody>
-          <a:bodyPr wrap="square" rtlCol="0" anchor="ctr"/>
-          <a:lstStyle/>
-          <a:p>
-            <a:pPr algn="l" indent="0" marL="0">
-              <a:buNone/>
-            </a:pPr>
-            <a:r>
-              <a:rPr lang="en-US" sz="1200" dirty="0">
-                <a:solidFill>
-                  <a:srgbClr val="0F172A"/>
-                </a:solidFill>
-                <a:latin typeface="Calibri" pitchFamily="34" charset="0"/>
-                <a:ea typeface="Calibri" pitchFamily="34" charset="-122"/>
-                <a:cs typeface="Calibri" pitchFamily="34" charset="-120"/>
-              </a:rPr>
-              <a:t>A person or machine that lifts heavy things.</a:t>
-            </a:r>
-            <a:endParaRPr lang="en-US" sz="1200" dirty="0"/>
-          </a:p>
-        </p:txBody>
-      </p:sp>
-      <p:sp>
-        <p:nvSpPr>
-          <p:cNvPr id="23" name="Shape 21"/>
-          <p:cNvSpPr/>
-          <p:nvPr/>
-        </p:nvSpPr>
-        <p:spPr>
-          <a:xfrm>
-            <a:off x="365760" y="2779776"/>
-            <a:ext cx="2011680" cy="457200"/>
-          </a:xfrm>
-          <a:prstGeom prst="rect">
-            <a:avLst>
-              <a:gd name="adj" fmla="val 12000"/>
-            </a:avLst>
-          </a:prstGeom>
-          <a:solidFill>
-            <a:srgbClr val="EEF2FF"/>
-          </a:solidFill>
-          <a:ln w="12700">
-            <a:solidFill>
-              <a:srgbClr val="6366F1"/>
-            </a:solidFill>
-            <a:prstDash val="solid"/>
-          </a:ln>
-          <a:effectLst>
-            <a:outerShdw sx="100000" sy="100000" kx="0" ky="0" algn="bl" rotWithShape="0" blurRad="101600" dist="38100" dir="8100000">
-              <a:srgbClr val="000000">
-                <a:alpha val="12000"/>
-              </a:srgbClr>
-            </a:outerShdw>
-          </a:effectLst>
-        </p:spPr>
-      </p:sp>
-      <p:sp>
-        <p:nvSpPr>
-          <p:cNvPr id="24" name="Text 22"/>
-          <p:cNvSpPr/>
-          <p:nvPr/>
-        </p:nvSpPr>
-        <p:spPr>
-          <a:xfrm>
-            <a:off x="365760" y="2779776"/>
-            <a:ext cx="2011680" cy="457200"/>
-          </a:xfrm>
-          <a:prstGeom prst="rect">
-            <a:avLst/>
-          </a:prstGeom>
-          <a:noFill/>
-          <a:ln/>
-        </p:spPr>
-        <p:txBody>
-          <a:bodyPr wrap="square" lIns="0" tIns="0" rIns="0" bIns="0" rtlCol="0" anchor="ctr"/>
-          <a:lstStyle/>
-          <a:p>
-            <a:pPr algn="ctr" indent="0" marL="0">
-              <a:buNone/>
-            </a:pPr>
-            <a:r>
-              <a:rPr lang="en-US" sz="1200" b="1" dirty="0">
-                <a:solidFill>
-                  <a:srgbClr val="4338CA"/>
-                </a:solidFill>
-                <a:latin typeface="Trebuchet MS" pitchFamily="34" charset="0"/>
-                <a:ea typeface="Trebuchet MS" pitchFamily="34" charset="-122"/>
-                <a:cs typeface="Trebuchet MS" pitchFamily="34" charset="-120"/>
-              </a:rPr>
-              <a:t>airlift</a:t>
-            </a:r>
-            <a:endParaRPr lang="en-US" sz="1200" dirty="0"/>
-          </a:p>
-        </p:txBody>
-      </p:sp>
-      <p:sp>
-        <p:nvSpPr>
-          <p:cNvPr id="25" name="Shape 23"/>
-          <p:cNvSpPr/>
-          <p:nvPr/>
-        </p:nvSpPr>
-        <p:spPr>
-          <a:xfrm>
-            <a:off x="2514600" y="2779776"/>
-            <a:ext cx="6263640" cy="457200"/>
-          </a:xfrm>
-          <a:prstGeom prst="rect">
-            <a:avLst>
-              <a:gd name="adj" fmla="val 12000"/>
-            </a:avLst>
-          </a:prstGeom>
-          <a:solidFill>
-            <a:srgbClr val="F8FAFC"/>
-          </a:solidFill>
-          <a:ln w="12700">
-            <a:solidFill>
-              <a:srgbClr val="E2E8F0"/>
-            </a:solidFill>
-            <a:prstDash val="solid"/>
-          </a:ln>
-        </p:spPr>
-      </p:sp>
-      <p:sp>
-        <p:nvSpPr>
-          <p:cNvPr id="26" name="Text 24"/>
-          <p:cNvSpPr/>
-          <p:nvPr/>
-        </p:nvSpPr>
-        <p:spPr>
-          <a:xfrm>
-            <a:off x="2651760" y="2779776"/>
-            <a:ext cx="6035040" cy="457200"/>
-          </a:xfrm>
-          <a:prstGeom prst="rect">
-            <a:avLst/>
-          </a:prstGeom>
-          <a:noFill/>
-          <a:ln/>
-        </p:spPr>
-        <p:txBody>
-          <a:bodyPr wrap="square" rtlCol="0" anchor="ctr"/>
-          <a:lstStyle/>
-          <a:p>
-            <a:pPr algn="l" indent="0" marL="0">
-              <a:buNone/>
-            </a:pPr>
-            <a:r>
-              <a:rPr lang="en-US" sz="1200" dirty="0">
-                <a:solidFill>
-                  <a:srgbClr val="0F172A"/>
-                </a:solidFill>
-                <a:latin typeface="Calibri" pitchFamily="34" charset="0"/>
-                <a:ea typeface="Calibri" pitchFamily="34" charset="-122"/>
-                <a:cs typeface="Calibri" pitchFamily="34" charset="-120"/>
-              </a:rPr>
-              <a:t>An improvement to make something look newer or better.</a:t>
-            </a:r>
-            <a:endParaRPr lang="en-US" sz="1200" dirty="0"/>
-          </a:p>
-        </p:txBody>
-      </p:sp>
-      <p:sp>
-        <p:nvSpPr>
-          <p:cNvPr id="27" name="Shape 25"/>
-          <p:cNvSpPr/>
-          <p:nvPr/>
-        </p:nvSpPr>
-        <p:spPr>
-          <a:xfrm>
-            <a:off x="365760" y="3310128"/>
-            <a:ext cx="2011680" cy="457200"/>
-          </a:xfrm>
-          <a:prstGeom prst="rect">
-            <a:avLst>
-              <a:gd name="adj" fmla="val 12000"/>
-            </a:avLst>
-          </a:prstGeom>
-          <a:solidFill>
-            <a:srgbClr val="EEF2FF"/>
-          </a:solidFill>
-          <a:ln w="12700">
-            <a:solidFill>
-              <a:srgbClr val="6366F1"/>
-            </a:solidFill>
-            <a:prstDash val="solid"/>
-          </a:ln>
-          <a:effectLst>
-            <a:outerShdw sx="100000" sy="100000" kx="0" ky="0" algn="bl" rotWithShape="0" blurRad="101600" dist="38100" dir="8100000">
-              <a:srgbClr val="000000">
-                <a:alpha val="12000"/>
-              </a:srgbClr>
-            </a:outerShdw>
-          </a:effectLst>
-        </p:spPr>
-      </p:sp>
-      <p:sp>
-        <p:nvSpPr>
-          <p:cNvPr id="28" name="Text 26"/>
-          <p:cNvSpPr/>
-          <p:nvPr/>
-        </p:nvSpPr>
-        <p:spPr>
-          <a:xfrm>
-            <a:off x="365760" y="3310128"/>
-            <a:ext cx="2011680" cy="457200"/>
-          </a:xfrm>
-          <a:prstGeom prst="rect">
-            <a:avLst/>
-          </a:prstGeom>
-          <a:noFill/>
-          <a:ln/>
-        </p:spPr>
-        <p:txBody>
-          <a:bodyPr wrap="square" lIns="0" tIns="0" rIns="0" bIns="0" rtlCol="0" anchor="ctr"/>
-          <a:lstStyle/>
-          <a:p>
-            <a:pPr algn="ctr" indent="0" marL="0">
-              <a:buNone/>
-            </a:pPr>
-            <a:r>
-              <a:rPr lang="en-US" sz="1200" b="1" dirty="0">
-                <a:solidFill>
-                  <a:srgbClr val="4338CA"/>
-                </a:solidFill>
-                <a:latin typeface="Trebuchet MS" pitchFamily="34" charset="0"/>
-                <a:ea typeface="Trebuchet MS" pitchFamily="34" charset="-122"/>
-                <a:cs typeface="Trebuchet MS" pitchFamily="34" charset="-120"/>
-              </a:rPr>
-              <a:t>facelift</a:t>
-            </a:r>
-            <a:endParaRPr lang="en-US" sz="1200" dirty="0"/>
-          </a:p>
-        </p:txBody>
-      </p:sp>
-      <p:sp>
-        <p:nvSpPr>
-          <p:cNvPr id="29" name="Shape 27"/>
-          <p:cNvSpPr/>
-          <p:nvPr/>
-        </p:nvSpPr>
-        <p:spPr>
-          <a:xfrm>
-            <a:off x="2514600" y="3310128"/>
-            <a:ext cx="6263640" cy="457200"/>
-          </a:xfrm>
-          <a:prstGeom prst="rect">
-            <a:avLst>
-              <a:gd name="adj" fmla="val 12000"/>
-            </a:avLst>
-          </a:prstGeom>
-          <a:solidFill>
-            <a:srgbClr val="F8FAFC"/>
-          </a:solidFill>
-          <a:ln w="12700">
-            <a:solidFill>
-              <a:srgbClr val="E2E8F0"/>
-            </a:solidFill>
-            <a:prstDash val="solid"/>
-          </a:ln>
-        </p:spPr>
-      </p:sp>
-      <p:sp>
-        <p:nvSpPr>
-          <p:cNvPr id="30" name="Text 28"/>
-          <p:cNvSpPr/>
-          <p:nvPr/>
-        </p:nvSpPr>
-        <p:spPr>
-          <a:xfrm>
-            <a:off x="2651760" y="3310128"/>
-            <a:ext cx="6035040" cy="457200"/>
-          </a:xfrm>
-          <a:prstGeom prst="rect">
-            <a:avLst/>
-          </a:prstGeom>
-          <a:noFill/>
-          <a:ln/>
-        </p:spPr>
-        <p:txBody>
-          <a:bodyPr wrap="square" rtlCol="0" anchor="ctr"/>
-          <a:lstStyle/>
-          <a:p>
-            <a:pPr algn="l" indent="0" marL="0">
-              <a:buNone/>
-            </a:pPr>
-            <a:r>
-              <a:rPr lang="en-US" sz="1200" dirty="0">
-                <a:solidFill>
-                  <a:srgbClr val="0F172A"/>
-                </a:solidFill>
-                <a:latin typeface="Calibri" pitchFamily="34" charset="0"/>
-                <a:ea typeface="Calibri" pitchFamily="34" charset="-122"/>
-                <a:cs typeface="Calibri" pitchFamily="34" charset="-120"/>
-              </a:rPr>
-              <a:t>Moving people or supplies by aircraft, especially in an emergency.</a:t>
-            </a:r>
-            <a:endParaRPr lang="en-US" sz="1200" dirty="0"/>
-          </a:p>
-        </p:txBody>
-      </p:sp>
-      <p:sp>
-        <p:nvSpPr>
-          <p:cNvPr id="31" name="Shape 29"/>
-          <p:cNvSpPr/>
-          <p:nvPr/>
-        </p:nvSpPr>
-        <p:spPr>
-          <a:xfrm>
-            <a:off x="365760" y="3840480"/>
-            <a:ext cx="2011680" cy="457200"/>
-          </a:xfrm>
-          <a:prstGeom prst="rect">
-            <a:avLst>
-              <a:gd name="adj" fmla="val 12000"/>
-            </a:avLst>
-          </a:prstGeom>
-          <a:solidFill>
-            <a:srgbClr val="EEF2FF"/>
-          </a:solidFill>
-          <a:ln w="12700">
-            <a:solidFill>
-              <a:srgbClr val="6366F1"/>
-            </a:solidFill>
-            <a:prstDash val="solid"/>
-          </a:ln>
-          <a:effectLst>
-            <a:outerShdw sx="100000" sy="100000" kx="0" ky="0" algn="bl" rotWithShape="0" blurRad="101600" dist="38100" dir="8100000">
-              <a:srgbClr val="000000">
-                <a:alpha val="12000"/>
-              </a:srgbClr>
-            </a:outerShdw>
-          </a:effectLst>
-        </p:spPr>
-      </p:sp>
-      <p:sp>
-        <p:nvSpPr>
-          <p:cNvPr id="32" name="Text 30"/>
-          <p:cNvSpPr/>
-          <p:nvPr/>
-        </p:nvSpPr>
-        <p:spPr>
-          <a:xfrm>
-            <a:off x="365760" y="3840480"/>
-            <a:ext cx="2011680" cy="457200"/>
-          </a:xfrm>
-          <a:prstGeom prst="rect">
-            <a:avLst/>
-          </a:prstGeom>
-          <a:noFill/>
-          <a:ln/>
-        </p:spPr>
-        <p:txBody>
-          <a:bodyPr wrap="square" lIns="0" tIns="0" rIns="0" bIns="0" rtlCol="0" anchor="ctr"/>
-          <a:lstStyle/>
-          <a:p>
-            <a:pPr algn="ctr" indent="0" marL="0">
-              <a:buNone/>
-            </a:pPr>
-            <a:r>
-              <a:rPr lang="en-US" sz="1200" b="1" dirty="0">
-                <a:solidFill>
-                  <a:srgbClr val="4338CA"/>
-                </a:solidFill>
-                <a:latin typeface="Trebuchet MS" pitchFamily="34" charset="0"/>
-                <a:ea typeface="Trebuchet MS" pitchFamily="34" charset="-122"/>
-                <a:cs typeface="Trebuchet MS" pitchFamily="34" charset="-120"/>
-              </a:rPr>
-              <a:t>shoplift</a:t>
-            </a:r>
-            <a:endParaRPr lang="en-US" sz="1200" dirty="0"/>
-          </a:p>
-        </p:txBody>
-      </p:sp>
-      <p:sp>
-        <p:nvSpPr>
-          <p:cNvPr id="33" name="Shape 31"/>
-          <p:cNvSpPr/>
-          <p:nvPr/>
-        </p:nvSpPr>
-        <p:spPr>
-          <a:xfrm>
-            <a:off x="2514600" y="3840480"/>
-            <a:ext cx="6263640" cy="457200"/>
-          </a:xfrm>
-          <a:prstGeom prst="rect">
-            <a:avLst>
-              <a:gd name="adj" fmla="val 12000"/>
-            </a:avLst>
-          </a:prstGeom>
-          <a:solidFill>
-            <a:srgbClr val="F8FAFC"/>
-          </a:solidFill>
-          <a:ln w="12700">
-            <a:solidFill>
-              <a:srgbClr val="E2E8F0"/>
-            </a:solidFill>
-            <a:prstDash val="solid"/>
-          </a:ln>
-        </p:spPr>
-      </p:sp>
-      <p:sp>
-        <p:nvSpPr>
-          <p:cNvPr id="34" name="Text 32"/>
-          <p:cNvSpPr/>
-          <p:nvPr/>
-        </p:nvSpPr>
-        <p:spPr>
-          <a:xfrm>
-            <a:off x="2651760" y="3840480"/>
-            <a:ext cx="6035040" cy="457200"/>
-          </a:xfrm>
-          <a:prstGeom prst="rect">
-            <a:avLst/>
-          </a:prstGeom>
-          <a:noFill/>
-          <a:ln/>
-        </p:spPr>
-        <p:txBody>
-          <a:bodyPr wrap="square" rtlCol="0" anchor="ctr"/>
-          <a:lstStyle/>
-          <a:p>
-            <a:pPr algn="l" indent="0" marL="0">
-              <a:buNone/>
-            </a:pPr>
-            <a:r>
-              <a:rPr lang="en-US" sz="1200" dirty="0">
-                <a:solidFill>
-                  <a:srgbClr val="0F172A"/>
-                </a:solidFill>
-                <a:latin typeface="Calibri" pitchFamily="34" charset="0"/>
-                <a:ea typeface="Calibri" pitchFamily="34" charset="-122"/>
-                <a:cs typeface="Calibri" pitchFamily="34" charset="-120"/>
-              </a:rPr>
-              <a:t>To steal something from a shop by hiding it while pretending to shop.</a:t>
-            </a:r>
-            <a:endParaRPr lang="en-US" sz="1200" dirty="0"/>
-          </a:p>
-        </p:txBody>
-      </p:sp>
-      <p:sp>
-        <p:nvSpPr>
-          <p:cNvPr id="35" name="Shape 33"/>
-          <p:cNvSpPr/>
-          <p:nvPr/>
-        </p:nvSpPr>
-        <p:spPr>
-          <a:xfrm>
-            <a:off x="365760" y="4370832"/>
-            <a:ext cx="2011680" cy="457200"/>
-          </a:xfrm>
-          <a:prstGeom prst="rect">
-            <a:avLst>
-              <a:gd name="adj" fmla="val 12000"/>
-            </a:avLst>
-          </a:prstGeom>
-          <a:solidFill>
-            <a:srgbClr val="EEF2FF"/>
-          </a:solidFill>
-          <a:ln w="12700">
-            <a:solidFill>
-              <a:srgbClr val="6366F1"/>
-            </a:solidFill>
-            <a:prstDash val="solid"/>
-          </a:ln>
-          <a:effectLst>
-            <a:outerShdw sx="100000" sy="100000" kx="0" ky="0" algn="bl" rotWithShape="0" blurRad="101600" dist="38100" dir="8100000">
-              <a:srgbClr val="000000">
-                <a:alpha val="12000"/>
-              </a:srgbClr>
-            </a:outerShdw>
-          </a:effectLst>
-        </p:spPr>
-      </p:sp>
-      <p:sp>
-        <p:nvSpPr>
-          <p:cNvPr id="36" name="Text 34"/>
-          <p:cNvSpPr/>
-          <p:nvPr/>
-        </p:nvSpPr>
-        <p:spPr>
-          <a:xfrm>
-            <a:off x="365760" y="4370832"/>
-            <a:ext cx="2011680" cy="457200"/>
-          </a:xfrm>
-          <a:prstGeom prst="rect">
-            <a:avLst/>
-          </a:prstGeom>
-          <a:noFill/>
-          <a:ln/>
-        </p:spPr>
-        <p:txBody>
-          <a:bodyPr wrap="square" lIns="0" tIns="0" rIns="0" bIns="0" rtlCol="0" anchor="ctr"/>
-          <a:lstStyle/>
-          <a:p>
-            <a:pPr algn="ctr" indent="0" marL="0">
-              <a:buNone/>
-            </a:pPr>
-            <a:r>
-              <a:rPr lang="en-US" sz="1200" b="1" dirty="0">
-                <a:solidFill>
-                  <a:srgbClr val="4338CA"/>
-                </a:solidFill>
-                <a:latin typeface="Trebuchet MS" pitchFamily="34" charset="0"/>
-                <a:ea typeface="Trebuchet MS" pitchFamily="34" charset="-122"/>
-                <a:cs typeface="Trebuchet MS" pitchFamily="34" charset="-120"/>
-              </a:rPr>
-              <a:t>forklift</a:t>
-            </a:r>
-            <a:endParaRPr lang="en-US" sz="1200" dirty="0"/>
-          </a:p>
-        </p:txBody>
-      </p:sp>
-      <p:sp>
-        <p:nvSpPr>
-          <p:cNvPr id="37" name="Shape 35"/>
-          <p:cNvSpPr/>
-          <p:nvPr/>
-        </p:nvSpPr>
-        <p:spPr>
-          <a:xfrm>
-            <a:off x="2514600" y="4370832"/>
-            <a:ext cx="6263640" cy="457200"/>
-          </a:xfrm>
-          <a:prstGeom prst="rect">
-            <a:avLst>
-              <a:gd name="adj" fmla="val 12000"/>
-            </a:avLst>
-          </a:prstGeom>
-          <a:solidFill>
-            <a:srgbClr val="F8FAFC"/>
-          </a:solidFill>
-          <a:ln w="12700">
-            <a:solidFill>
-              <a:srgbClr val="E2E8F0"/>
-            </a:solidFill>
-            <a:prstDash val="solid"/>
-          </a:ln>
-        </p:spPr>
-      </p:sp>
-      <p:sp>
-        <p:nvSpPr>
-          <p:cNvPr id="38" name="Text 36"/>
-          <p:cNvSpPr/>
-          <p:nvPr/>
-        </p:nvSpPr>
-        <p:spPr>
-          <a:xfrm>
-            <a:off x="2651760" y="4370832"/>
-            <a:ext cx="6035040" cy="457200"/>
-          </a:xfrm>
-          <a:prstGeom prst="rect">
-            <a:avLst/>
-          </a:prstGeom>
-          <a:noFill/>
-          <a:ln/>
-        </p:spPr>
-        <p:txBody>
-          <a:bodyPr wrap="square" rtlCol="0" anchor="ctr"/>
-          <a:lstStyle/>
-          <a:p>
-            <a:pPr algn="l" indent="0" marL="0">
-              <a:buNone/>
-            </a:pPr>
-            <a:r>
-              <a:rPr lang="en-US" sz="1200" dirty="0">
-                <a:solidFill>
-                  <a:srgbClr val="0F172A"/>
-                </a:solidFill>
-                <a:latin typeface="Calibri" pitchFamily="34" charset="0"/>
-                <a:ea typeface="Calibri" pitchFamily="34" charset="-122"/>
-                <a:cs typeface="Calibri" pitchFamily="34" charset="-120"/>
-              </a:rPr>
-              <a:t>The action of picking something up or raising it.</a:t>
+              <a:t>to raise something up, or a machine that carries people between floors</a:t>
             </a:r>
             <a:endParaRPr lang="en-US" sz="1200" dirty="0"/>
           </a:p>
@@ -40444,7 +37738,7 @@
                 <a:ea typeface="Calibri" pitchFamily="34" charset="-122"/>
                 <a:cs typeface="Calibri" pitchFamily="34" charset="-120"/>
               </a:rPr>
-              <a:t>Word Labs  •  wordlabs.app  •  Root: 'lift' = to raise or elevate</a:t>
+              <a:t>Word Labs  •  wordlabs.app  •  Root: 'lift' = to raise; to pick up</a:t>
             </a:r>
             <a:endParaRPr lang="en-US" sz="800" dirty="0"/>
           </a:p>
@@ -40647,7 +37941,7 @@
                 <a:ea typeface="Calibri" pitchFamily="34" charset="-122"/>
                 <a:cs typeface="Calibri" pitchFamily="34" charset="-120"/>
               </a:rPr>
-              <a:t>The workers used a forklift to move the heavy boxes to the top shelf in the warehouse.</a:t>
+              <a:t>We took the lift to the tenth floor of the building.</a:t>
             </a:r>
             <a:endParaRPr lang="en-US" sz="1500" dirty="0"/>
           </a:p>
@@ -40811,7 +38105,7 @@
                 <a:ea typeface="Calibri" pitchFamily="34" charset="-122"/>
                 <a:cs typeface="Calibri" pitchFamily="34" charset="-120"/>
               </a:rPr>
-              <a:t>The rescue team organised an airlift to bring supplies to the flooded town.</a:t>
+              <a:t>He lifts weights every morning before school.</a:t>
             </a:r>
             <a:endParaRPr lang="en-US" sz="1500" dirty="0"/>
           </a:p>
@@ -40975,7 +38269,7 @@
                 <a:ea typeface="Calibri" pitchFamily="34" charset="-122"/>
                 <a:cs typeface="Calibri" pitchFamily="34" charset="-120"/>
               </a:rPr>
-              <a:t>We all cheered at liftoff as the rocket launched into the clear blue sky.</a:t>
+              <a:t>She lifted the heavy box onto the shelf.</a:t>
             </a:r>
             <a:endParaRPr lang="en-US" sz="1500" dirty="0"/>
           </a:p>
